--- a/docs/ATL-13.pptx
+++ b/docs/ATL-13.pptx
@@ -1257,6 +1257,64 @@
 </file>
 
 <file path=ppt/notesSlides/notesSlide6.xml><?xml version="1.0" encoding="utf-8"?>
+<p:notes xmlns:a="http://schemas.openxmlformats.org/drawingml/2006/main" xmlns:r="http://schemas.openxmlformats.org/officeDocument/2006/relationships" xmlns:p="http://schemas.openxmlformats.org/presentationml/2006/main">
+  <p:cSld>
+    <p:spTree>
+      <p:nvGrpSpPr>
+        <p:cNvPr id="1" name=""/>
+        <p:cNvGrpSpPr/>
+        <p:nvPr/>
+      </p:nvGrpSpPr>
+      <p:grpSpPr>
+        <a:xfrm>
+          <a:off x="0" y="0"/>
+          <a:ext cx="0" cy="0"/>
+          <a:chOff x="0" y="0"/>
+          <a:chExt cx="0" cy="0"/>
+        </a:xfrm>
+      </p:grpSpPr>
+      <p:sp>
+        <p:nvSpPr>
+          <p:cNvPr id="2" name="Slide Image Placeholder 1"/>
+          <p:cNvSpPr>
+            <a:spLocks noGrp="1" noRot="1" noChangeAspect="1"/>
+          </p:cNvSpPr>
+          <p:nvPr>
+            <p:ph type="sldImg" idx="2"/>
+          </p:nvPr>
+        </p:nvSpPr>
+        <p:spPr/>
+      </p:sp>
+      <p:sp>
+        <p:nvSpPr>
+          <p:cNvPr id="3" name="Notes Placeholder 2"/>
+          <p:cNvSpPr>
+            <a:spLocks noGrp="1"/>
+          </p:cNvSpPr>
+          <p:nvPr>
+            <p:ph type="body" idx="1"/>
+          </p:nvPr>
+        </p:nvSpPr>
+        <p:spPr/>
+        <p:txBody>
+          <a:bodyPr/>
+          <a:lstStyle/>
+          <a:p>
+            <a:r>
+              <a:t>Our user is the city's economic-development officer in the anchor-closure track: an employer has announced it leaves in 90 days, there is a $50,000 fund, and nobody has applied yet. The officer clicks the closing employer, sets the budget and an assumption about what a grant changes. The agent walks the graph to the shops that lose weekday trade and then backward to their suppliers, and the map shows every path. Hovering a business gives its grant, what it protects and why it beat the runner-up. The officer can change the assumption and rerun, then export a grant memo that states its assumptions and which evidence is modeled. The change: help arrives inside the 90-day window instead of after closures, and every dollar comes with a case the officer can defend.</a:t>
+            </a:r>
+          </a:p>
+        </p:txBody>
+      </p:sp>
+    </p:spTree>
+  </p:cSld>
+  <p:clrMapOvr>
+    <a:masterClrMapping/>
+  </p:clrMapOvr>
+</p:notes>
+</file>
+
+<file path=ppt/notesSlides/notesSlide7.xml><?xml version="1.0" encoding="utf-8"?>
 <p:notes xmlns:a="http://schemas.openxmlformats.org/drawingml/2006/main" xmlns:r="http://schemas.openxmlformats.org/officeDocument/2006/relationships" xmlns:p="http://schemas.openxmlformats.org/presentationml/2006/main" showMasterSp="0" showMasterPhAnim="0">
   <p:cSld>
     <p:spTree>
@@ -1360,7 +1418,7 @@
 </p:notes>
 </file>
 
-<file path=ppt/notesSlides/notesSlide7.xml><?xml version="1.0" encoding="utf-8"?>
+<file path=ppt/notesSlides/notesSlide8.xml><?xml version="1.0" encoding="utf-8"?>
 <p:notes xmlns:a="http://schemas.openxmlformats.org/drawingml/2006/main" xmlns:r="http://schemas.openxmlformats.org/officeDocument/2006/relationships" xmlns:p="http://schemas.openxmlformats.org/presentationml/2006/main" showMasterSp="0" showMasterPhAnim="0">
   <p:cSld>
     <p:spTree>
@@ -1464,7 +1522,7 @@
 </p:notes>
 </file>
 
-<file path=ppt/notesSlides/notesSlide8.xml><?xml version="1.0" encoding="utf-8"?>
+<file path=ppt/notesSlides/notesSlide9.xml><?xml version="1.0" encoding="utf-8"?>
 <p:notes xmlns:a="http://schemas.openxmlformats.org/drawingml/2006/main" xmlns:r="http://schemas.openxmlformats.org/officeDocument/2006/relationships" xmlns:p="http://schemas.openxmlformats.org/presentationml/2006/main">
   <p:cSld>
     <p:spTree>
@@ -18666,6 +18724,1285 @@
           </a:p>
         </p:txBody>
       </p:sp>
+      <p:sp>
+        <p:nvSpPr>
+          <p:cNvPr id="3" name="Title"/>
+          <p:cNvSpPr txBox="1"/>
+          <p:nvPr/>
+        </p:nvSpPr>
+        <p:spPr>
+          <a:xfrm>
+            <a:off x="347472" y="237744"/>
+            <a:ext cx="8430768" cy="393192"/>
+          </a:xfrm>
+          <a:prstGeom prst="rect">
+            <a:avLst/>
+          </a:prstGeom>
+          <a:noFill/>
+        </p:spPr>
+        <p:txBody>
+          <a:bodyPr wrap="square" lIns="0" tIns="0" rIns="0" bIns="0" anchor="t">
+            <a:spAutoFit/>
+          </a:bodyPr>
+          <a:lstStyle/>
+          <a:p>
+            <a:r>
+              <a:rPr sz="2550" b="1">
+                <a:solidFill>
+                  <a:srgbClr val="FFFFFF"/>
+                </a:solidFill>
+                <a:latin typeface="Calibri"/>
+              </a:rPr>
+              <a:t>From a closure notice to funded grants, before anyone applies</a:t>
+            </a:r>
+          </a:p>
+        </p:txBody>
+      </p:sp>
+      <p:sp>
+        <p:nvSpPr>
+          <p:cNvPr id="4" name="Subtitle"/>
+          <p:cNvSpPr txBox="1"/>
+          <p:nvPr/>
+        </p:nvSpPr>
+        <p:spPr>
+          <a:xfrm>
+            <a:off x="347472" y="685800"/>
+            <a:ext cx="8430768" cy="164592"/>
+          </a:xfrm>
+          <a:prstGeom prst="rect">
+            <a:avLst/>
+          </a:prstGeom>
+          <a:noFill/>
+        </p:spPr>
+        <p:txBody>
+          <a:bodyPr wrap="square" lIns="0" tIns="0" rIns="0" bIns="0" anchor="t">
+            <a:spAutoFit/>
+          </a:bodyPr>
+          <a:lstStyle/>
+          <a:p>
+            <a:r>
+              <a:rPr sz="1050" b="0">
+                <a:solidFill>
+                  <a:srgbClr val="B8C4C6"/>
+                </a:solidFill>
+                <a:latin typeface="Calibri"/>
+              </a:rPr>
+              <a:t>Anchor-closure track · our user: the city's economic-development officer · 90 days' notice, $50,000, and no applications yet</a:t>
+            </a:r>
+          </a:p>
+        </p:txBody>
+      </p:sp>
+      <p:sp>
+        <p:nvSpPr>
+          <p:cNvPr id="5" name="How the officer uses it"/>
+          <p:cNvSpPr/>
+          <p:nvPr/>
+        </p:nvSpPr>
+        <p:spPr>
+          <a:xfrm>
+            <a:off x="347472" y="1060704"/>
+            <a:ext cx="4846320" cy="3127248"/>
+          </a:xfrm>
+          <a:prstGeom prst="roundRect">
+            <a:avLst>
+              <a:gd name="adj" fmla="val 4000"/>
+            </a:avLst>
+          </a:prstGeom>
+          <a:solidFill>
+            <a:srgbClr val="E3EFED"/>
+          </a:solidFill>
+          <a:ln>
+            <a:noFill/>
+          </a:ln>
+          <a:effectLst/>
+        </p:spPr>
+        <p:style>
+          <a:lnRef idx="1">
+            <a:schemeClr val="accent1"/>
+          </a:lnRef>
+          <a:fillRef idx="3">
+            <a:schemeClr val="accent1"/>
+          </a:fillRef>
+          <a:effectRef idx="2">
+            <a:schemeClr val="accent1"/>
+          </a:effectRef>
+          <a:fontRef idx="minor">
+            <a:schemeClr val="lt1"/>
+          </a:fontRef>
+        </p:style>
+        <p:txBody>
+          <a:bodyPr rtlCol="0" anchor="ctr"/>
+          <a:lstStyle/>
+          <a:p>
+            <a:pPr algn="ctr"/>
+            <a:endParaRPr/>
+          </a:p>
+        </p:txBody>
+      </p:sp>
+      <p:sp>
+        <p:nvSpPr>
+          <p:cNvPr id="6" name="Steps heading"/>
+          <p:cNvSpPr txBox="1"/>
+          <p:nvPr/>
+        </p:nvSpPr>
+        <p:spPr>
+          <a:xfrm>
+            <a:off x="512064" y="1152144"/>
+            <a:ext cx="4572000" cy="201168"/>
+          </a:xfrm>
+          <a:prstGeom prst="rect">
+            <a:avLst/>
+          </a:prstGeom>
+          <a:noFill/>
+        </p:spPr>
+        <p:txBody>
+          <a:bodyPr wrap="square" lIns="0" tIns="0" rIns="0" bIns="0" anchor="t">
+            <a:spAutoFit/>
+          </a:bodyPr>
+          <a:lstStyle/>
+          <a:p>
+            <a:r>
+              <a:rPr sz="1125" b="1">
+                <a:solidFill>
+                  <a:srgbClr val="12343B"/>
+                </a:solidFill>
+                <a:latin typeface="Calibri"/>
+              </a:rPr>
+              <a:t>How the officer uses it</a:t>
+            </a:r>
+          </a:p>
+        </p:txBody>
+      </p:sp>
+      <p:sp>
+        <p:nvSpPr>
+          <p:cNvPr id="7" name="Step 1"/>
+          <p:cNvSpPr/>
+          <p:nvPr/>
+        </p:nvSpPr>
+        <p:spPr>
+          <a:xfrm>
+            <a:off x="475488" y="1463040"/>
+            <a:ext cx="4590288" cy="576072"/>
+          </a:xfrm>
+          <a:prstGeom prst="roundRect">
+            <a:avLst>
+              <a:gd name="adj" fmla="val 8000"/>
+            </a:avLst>
+          </a:prstGeom>
+          <a:solidFill>
+            <a:srgbClr val="FFFFFF"/>
+          </a:solidFill>
+          <a:ln>
+            <a:noFill/>
+          </a:ln>
+          <a:effectLst/>
+        </p:spPr>
+        <p:style>
+          <a:lnRef idx="1">
+            <a:schemeClr val="accent1"/>
+          </a:lnRef>
+          <a:fillRef idx="3">
+            <a:schemeClr val="accent1"/>
+          </a:fillRef>
+          <a:effectRef idx="2">
+            <a:schemeClr val="accent1"/>
+          </a:effectRef>
+          <a:fontRef idx="minor">
+            <a:schemeClr val="lt1"/>
+          </a:fontRef>
+        </p:style>
+        <p:txBody>
+          <a:bodyPr rtlCol="0" anchor="ctr"/>
+          <a:lstStyle/>
+          <a:p>
+            <a:pPr algn="ctr"/>
+            <a:endParaRPr/>
+          </a:p>
+        </p:txBody>
+      </p:sp>
+      <p:sp>
+        <p:nvSpPr>
+          <p:cNvPr id="8" name="Step 1 number"/>
+          <p:cNvSpPr/>
+          <p:nvPr/>
+        </p:nvSpPr>
+        <p:spPr>
+          <a:xfrm>
+            <a:off x="585216" y="1613916"/>
+            <a:ext cx="274320" cy="274320"/>
+          </a:xfrm>
+          <a:prstGeom prst="ellipse">
+            <a:avLst/>
+          </a:prstGeom>
+          <a:solidFill>
+            <a:srgbClr val="1F6F6B"/>
+          </a:solidFill>
+          <a:ln>
+            <a:noFill/>
+          </a:ln>
+          <a:effectLst/>
+        </p:spPr>
+        <p:style>
+          <a:lnRef idx="1">
+            <a:schemeClr val="accent1"/>
+          </a:lnRef>
+          <a:fillRef idx="3">
+            <a:schemeClr val="accent1"/>
+          </a:fillRef>
+          <a:effectRef idx="2">
+            <a:schemeClr val="accent1"/>
+          </a:effectRef>
+          <a:fontRef idx="minor">
+            <a:schemeClr val="lt1"/>
+          </a:fontRef>
+        </p:style>
+        <p:txBody>
+          <a:bodyPr lIns="0" tIns="0" rIns="0" bIns="0" rtlCol="0" anchor="ctr"/>
+          <a:lstStyle/>
+          <a:p>
+            <a:pPr algn="ctr"/>
+            <a:r>
+              <a:rPr sz="1050" b="1">
+                <a:solidFill>
+                  <a:srgbClr val="FFFFFF"/>
+                </a:solidFill>
+                <a:latin typeface="Calibri"/>
+              </a:rPr>
+              <a:t>1</a:t>
+            </a:r>
+          </a:p>
+        </p:txBody>
+      </p:sp>
+      <p:sp>
+        <p:nvSpPr>
+          <p:cNvPr id="9" name="Step 1 text"/>
+          <p:cNvSpPr txBox="1"/>
+          <p:nvPr/>
+        </p:nvSpPr>
+        <p:spPr>
+          <a:xfrm>
+            <a:off x="987552" y="1527048"/>
+            <a:ext cx="3986784" cy="457200"/>
+          </a:xfrm>
+          <a:prstGeom prst="rect">
+            <a:avLst/>
+          </a:prstGeom>
+          <a:noFill/>
+        </p:spPr>
+        <p:txBody>
+          <a:bodyPr wrap="square" lIns="0" tIns="0" rIns="0" bIns="0" anchor="ctr">
+            <a:spAutoFit/>
+          </a:bodyPr>
+          <a:lstStyle/>
+          <a:p>
+            <a:r>
+              <a:rPr sz="1050" b="1">
+                <a:solidFill>
+                  <a:srgbClr val="12343B"/>
+                </a:solidFill>
+                <a:latin typeface="Calibri"/>
+              </a:rPr>
+              <a:t>Name the closure</a:t>
+            </a:r>
+          </a:p>
+          <a:p>
+            <a:pPr>
+              <a:spcBef>
+                <a:spcPts val="200"/>
+              </a:spcBef>
+            </a:pPr>
+            <a:r>
+              <a:rPr sz="900" b="0">
+                <a:solidFill>
+                  <a:srgbClr val="4A5A5D"/>
+                </a:solidFill>
+                <a:latin typeface="Calibri"/>
+              </a:rPr>
+              <a:t>Click the closing employer on the map. Set the budget and what a grant is assumed to change.</a:t>
+            </a:r>
+          </a:p>
+        </p:txBody>
+      </p:sp>
+      <p:sp>
+        <p:nvSpPr>
+          <p:cNvPr id="10" name="Step 2"/>
+          <p:cNvSpPr/>
+          <p:nvPr/>
+        </p:nvSpPr>
+        <p:spPr>
+          <a:xfrm>
+            <a:off x="475488" y="2130552"/>
+            <a:ext cx="4590288" cy="576072"/>
+          </a:xfrm>
+          <a:prstGeom prst="roundRect">
+            <a:avLst>
+              <a:gd name="adj" fmla="val 8000"/>
+            </a:avLst>
+          </a:prstGeom>
+          <a:solidFill>
+            <a:srgbClr val="FFFFFF"/>
+          </a:solidFill>
+          <a:ln>
+            <a:noFill/>
+          </a:ln>
+          <a:effectLst/>
+        </p:spPr>
+        <p:style>
+          <a:lnRef idx="1">
+            <a:schemeClr val="accent1"/>
+          </a:lnRef>
+          <a:fillRef idx="3">
+            <a:schemeClr val="accent1"/>
+          </a:fillRef>
+          <a:effectRef idx="2">
+            <a:schemeClr val="accent1"/>
+          </a:effectRef>
+          <a:fontRef idx="minor">
+            <a:schemeClr val="lt1"/>
+          </a:fontRef>
+        </p:style>
+        <p:txBody>
+          <a:bodyPr rtlCol="0" anchor="ctr"/>
+          <a:lstStyle/>
+          <a:p>
+            <a:pPr algn="ctr"/>
+            <a:endParaRPr/>
+          </a:p>
+        </p:txBody>
+      </p:sp>
+      <p:sp>
+        <p:nvSpPr>
+          <p:cNvPr id="11" name="Step 2 number"/>
+          <p:cNvSpPr/>
+          <p:nvPr/>
+        </p:nvSpPr>
+        <p:spPr>
+          <a:xfrm>
+            <a:off x="585216" y="2281428"/>
+            <a:ext cx="274320" cy="274320"/>
+          </a:xfrm>
+          <a:prstGeom prst="ellipse">
+            <a:avLst/>
+          </a:prstGeom>
+          <a:solidFill>
+            <a:srgbClr val="1F6F6B"/>
+          </a:solidFill>
+          <a:ln>
+            <a:noFill/>
+          </a:ln>
+          <a:effectLst/>
+        </p:spPr>
+        <p:style>
+          <a:lnRef idx="1">
+            <a:schemeClr val="accent1"/>
+          </a:lnRef>
+          <a:fillRef idx="3">
+            <a:schemeClr val="accent1"/>
+          </a:fillRef>
+          <a:effectRef idx="2">
+            <a:schemeClr val="accent1"/>
+          </a:effectRef>
+          <a:fontRef idx="minor">
+            <a:schemeClr val="lt1"/>
+          </a:fontRef>
+        </p:style>
+        <p:txBody>
+          <a:bodyPr lIns="0" tIns="0" rIns="0" bIns="0" rtlCol="0" anchor="ctr"/>
+          <a:lstStyle/>
+          <a:p>
+            <a:pPr algn="ctr"/>
+            <a:r>
+              <a:rPr sz="1050" b="1">
+                <a:solidFill>
+                  <a:srgbClr val="FFFFFF"/>
+                </a:solidFill>
+                <a:latin typeface="Calibri"/>
+              </a:rPr>
+              <a:t>2</a:t>
+            </a:r>
+          </a:p>
+        </p:txBody>
+      </p:sp>
+      <p:sp>
+        <p:nvSpPr>
+          <p:cNvPr id="12" name="Step 2 text"/>
+          <p:cNvSpPr txBox="1"/>
+          <p:nvPr/>
+        </p:nvSpPr>
+        <p:spPr>
+          <a:xfrm>
+            <a:off x="987552" y="2194560"/>
+            <a:ext cx="3986784" cy="457200"/>
+          </a:xfrm>
+          <a:prstGeom prst="rect">
+            <a:avLst/>
+          </a:prstGeom>
+          <a:noFill/>
+        </p:spPr>
+        <p:txBody>
+          <a:bodyPr wrap="square" lIns="0" tIns="0" rIns="0" bIns="0" anchor="ctr">
+            <a:spAutoFit/>
+          </a:bodyPr>
+          <a:lstStyle/>
+          <a:p>
+            <a:r>
+              <a:rPr sz="1050" b="1">
+                <a:solidFill>
+                  <a:srgbClr val="12343B"/>
+                </a:solidFill>
+                <a:latin typeface="Calibri"/>
+              </a:rPr>
+              <a:t>See who is exposed</a:t>
+            </a:r>
+          </a:p>
+          <a:p>
+            <a:pPr>
+              <a:spcBef>
+                <a:spcPts val="200"/>
+              </a:spcBef>
+            </a:pPr>
+            <a:r>
+              <a:rPr sz="900" b="0">
+                <a:solidFill>
+                  <a:srgbClr val="4A5A5D"/>
+                </a:solidFill>
+                <a:latin typeface="Calibri"/>
+              </a:rPr>
+              <a:t>The map lights up the shops losing weekday trade, then the suppliers behind them, every path drawn.</a:t>
+            </a:r>
+          </a:p>
+        </p:txBody>
+      </p:sp>
+      <p:sp>
+        <p:nvSpPr>
+          <p:cNvPr id="13" name="Step 3"/>
+          <p:cNvSpPr/>
+          <p:nvPr/>
+        </p:nvSpPr>
+        <p:spPr>
+          <a:xfrm>
+            <a:off x="475488" y="2798064"/>
+            <a:ext cx="4590288" cy="576072"/>
+          </a:xfrm>
+          <a:prstGeom prst="roundRect">
+            <a:avLst>
+              <a:gd name="adj" fmla="val 8000"/>
+            </a:avLst>
+          </a:prstGeom>
+          <a:solidFill>
+            <a:srgbClr val="FFFFFF"/>
+          </a:solidFill>
+          <a:ln>
+            <a:noFill/>
+          </a:ln>
+          <a:effectLst/>
+        </p:spPr>
+        <p:style>
+          <a:lnRef idx="1">
+            <a:schemeClr val="accent1"/>
+          </a:lnRef>
+          <a:fillRef idx="3">
+            <a:schemeClr val="accent1"/>
+          </a:fillRef>
+          <a:effectRef idx="2">
+            <a:schemeClr val="accent1"/>
+          </a:effectRef>
+          <a:fontRef idx="minor">
+            <a:schemeClr val="lt1"/>
+          </a:fontRef>
+        </p:style>
+        <p:txBody>
+          <a:bodyPr rtlCol="0" anchor="ctr"/>
+          <a:lstStyle/>
+          <a:p>
+            <a:pPr algn="ctr"/>
+            <a:endParaRPr/>
+          </a:p>
+        </p:txBody>
+      </p:sp>
+      <p:sp>
+        <p:nvSpPr>
+          <p:cNvPr id="14" name="Step 3 number"/>
+          <p:cNvSpPr/>
+          <p:nvPr/>
+        </p:nvSpPr>
+        <p:spPr>
+          <a:xfrm>
+            <a:off x="585216" y="2948940"/>
+            <a:ext cx="274320" cy="274320"/>
+          </a:xfrm>
+          <a:prstGeom prst="ellipse">
+            <a:avLst/>
+          </a:prstGeom>
+          <a:solidFill>
+            <a:srgbClr val="C27C00"/>
+          </a:solidFill>
+          <a:ln>
+            <a:noFill/>
+          </a:ln>
+          <a:effectLst/>
+        </p:spPr>
+        <p:style>
+          <a:lnRef idx="1">
+            <a:schemeClr val="accent1"/>
+          </a:lnRef>
+          <a:fillRef idx="3">
+            <a:schemeClr val="accent1"/>
+          </a:fillRef>
+          <a:effectRef idx="2">
+            <a:schemeClr val="accent1"/>
+          </a:effectRef>
+          <a:fontRef idx="minor">
+            <a:schemeClr val="lt1"/>
+          </a:fontRef>
+        </p:style>
+        <p:txBody>
+          <a:bodyPr lIns="0" tIns="0" rIns="0" bIns="0" rtlCol="0" anchor="ctr"/>
+          <a:lstStyle/>
+          <a:p>
+            <a:pPr algn="ctr"/>
+            <a:r>
+              <a:rPr sz="1050" b="1">
+                <a:solidFill>
+                  <a:srgbClr val="FFFFFF"/>
+                </a:solidFill>
+                <a:latin typeface="Calibri"/>
+              </a:rPr>
+              <a:t>3</a:t>
+            </a:r>
+          </a:p>
+        </p:txBody>
+      </p:sp>
+      <p:sp>
+        <p:nvSpPr>
+          <p:cNvPr id="15" name="Step 3 text"/>
+          <p:cNvSpPr txBox="1"/>
+          <p:nvPr/>
+        </p:nvSpPr>
+        <p:spPr>
+          <a:xfrm>
+            <a:off x="987552" y="2862072"/>
+            <a:ext cx="3986784" cy="457200"/>
+          </a:xfrm>
+          <a:prstGeom prst="rect">
+            <a:avLst/>
+          </a:prstGeom>
+          <a:noFill/>
+        </p:spPr>
+        <p:txBody>
+          <a:bodyPr wrap="square" lIns="0" tIns="0" rIns="0" bIns="0" anchor="ctr">
+            <a:spAutoFit/>
+          </a:bodyPr>
+          <a:lstStyle/>
+          <a:p>
+            <a:r>
+              <a:rPr sz="1050" b="1">
+                <a:solidFill>
+                  <a:srgbClr val="12343B"/>
+                </a:solidFill>
+                <a:latin typeface="Calibri"/>
+              </a:rPr>
+              <a:t>Question any decision</a:t>
+            </a:r>
+          </a:p>
+          <a:p>
+            <a:pPr>
+              <a:spcBef>
+                <a:spcPts val="200"/>
+              </a:spcBef>
+            </a:pPr>
+            <a:r>
+              <a:rPr sz="900" b="0">
+                <a:solidFill>
+                  <a:srgbClr val="4A5A5D"/>
+                </a:solidFill>
+                <a:latin typeface="Calibri"/>
+              </a:rPr>
+              <a:t>Hover a business for its grant, what it protects, and why it beat the runner-up.</a:t>
+            </a:r>
+          </a:p>
+        </p:txBody>
+      </p:sp>
+      <p:sp>
+        <p:nvSpPr>
+          <p:cNvPr id="16" name="Step 4"/>
+          <p:cNvSpPr/>
+          <p:nvPr/>
+        </p:nvSpPr>
+        <p:spPr>
+          <a:xfrm>
+            <a:off x="475488" y="3465576"/>
+            <a:ext cx="4590288" cy="576072"/>
+          </a:xfrm>
+          <a:prstGeom prst="roundRect">
+            <a:avLst>
+              <a:gd name="adj" fmla="val 8000"/>
+            </a:avLst>
+          </a:prstGeom>
+          <a:solidFill>
+            <a:srgbClr val="FFFFFF"/>
+          </a:solidFill>
+          <a:ln>
+            <a:noFill/>
+          </a:ln>
+          <a:effectLst/>
+        </p:spPr>
+        <p:style>
+          <a:lnRef idx="1">
+            <a:schemeClr val="accent1"/>
+          </a:lnRef>
+          <a:fillRef idx="3">
+            <a:schemeClr val="accent1"/>
+          </a:fillRef>
+          <a:effectRef idx="2">
+            <a:schemeClr val="accent1"/>
+          </a:effectRef>
+          <a:fontRef idx="minor">
+            <a:schemeClr val="lt1"/>
+          </a:fontRef>
+        </p:style>
+        <p:txBody>
+          <a:bodyPr rtlCol="0" anchor="ctr"/>
+          <a:lstStyle/>
+          <a:p>
+            <a:pPr algn="ctr"/>
+            <a:endParaRPr/>
+          </a:p>
+        </p:txBody>
+      </p:sp>
+      <p:sp>
+        <p:nvSpPr>
+          <p:cNvPr id="17" name="Step 4 number"/>
+          <p:cNvSpPr/>
+          <p:nvPr/>
+        </p:nvSpPr>
+        <p:spPr>
+          <a:xfrm>
+            <a:off x="585216" y="3616452"/>
+            <a:ext cx="274320" cy="274320"/>
+          </a:xfrm>
+          <a:prstGeom prst="ellipse">
+            <a:avLst/>
+          </a:prstGeom>
+          <a:solidFill>
+            <a:srgbClr val="1F6F6B"/>
+          </a:solidFill>
+          <a:ln>
+            <a:noFill/>
+          </a:ln>
+          <a:effectLst/>
+        </p:spPr>
+        <p:style>
+          <a:lnRef idx="1">
+            <a:schemeClr val="accent1"/>
+          </a:lnRef>
+          <a:fillRef idx="3">
+            <a:schemeClr val="accent1"/>
+          </a:fillRef>
+          <a:effectRef idx="2">
+            <a:schemeClr val="accent1"/>
+          </a:effectRef>
+          <a:fontRef idx="minor">
+            <a:schemeClr val="lt1"/>
+          </a:fontRef>
+        </p:style>
+        <p:txBody>
+          <a:bodyPr lIns="0" tIns="0" rIns="0" bIns="0" rtlCol="0" anchor="ctr"/>
+          <a:lstStyle/>
+          <a:p>
+            <a:pPr algn="ctr"/>
+            <a:r>
+              <a:rPr sz="1050" b="1">
+                <a:solidFill>
+                  <a:srgbClr val="FFFFFF"/>
+                </a:solidFill>
+                <a:latin typeface="Calibri"/>
+              </a:rPr>
+              <a:t>4</a:t>
+            </a:r>
+          </a:p>
+        </p:txBody>
+      </p:sp>
+      <p:sp>
+        <p:nvSpPr>
+          <p:cNvPr id="18" name="Step 4 text"/>
+          <p:cNvSpPr txBox="1"/>
+          <p:nvPr/>
+        </p:nvSpPr>
+        <p:spPr>
+          <a:xfrm>
+            <a:off x="987552" y="3529584"/>
+            <a:ext cx="3986784" cy="457200"/>
+          </a:xfrm>
+          <a:prstGeom prst="rect">
+            <a:avLst/>
+          </a:prstGeom>
+          <a:noFill/>
+        </p:spPr>
+        <p:txBody>
+          <a:bodyPr wrap="square" lIns="0" tIns="0" rIns="0" bIns="0" anchor="ctr">
+            <a:spAutoFit/>
+          </a:bodyPr>
+          <a:lstStyle/>
+          <a:p>
+            <a:r>
+              <a:rPr sz="1050" b="1">
+                <a:solidFill>
+                  <a:srgbClr val="12343B"/>
+                </a:solidFill>
+                <a:latin typeface="Calibri"/>
+              </a:rPr>
+              <a:t>Stress-test it, then take it to the meeting</a:t>
+            </a:r>
+          </a:p>
+          <a:p>
+            <a:pPr>
+              <a:spcBef>
+                <a:spcPts val="200"/>
+              </a:spcBef>
+            </a:pPr>
+            <a:r>
+              <a:rPr sz="900" b="0">
+                <a:solidFill>
+                  <a:srgbClr val="4A5A5D"/>
+                </a:solidFill>
+                <a:latin typeface="Calibri"/>
+              </a:rPr>
+              <a:t>Change the assumption and rerun. Export the grant memo, with assumptions and modeled evidence stated.</a:t>
+            </a:r>
+          </a:p>
+        </p:txBody>
+      </p:sp>
+      <p:sp>
+        <p:nvSpPr>
+          <p:cNvPr id="19" name="Outcomes heading"/>
+          <p:cNvSpPr txBox="1"/>
+          <p:nvPr/>
+        </p:nvSpPr>
+        <p:spPr>
+          <a:xfrm>
+            <a:off x="5413248" y="1097280"/>
+            <a:ext cx="3383280" cy="201168"/>
+          </a:xfrm>
+          <a:prstGeom prst="rect">
+            <a:avLst/>
+          </a:prstGeom>
+          <a:noFill/>
+        </p:spPr>
+        <p:txBody>
+          <a:bodyPr wrap="square" lIns="0" tIns="0" rIns="0" bIns="0" anchor="t">
+            <a:spAutoFit/>
+          </a:bodyPr>
+          <a:lstStyle/>
+          <a:p>
+            <a:r>
+              <a:rPr sz="1125" b="1">
+                <a:solidFill>
+                  <a:srgbClr val="FFFFFF"/>
+                </a:solidFill>
+                <a:latin typeface="Calibri"/>
+              </a:rPr>
+              <a:t>What changes for them</a:t>
+            </a:r>
+          </a:p>
+        </p:txBody>
+      </p:sp>
+      <p:sp>
+        <p:nvSpPr>
+          <p:cNvPr id="20" name="Outcome 1"/>
+          <p:cNvSpPr/>
+          <p:nvPr/>
+        </p:nvSpPr>
+        <p:spPr>
+          <a:xfrm>
+            <a:off x="5413248" y="1371600"/>
+            <a:ext cx="3383280" cy="630936"/>
+          </a:xfrm>
+          <a:prstGeom prst="roundRect">
+            <a:avLst>
+              <a:gd name="adj" fmla="val 8000"/>
+            </a:avLst>
+          </a:prstGeom>
+          <a:solidFill>
+            <a:srgbClr val="E3EFED"/>
+          </a:solidFill>
+          <a:ln>
+            <a:noFill/>
+          </a:ln>
+          <a:effectLst/>
+        </p:spPr>
+        <p:style>
+          <a:lnRef idx="1">
+            <a:schemeClr val="accent1"/>
+          </a:lnRef>
+          <a:fillRef idx="3">
+            <a:schemeClr val="accent1"/>
+          </a:fillRef>
+          <a:effectRef idx="2">
+            <a:schemeClr val="accent1"/>
+          </a:effectRef>
+          <a:fontRef idx="minor">
+            <a:schemeClr val="lt1"/>
+          </a:fontRef>
+        </p:style>
+        <p:txBody>
+          <a:bodyPr rtlCol="0" anchor="ctr"/>
+          <a:lstStyle/>
+          <a:p>
+            <a:pPr algn="ctr"/>
+            <a:endParaRPr/>
+          </a:p>
+        </p:txBody>
+      </p:sp>
+      <p:sp>
+        <p:nvSpPr>
+          <p:cNvPr id="21" name="Outcome 1 text"/>
+          <p:cNvSpPr txBox="1"/>
+          <p:nvPr/>
+        </p:nvSpPr>
+        <p:spPr>
+          <a:xfrm>
+            <a:off x="5522976" y="1426464"/>
+            <a:ext cx="3182112" cy="521207"/>
+          </a:xfrm>
+          <a:prstGeom prst="rect">
+            <a:avLst/>
+          </a:prstGeom>
+          <a:noFill/>
+        </p:spPr>
+        <p:txBody>
+          <a:bodyPr wrap="square" lIns="0" tIns="0" rIns="0" bIns="0" anchor="ctr">
+            <a:spAutoFit/>
+          </a:bodyPr>
+          <a:lstStyle/>
+          <a:p>
+            <a:r>
+              <a:rPr sz="1050" b="1">
+                <a:solidFill>
+                  <a:srgbClr val="1F6F6B"/>
+                </a:solidFill>
+                <a:latin typeface="Calibri"/>
+              </a:rPr>
+              <a:t>They reach people before the damage</a:t>
+            </a:r>
+          </a:p>
+          <a:p>
+            <a:pPr>
+              <a:spcBef>
+                <a:spcPts val="200"/>
+              </a:spcBef>
+            </a:pPr>
+            <a:r>
+              <a:rPr sz="900" b="0">
+                <a:solidFill>
+                  <a:srgbClr val="4A5A5D"/>
+                </a:solidFill>
+                <a:latin typeface="Calibri"/>
+              </a:rPr>
+              <a:t>The 90 days go to prevention, including suppliers that never served the office.</a:t>
+            </a:r>
+          </a:p>
+        </p:txBody>
+      </p:sp>
+      <p:sp>
+        <p:nvSpPr>
+          <p:cNvPr id="22" name="Outcome 2"/>
+          <p:cNvSpPr/>
+          <p:nvPr/>
+        </p:nvSpPr>
+        <p:spPr>
+          <a:xfrm>
+            <a:off x="5413248" y="2080260"/>
+            <a:ext cx="3383280" cy="630936"/>
+          </a:xfrm>
+          <a:prstGeom prst="roundRect">
+            <a:avLst>
+              <a:gd name="adj" fmla="val 8000"/>
+            </a:avLst>
+          </a:prstGeom>
+          <a:solidFill>
+            <a:srgbClr val="E3EFED"/>
+          </a:solidFill>
+          <a:ln>
+            <a:noFill/>
+          </a:ln>
+          <a:effectLst/>
+        </p:spPr>
+        <p:style>
+          <a:lnRef idx="1">
+            <a:schemeClr val="accent1"/>
+          </a:lnRef>
+          <a:fillRef idx="3">
+            <a:schemeClr val="accent1"/>
+          </a:fillRef>
+          <a:effectRef idx="2">
+            <a:schemeClr val="accent1"/>
+          </a:effectRef>
+          <a:fontRef idx="minor">
+            <a:schemeClr val="lt1"/>
+          </a:fontRef>
+        </p:style>
+        <p:txBody>
+          <a:bodyPr rtlCol="0" anchor="ctr"/>
+          <a:lstStyle/>
+          <a:p>
+            <a:pPr algn="ctr"/>
+            <a:endParaRPr/>
+          </a:p>
+        </p:txBody>
+      </p:sp>
+      <p:sp>
+        <p:nvSpPr>
+          <p:cNvPr id="23" name="Outcome 2 text"/>
+          <p:cNvSpPr txBox="1"/>
+          <p:nvPr/>
+        </p:nvSpPr>
+        <p:spPr>
+          <a:xfrm>
+            <a:off x="5522976" y="2135124"/>
+            <a:ext cx="3182112" cy="521207"/>
+          </a:xfrm>
+          <a:prstGeom prst="rect">
+            <a:avLst/>
+          </a:prstGeom>
+          <a:noFill/>
+        </p:spPr>
+        <p:txBody>
+          <a:bodyPr wrap="square" lIns="0" tIns="0" rIns="0" bIns="0" anchor="ctr">
+            <a:spAutoFit/>
+          </a:bodyPr>
+          <a:lstStyle/>
+          <a:p>
+            <a:r>
+              <a:rPr sz="1050" b="1">
+                <a:solidFill>
+                  <a:srgbClr val="1F6F6B"/>
+                </a:solidFill>
+                <a:latin typeface="Calibri"/>
+              </a:rPr>
+              <a:t>A case they can defend, not a score</a:t>
+            </a:r>
+          </a:p>
+          <a:p>
+            <a:pPr>
+              <a:spcBef>
+                <a:spcPts val="200"/>
+              </a:spcBef>
+            </a:pPr>
+            <a:r>
+              <a:rPr sz="900" b="0">
+                <a:solidFill>
+                  <a:srgbClr val="4A5A5D"/>
+                </a:solidFill>
+                <a:latin typeface="Calibri"/>
+              </a:rPr>
+              <a:t>Our tools compute every dollar; Gemini explains it. Paths shown, runner-up named.</a:t>
+            </a:r>
+          </a:p>
+        </p:txBody>
+      </p:sp>
+      <p:sp>
+        <p:nvSpPr>
+          <p:cNvPr id="24" name="Outcome 3"/>
+          <p:cNvSpPr/>
+          <p:nvPr/>
+        </p:nvSpPr>
+        <p:spPr>
+          <a:xfrm>
+            <a:off x="5413248" y="2788920"/>
+            <a:ext cx="3383280" cy="630936"/>
+          </a:xfrm>
+          <a:prstGeom prst="roundRect">
+            <a:avLst>
+              <a:gd name="adj" fmla="val 8000"/>
+            </a:avLst>
+          </a:prstGeom>
+          <a:solidFill>
+            <a:srgbClr val="E3EFED"/>
+          </a:solidFill>
+          <a:ln>
+            <a:noFill/>
+          </a:ln>
+          <a:effectLst/>
+        </p:spPr>
+        <p:style>
+          <a:lnRef idx="1">
+            <a:schemeClr val="accent1"/>
+          </a:lnRef>
+          <a:fillRef idx="3">
+            <a:schemeClr val="accent1"/>
+          </a:fillRef>
+          <a:effectRef idx="2">
+            <a:schemeClr val="accent1"/>
+          </a:effectRef>
+          <a:fontRef idx="minor">
+            <a:schemeClr val="lt1"/>
+          </a:fontRef>
+        </p:style>
+        <p:txBody>
+          <a:bodyPr rtlCol="0" anchor="ctr"/>
+          <a:lstStyle/>
+          <a:p>
+            <a:pPr algn="ctr"/>
+            <a:endParaRPr/>
+          </a:p>
+        </p:txBody>
+      </p:sp>
+      <p:sp>
+        <p:nvSpPr>
+          <p:cNvPr id="25" name="Outcome 3 text"/>
+          <p:cNvSpPr txBox="1"/>
+          <p:nvPr/>
+        </p:nvSpPr>
+        <p:spPr>
+          <a:xfrm>
+            <a:off x="5522976" y="2843784"/>
+            <a:ext cx="3182112" cy="521207"/>
+          </a:xfrm>
+          <a:prstGeom prst="rect">
+            <a:avLst/>
+          </a:prstGeom>
+          <a:noFill/>
+        </p:spPr>
+        <p:txBody>
+          <a:bodyPr wrap="square" lIns="0" tIns="0" rIns="0" bIns="0" anchor="ctr">
+            <a:spAutoFit/>
+          </a:bodyPr>
+          <a:lstStyle/>
+          <a:p>
+            <a:r>
+              <a:rPr sz="1050" b="1">
+                <a:solidFill>
+                  <a:srgbClr val="1F6F6B"/>
+                </a:solidFill>
+                <a:latin typeface="Calibri"/>
+              </a:rPr>
+              <a:t>Honest about what it cannot know</a:t>
+            </a:r>
+          </a:p>
+          <a:p>
+            <a:pPr>
+              <a:spcBef>
+                <a:spcPts val="200"/>
+              </a:spcBef>
+            </a:pPr>
+            <a:r>
+              <a:rPr sz="900" b="0">
+                <a:solidFill>
+                  <a:srgbClr val="4A5A5D"/>
+                </a:solidFill>
+                <a:latin typeface="Calibri"/>
+              </a:rPr>
+              <a:t>States what a grant is assumed to change and flags which links are modeled.</a:t>
+            </a:r>
+          </a:p>
+        </p:txBody>
+      </p:sp>
+      <p:sp>
+        <p:nvSpPr>
+          <p:cNvPr id="26" name="Outcome 4"/>
+          <p:cNvSpPr/>
+          <p:nvPr/>
+        </p:nvSpPr>
+        <p:spPr>
+          <a:xfrm>
+            <a:off x="5413248" y="3497580"/>
+            <a:ext cx="3383280" cy="630936"/>
+          </a:xfrm>
+          <a:prstGeom prst="roundRect">
+            <a:avLst>
+              <a:gd name="adj" fmla="val 8000"/>
+            </a:avLst>
+          </a:prstGeom>
+          <a:solidFill>
+            <a:srgbClr val="E3EFED"/>
+          </a:solidFill>
+          <a:ln>
+            <a:noFill/>
+          </a:ln>
+          <a:effectLst/>
+        </p:spPr>
+        <p:style>
+          <a:lnRef idx="1">
+            <a:schemeClr val="accent1"/>
+          </a:lnRef>
+          <a:fillRef idx="3">
+            <a:schemeClr val="accent1"/>
+          </a:fillRef>
+          <a:effectRef idx="2">
+            <a:schemeClr val="accent1"/>
+          </a:effectRef>
+          <a:fontRef idx="minor">
+            <a:schemeClr val="lt1"/>
+          </a:fontRef>
+        </p:style>
+        <p:txBody>
+          <a:bodyPr rtlCol="0" anchor="ctr"/>
+          <a:lstStyle/>
+          <a:p>
+            <a:pPr algn="ctr"/>
+            <a:endParaRPr/>
+          </a:p>
+        </p:txBody>
+      </p:sp>
+      <p:sp>
+        <p:nvSpPr>
+          <p:cNvPr id="27" name="Outcome 4 text"/>
+          <p:cNvSpPr txBox="1"/>
+          <p:nvPr/>
+        </p:nvSpPr>
+        <p:spPr>
+          <a:xfrm>
+            <a:off x="5522976" y="3552444"/>
+            <a:ext cx="3182112" cy="521207"/>
+          </a:xfrm>
+          <a:prstGeom prst="rect">
+            <a:avLst/>
+          </a:prstGeom>
+          <a:noFill/>
+        </p:spPr>
+        <p:txBody>
+          <a:bodyPr wrap="square" lIns="0" tIns="0" rIns="0" bIns="0" anchor="ctr">
+            <a:spAutoFit/>
+          </a:bodyPr>
+          <a:lstStyle/>
+          <a:p>
+            <a:r>
+              <a:rPr sz="1050" b="1">
+                <a:solidFill>
+                  <a:srgbClr val="1F6F6B"/>
+                </a:solidFill>
+                <a:latin typeface="Calibri"/>
+              </a:rPr>
+              <a:t>Fairer by design</a:t>
+            </a:r>
+          </a:p>
+          <a:p>
+            <a:pPr>
+              <a:spcBef>
+                <a:spcPts val="200"/>
+              </a:spcBef>
+            </a:pPr>
+            <a:r>
+              <a:rPr sz="900" b="0">
+                <a:solidFill>
+                  <a:srgbClr val="4A5A5D"/>
+                </a:solidFill>
+                <a:latin typeface="Calibri"/>
+              </a:rPr>
+              <a:t>It does not just fund the biggest hub, and audits who benefits by neighborhood.</a:t>
+            </a:r>
+          </a:p>
+        </p:txBody>
+      </p:sp>
+      <p:sp>
+        <p:nvSpPr>
+          <p:cNvPr id="28" name="Before and after"/>
+          <p:cNvSpPr/>
+          <p:nvPr/>
+        </p:nvSpPr>
+        <p:spPr>
+          <a:xfrm>
+            <a:off x="347472" y="4334256"/>
+            <a:ext cx="8458200" cy="530352"/>
+          </a:xfrm>
+          <a:prstGeom prst="roundRect">
+            <a:avLst>
+              <a:gd name="adj" fmla="val 10000"/>
+            </a:avLst>
+          </a:prstGeom>
+          <a:solidFill>
+            <a:srgbClr val="1F6F6B"/>
+          </a:solidFill>
+          <a:ln>
+            <a:noFill/>
+          </a:ln>
+          <a:effectLst/>
+        </p:spPr>
+        <p:style>
+          <a:lnRef idx="1">
+            <a:schemeClr val="accent1"/>
+          </a:lnRef>
+          <a:fillRef idx="3">
+            <a:schemeClr val="accent1"/>
+          </a:fillRef>
+          <a:effectRef idx="2">
+            <a:schemeClr val="accent1"/>
+          </a:effectRef>
+          <a:fontRef idx="minor">
+            <a:schemeClr val="lt1"/>
+          </a:fontRef>
+        </p:style>
+        <p:txBody>
+          <a:bodyPr rtlCol="0" anchor="ctr"/>
+          <a:lstStyle/>
+          <a:p>
+            <a:pPr algn="ctr"/>
+            <a:endParaRPr/>
+          </a:p>
+        </p:txBody>
+      </p:sp>
+      <p:sp>
+        <p:nvSpPr>
+          <p:cNvPr id="29" name="Banner text"/>
+          <p:cNvSpPr txBox="1"/>
+          <p:nvPr/>
+        </p:nvSpPr>
+        <p:spPr>
+          <a:xfrm>
+            <a:off x="512064" y="4389120"/>
+            <a:ext cx="8129016" cy="420624"/>
+          </a:xfrm>
+          <a:prstGeom prst="rect">
+            <a:avLst/>
+          </a:prstGeom>
+          <a:noFill/>
+        </p:spPr>
+        <p:txBody>
+          <a:bodyPr wrap="square" lIns="0" tIns="0" rIns="0" bIns="0" anchor="ctr">
+            <a:spAutoFit/>
+          </a:bodyPr>
+          <a:lstStyle/>
+          <a:p>
+            <a:r>
+              <a:rPr sz="1050" b="1">
+                <a:solidFill>
+                  <a:srgbClr val="B8D4D0"/>
+                </a:solidFill>
+                <a:latin typeface="Calibri"/>
+              </a:rPr>
+              <a:t>Today: </a:t>
+            </a:r>
+            <a:r>
+              <a:rPr sz="1050" b="0">
+                <a:solidFill>
+                  <a:srgbClr val="FFFFFF"/>
+                </a:solidFill>
+                <a:latin typeface="Calibri"/>
+              </a:rPr>
+              <a:t>the city learns who was hurt when they close or apply, after the 90 days are gone.   </a:t>
+            </a:r>
+            <a:r>
+              <a:rPr sz="1050" b="1">
+                <a:solidFill>
+                  <a:srgbClr val="B8D4D0"/>
+                </a:solidFill>
+                <a:latin typeface="Calibri"/>
+              </a:rPr>
+              <a:t>With our agent: </a:t>
+            </a:r>
+            <a:r>
+              <a:rPr sz="1050" b="0">
+                <a:solidFill>
+                  <a:srgbClr val="FFFFFF"/>
+                </a:solidFill>
+                <a:latin typeface="Calibri"/>
+              </a:rPr>
+              <a:t>on day one the officer knows who to call, how much to offer, and why.</a:t>
+            </a:r>
+          </a:p>
+        </p:txBody>
+      </p:sp>
     </p:spTree>
     <p:extLst>
       <p:ext uri="{BB962C8B-B14F-4D97-AF65-F5344CB8AC3E}">
@@ -18706,172 +20043,6 @@
       </p:grpSpPr>
       <p:sp>
         <p:nvSpPr>
-          <p:cNvPr id="148" name="Google Shape;148;p32"/>
-          <p:cNvSpPr txBox="1"/>
-          <p:nvPr/>
-        </p:nvSpPr>
-        <p:spPr>
-          <a:xfrm>
-            <a:off x="489150" y="1714450"/>
-            <a:ext cx="5587500" cy="1909500"/>
-          </a:xfrm>
-          <a:prstGeom prst="rect">
-            <a:avLst/>
-          </a:prstGeom>
-          <a:noFill/>
-          <a:ln>
-            <a:noFill/>
-          </a:ln>
-        </p:spPr>
-        <p:txBody>
-          <a:bodyPr spcFirstLastPara="1" wrap="square" lIns="91425" tIns="91425" rIns="91425" bIns="91425" anchor="t" anchorCtr="0">
-            <a:noAutofit/>
-          </a:bodyPr>
-          <a:lstStyle/>
-          <a:p>
-            <a:pPr marL="0" lvl="0" indent="0" algn="l" rtl="0">
-              <a:lnSpc>
-                <a:spcPct val="105000"/>
-              </a:lnSpc>
-              <a:spcBef>
-                <a:spcPts val="1200"/>
-              </a:spcBef>
-              <a:spcAft>
-                <a:spcPts val="0"/>
-              </a:spcAft>
-              <a:buNone/>
-            </a:pPr>
-            <a:r>
-              <a:rPr lang="en" dirty="0">
-                <a:solidFill>
-                  <a:schemeClr val="lt1"/>
-                </a:solidFill>
-                <a:latin typeface="Google Sans Flex Medium"/>
-                <a:ea typeface="Google Sans Flex Medium"/>
-                <a:cs typeface="Google Sans Flex Medium"/>
-                <a:sym typeface="Google Sans Flex Medium"/>
-              </a:rPr>
-              <a:t>What to Include</a:t>
-            </a:r>
-            <a:br>
-              <a:rPr lang="en" dirty="0">
-                <a:solidFill>
-                  <a:schemeClr val="lt1"/>
-                </a:solidFill>
-                <a:latin typeface="Google Sans Flex Medium"/>
-                <a:ea typeface="Google Sans Flex Medium"/>
-                <a:cs typeface="Google Sans Flex Medium"/>
-                <a:sym typeface="Google Sans Flex Medium"/>
-              </a:rPr>
-            </a:br>
-            <a:r>
-              <a:rPr lang="en" sz="1200" dirty="0">
-                <a:solidFill>
-                  <a:schemeClr val="lt1"/>
-                </a:solidFill>
-                <a:latin typeface="Google Sans Flex"/>
-                <a:ea typeface="Google Sans Flex"/>
-                <a:cs typeface="Google Sans Flex"/>
-                <a:sym typeface="Google Sans Flex"/>
-              </a:rPr>
-              <a:t>A breakdown of the data ecosystem powering your agent.</a:t>
-            </a:r>
-            <a:endParaRPr sz="1200" dirty="0">
-              <a:solidFill>
-                <a:schemeClr val="lt1"/>
-              </a:solidFill>
-              <a:latin typeface="Google Sans Flex"/>
-              <a:ea typeface="Google Sans Flex"/>
-              <a:cs typeface="Google Sans Flex"/>
-              <a:sym typeface="Google Sans Flex"/>
-            </a:endParaRPr>
-          </a:p>
-          <a:p>
-            <a:pPr marL="0" lvl="0" indent="0" algn="l" rtl="0">
-              <a:lnSpc>
-                <a:spcPct val="105000"/>
-              </a:lnSpc>
-              <a:spcBef>
-                <a:spcPts val="2100"/>
-              </a:spcBef>
-              <a:spcAft>
-                <a:spcPts val="1200"/>
-              </a:spcAft>
-              <a:buNone/>
-            </a:pPr>
-            <a:r>
-              <a:rPr lang="en" dirty="0">
-                <a:solidFill>
-                  <a:schemeClr val="lt1"/>
-                </a:solidFill>
-                <a:latin typeface="Google Sans Flex Medium"/>
-                <a:ea typeface="Google Sans Flex Medium"/>
-                <a:cs typeface="Google Sans Flex Medium"/>
-                <a:sym typeface="Google Sans Flex Medium"/>
-              </a:rPr>
-              <a:t>Details</a:t>
-            </a:r>
-            <a:br>
-              <a:rPr lang="en" dirty="0">
-                <a:solidFill>
-                  <a:schemeClr val="lt1"/>
-                </a:solidFill>
-                <a:latin typeface="Google Sans Flex Medium"/>
-                <a:ea typeface="Google Sans Flex Medium"/>
-                <a:cs typeface="Google Sans Flex Medium"/>
-                <a:sym typeface="Google Sans Flex Medium"/>
-              </a:rPr>
-            </a:br>
-            <a:r>
-              <a:rPr lang="en" sz="1200" dirty="0">
-                <a:solidFill>
-                  <a:schemeClr val="lt1"/>
-                </a:solidFill>
-                <a:latin typeface="Google Sans Flex"/>
-                <a:ea typeface="Google Sans Flex"/>
-                <a:cs typeface="Google Sans Flex"/>
-                <a:sym typeface="Google Sans Flex"/>
-              </a:rPr>
-              <a:t>List and define the specific curated datasets, </a:t>
-            </a:r>
-            <a:r>
-              <a:rPr lang="en" sz="1200" dirty="0" err="1">
-                <a:solidFill>
-                  <a:schemeClr val="lt1"/>
-                </a:solidFill>
-                <a:latin typeface="Google Sans Flex"/>
-                <a:ea typeface="Google Sans Flex"/>
-                <a:cs typeface="Google Sans Flex"/>
-                <a:sym typeface="Google Sans Flex"/>
-              </a:rPr>
-              <a:t>BigQuery</a:t>
-            </a:r>
-            <a:r>
-              <a:rPr lang="en" sz="1200" dirty="0">
-                <a:solidFill>
-                  <a:schemeClr val="lt1"/>
-                </a:solidFill>
-                <a:latin typeface="Google Sans Flex"/>
-                <a:ea typeface="Google Sans Flex"/>
-                <a:cs typeface="Google Sans Flex"/>
-                <a:sym typeface="Google Sans Flex"/>
-              </a:rPr>
-              <a:t> tables, or external inputs you deployed and integrated to train and inform your agent.</a:t>
-            </a:r>
-            <a:endParaRPr sz="1200" dirty="0">
-              <a:solidFill>
-                <a:schemeClr val="lt1"/>
-              </a:solidFill>
-              <a:latin typeface="Google Sans Flex"/>
-              <a:ea typeface="Google Sans Flex"/>
-              <a:cs typeface="Google Sans Flex"/>
-              <a:sym typeface="Google Sans Flex"/>
-            </a:endParaRPr>
-          </a:p>
-        </p:txBody>
-      </p:sp>
-      <p:sp>
-        <p:nvSpPr>
           <p:cNvPr id="149" name="Google Shape;149;p32"/>
           <p:cNvSpPr txBox="1">
             <a:spLocks noGrp="1"/>
@@ -18928,7 +20099,7 @@
         </p:blipFill>
         <p:spPr>
           <a:xfrm rot="10800000">
-            <a:off x="4175675" y="519496"/>
+            <a:off x="4144783" y="527517"/>
             <a:ext cx="4769550" cy="951275"/>
           </a:xfrm>
           <a:prstGeom prst="rect">
@@ -19340,7 +20511,7 @@
                     <a:p>
                       <a:pPr algn="l"/>
                       <a:r>
-                        <a:rPr sz="900" b="1">
+                        <a:rPr sz="900" b="1" dirty="0" err="1">
                           <a:solidFill>
                             <a:srgbClr val="12343B"/>
                           </a:solidFill>
@@ -19348,6 +20519,12 @@
                         </a:rPr>
                         <a:t>employer_blocks</a:t>
                       </a:r>
+                      <a:endParaRPr sz="900" b="1" dirty="0">
+                        <a:solidFill>
+                          <a:srgbClr val="12343B"/>
+                        </a:solidFill>
+                        <a:latin typeface="Calibri"/>
+                      </a:endParaRPr>
                     </a:p>
                   </a:txBody>
                   <a:tcPr marL="54864" marR="54864" marT="20574" marB="20574" anchor="ctr">
@@ -20042,7 +21219,7 @@
                     <a:p>
                       <a:pPr algn="ctr"/>
                       <a:r>
-                        <a:rPr sz="800" b="1">
+                        <a:rPr sz="800" b="1" dirty="0">
                           <a:solidFill>
                             <a:srgbClr val="FFFFFF"/>
                           </a:solidFill>

--- a/docs/ATL-13.pptx
+++ b/docs/ATL-13.pptx
@@ -6,19 +6,15 @@
     <p:sldMasterId id="2147483673" r:id="rId2"/>
   </p:sldMasterIdLst>
   <p:notesMasterIdLst>
-    <p:notesMasterId r:id="rId13"/>
+    <p:notesMasterId r:id="rId9"/>
   </p:notesMasterIdLst>
   <p:sldIdLst>
     <p:sldId id="256" r:id="rId3"/>
     <p:sldId id="257" r:id="rId4"/>
     <p:sldId id="258" r:id="rId5"/>
-    <p:sldId id="259" r:id="rId6"/>
-    <p:sldId id="260" r:id="rId7"/>
-    <p:sldId id="267" r:id="rId8"/>
-    <p:sldId id="261" r:id="rId9"/>
-    <p:sldId id="265" r:id="rId10"/>
-    <p:sldId id="262" r:id="rId11"/>
-    <p:sldId id="266" r:id="rId12"/>
+    <p:sldId id="267" r:id="rId6"/>
+    <p:sldId id="265" r:id="rId7"/>
+    <p:sldId id="266" r:id="rId8"/>
   </p:sldIdLst>
   <p:sldSz cx="9144000" cy="5143500" type="screen16x9"/>
   <p:notesSz cx="6858000" cy="9144000"/>
@@ -869,7 +865,7 @@
         </p:nvSpPr>
         <p:spPr>
           <a:xfrm>
-            <a:off x="381300" y="685800"/>
+            <a:off x="381000" y="685800"/>
             <a:ext cx="6096000" cy="3429000"/>
           </a:xfrm>
           <a:custGeom>
@@ -1049,214 +1045,6 @@
 </file>
 
 <file path=ppt/notesSlides/notesSlide4.xml><?xml version="1.0" encoding="utf-8"?>
-<p:notes xmlns:a="http://schemas.openxmlformats.org/drawingml/2006/main" xmlns:r="http://schemas.openxmlformats.org/officeDocument/2006/relationships" xmlns:p="http://schemas.openxmlformats.org/presentationml/2006/main" showMasterSp="0" showMasterPhAnim="0">
-  <p:cSld>
-    <p:spTree>
-      <p:nvGrpSpPr>
-        <p:cNvPr id="1" name="Shape 128"/>
-        <p:cNvGrpSpPr/>
-        <p:nvPr/>
-      </p:nvGrpSpPr>
-      <p:grpSpPr>
-        <a:xfrm>
-          <a:off x="0" y="0"/>
-          <a:ext cx="0" cy="0"/>
-          <a:chOff x="0" y="0"/>
-          <a:chExt cx="0" cy="0"/>
-        </a:xfrm>
-      </p:grpSpPr>
-      <p:sp>
-        <p:nvSpPr>
-          <p:cNvPr id="129" name="Google Shape;129;h52fa8b8a4798773f_0_139:notes"/>
-          <p:cNvSpPr>
-            <a:spLocks noGrp="1" noRot="1" noChangeAspect="1"/>
-          </p:cNvSpPr>
-          <p:nvPr>
-            <p:ph type="sldImg" idx="2"/>
-          </p:nvPr>
-        </p:nvSpPr>
-        <p:spPr>
-          <a:xfrm>
-            <a:off x="381300" y="685800"/>
-            <a:ext cx="6096000" cy="3429000"/>
-          </a:xfrm>
-          <a:custGeom>
-            <a:avLst/>
-            <a:gdLst/>
-            <a:ahLst/>
-            <a:cxnLst/>
-            <a:rect l="l" t="t" r="r" b="b"/>
-            <a:pathLst>
-              <a:path w="120000" h="120000" extrusionOk="0">
-                <a:moveTo>
-                  <a:pt x="0" y="0"/>
-                </a:moveTo>
-                <a:lnTo>
-                  <a:pt x="120000" y="0"/>
-                </a:lnTo>
-                <a:lnTo>
-                  <a:pt x="120000" y="120000"/>
-                </a:lnTo>
-                <a:lnTo>
-                  <a:pt x="0" y="120000"/>
-                </a:lnTo>
-                <a:close/>
-              </a:path>
-            </a:pathLst>
-          </a:custGeom>
-        </p:spPr>
-      </p:sp>
-      <p:sp>
-        <p:nvSpPr>
-          <p:cNvPr id="130" name="Google Shape;130;h52fa8b8a4798773f_0_139:notes"/>
-          <p:cNvSpPr txBox="1">
-            <a:spLocks noGrp="1"/>
-          </p:cNvSpPr>
-          <p:nvPr>
-            <p:ph type="body" idx="1"/>
-          </p:nvPr>
-        </p:nvSpPr>
-        <p:spPr>
-          <a:xfrm>
-            <a:off x="685800" y="4343400"/>
-            <a:ext cx="5486400" cy="4114800"/>
-          </a:xfrm>
-          <a:prstGeom prst="rect">
-            <a:avLst/>
-          </a:prstGeom>
-        </p:spPr>
-        <p:txBody>
-          <a:bodyPr spcFirstLastPara="1" wrap="square" lIns="91425" tIns="91425" rIns="91425" bIns="91425" anchor="t" anchorCtr="0">
-            <a:noAutofit/>
-          </a:bodyPr>
-          <a:lstStyle/>
-          <a:p>
-            <a:pPr marL="0" lvl="0" indent="0" algn="l" rtl="0">
-              <a:spcBef>
-                <a:spcPts val="0"/>
-              </a:spcBef>
-              <a:spcAft>
-                <a:spcPts val="0"/>
-              </a:spcAft>
-              <a:buNone/>
-            </a:pPr>
-            <a:endParaRPr/>
-          </a:p>
-        </p:txBody>
-      </p:sp>
-    </p:spTree>
-  </p:cSld>
-  <p:clrMapOvr>
-    <a:masterClrMapping/>
-  </p:clrMapOvr>
-</p:notes>
-</file>
-
-<file path=ppt/notesSlides/notesSlide5.xml><?xml version="1.0" encoding="utf-8"?>
-<p:notes xmlns:a="http://schemas.openxmlformats.org/drawingml/2006/main" xmlns:r="http://schemas.openxmlformats.org/officeDocument/2006/relationships" xmlns:p="http://schemas.openxmlformats.org/presentationml/2006/main" showMasterSp="0" showMasterPhAnim="0">
-  <p:cSld>
-    <p:spTree>
-      <p:nvGrpSpPr>
-        <p:cNvPr id="1" name="Shape 136"/>
-        <p:cNvGrpSpPr/>
-        <p:nvPr/>
-      </p:nvGrpSpPr>
-      <p:grpSpPr>
-        <a:xfrm>
-          <a:off x="0" y="0"/>
-          <a:ext cx="0" cy="0"/>
-          <a:chOff x="0" y="0"/>
-          <a:chExt cx="0" cy="0"/>
-        </a:xfrm>
-      </p:grpSpPr>
-      <p:sp>
-        <p:nvSpPr>
-          <p:cNvPr id="137" name="Google Shape;137;h52fa8b8a4798773f_0_145:notes"/>
-          <p:cNvSpPr>
-            <a:spLocks noGrp="1" noRot="1" noChangeAspect="1"/>
-          </p:cNvSpPr>
-          <p:nvPr>
-            <p:ph type="sldImg" idx="2"/>
-          </p:nvPr>
-        </p:nvSpPr>
-        <p:spPr>
-          <a:xfrm>
-            <a:off x="381300" y="685800"/>
-            <a:ext cx="6096000" cy="3429000"/>
-          </a:xfrm>
-          <a:custGeom>
-            <a:avLst/>
-            <a:gdLst/>
-            <a:ahLst/>
-            <a:cxnLst/>
-            <a:rect l="l" t="t" r="r" b="b"/>
-            <a:pathLst>
-              <a:path w="120000" h="120000" extrusionOk="0">
-                <a:moveTo>
-                  <a:pt x="0" y="0"/>
-                </a:moveTo>
-                <a:lnTo>
-                  <a:pt x="120000" y="0"/>
-                </a:lnTo>
-                <a:lnTo>
-                  <a:pt x="120000" y="120000"/>
-                </a:lnTo>
-                <a:lnTo>
-                  <a:pt x="0" y="120000"/>
-                </a:lnTo>
-                <a:close/>
-              </a:path>
-            </a:pathLst>
-          </a:custGeom>
-        </p:spPr>
-      </p:sp>
-      <p:sp>
-        <p:nvSpPr>
-          <p:cNvPr id="138" name="Google Shape;138;h52fa8b8a4798773f_0_145:notes"/>
-          <p:cNvSpPr txBox="1">
-            <a:spLocks noGrp="1"/>
-          </p:cNvSpPr>
-          <p:nvPr>
-            <p:ph type="body" idx="1"/>
-          </p:nvPr>
-        </p:nvSpPr>
-        <p:spPr>
-          <a:xfrm>
-            <a:off x="685800" y="4343400"/>
-            <a:ext cx="5486400" cy="4114800"/>
-          </a:xfrm>
-          <a:prstGeom prst="rect">
-            <a:avLst/>
-          </a:prstGeom>
-        </p:spPr>
-        <p:txBody>
-          <a:bodyPr spcFirstLastPara="1" wrap="square" lIns="91425" tIns="91425" rIns="91425" bIns="91425" anchor="t" anchorCtr="0">
-            <a:noAutofit/>
-          </a:bodyPr>
-          <a:lstStyle/>
-          <a:p>
-            <a:pPr marL="0" lvl="0" indent="0" algn="l" rtl="0">
-              <a:spcBef>
-                <a:spcPts val="0"/>
-              </a:spcBef>
-              <a:spcAft>
-                <a:spcPts val="0"/>
-              </a:spcAft>
-              <a:buNone/>
-            </a:pPr>
-            <a:endParaRPr/>
-          </a:p>
-        </p:txBody>
-      </p:sp>
-    </p:spTree>
-  </p:cSld>
-  <p:clrMapOvr>
-    <a:masterClrMapping/>
-  </p:clrMapOvr>
-</p:notes>
-</file>
-
-<file path=ppt/notesSlides/notesSlide6.xml><?xml version="1.0" encoding="utf-8"?>
 <p:notes xmlns:a="http://schemas.openxmlformats.org/drawingml/2006/main" xmlns:r="http://schemas.openxmlformats.org/officeDocument/2006/relationships" xmlns:p="http://schemas.openxmlformats.org/presentationml/2006/main">
   <p:cSld>
     <p:spTree>
@@ -1314,215 +1102,7 @@
 </p:notes>
 </file>
 
-<file path=ppt/notesSlides/notesSlide7.xml><?xml version="1.0" encoding="utf-8"?>
-<p:notes xmlns:a="http://schemas.openxmlformats.org/drawingml/2006/main" xmlns:r="http://schemas.openxmlformats.org/officeDocument/2006/relationships" xmlns:p="http://schemas.openxmlformats.org/presentationml/2006/main" showMasterSp="0" showMasterPhAnim="0">
-  <p:cSld>
-    <p:spTree>
-      <p:nvGrpSpPr>
-        <p:cNvPr id="1" name="Shape 144"/>
-        <p:cNvGrpSpPr/>
-        <p:nvPr/>
-      </p:nvGrpSpPr>
-      <p:grpSpPr>
-        <a:xfrm>
-          <a:off x="0" y="0"/>
-          <a:ext cx="0" cy="0"/>
-          <a:chOff x="0" y="0"/>
-          <a:chExt cx="0" cy="0"/>
-        </a:xfrm>
-      </p:grpSpPr>
-      <p:sp>
-        <p:nvSpPr>
-          <p:cNvPr id="145" name="Google Shape;145;h52fa8b8a4798773f_0_151:notes"/>
-          <p:cNvSpPr>
-            <a:spLocks noGrp="1" noRot="1" noChangeAspect="1"/>
-          </p:cNvSpPr>
-          <p:nvPr>
-            <p:ph type="sldImg" idx="2"/>
-          </p:nvPr>
-        </p:nvSpPr>
-        <p:spPr>
-          <a:xfrm>
-            <a:off x="381000" y="685800"/>
-            <a:ext cx="6096000" cy="3429000"/>
-          </a:xfrm>
-          <a:custGeom>
-            <a:avLst/>
-            <a:gdLst/>
-            <a:ahLst/>
-            <a:cxnLst/>
-            <a:rect l="l" t="t" r="r" b="b"/>
-            <a:pathLst>
-              <a:path w="120000" h="120000" extrusionOk="0">
-                <a:moveTo>
-                  <a:pt x="0" y="0"/>
-                </a:moveTo>
-                <a:lnTo>
-                  <a:pt x="120000" y="0"/>
-                </a:lnTo>
-                <a:lnTo>
-                  <a:pt x="120000" y="120000"/>
-                </a:lnTo>
-                <a:lnTo>
-                  <a:pt x="0" y="120000"/>
-                </a:lnTo>
-                <a:close/>
-              </a:path>
-            </a:pathLst>
-          </a:custGeom>
-        </p:spPr>
-      </p:sp>
-      <p:sp>
-        <p:nvSpPr>
-          <p:cNvPr id="146" name="Google Shape;146;h52fa8b8a4798773f_0_151:notes"/>
-          <p:cNvSpPr txBox="1">
-            <a:spLocks noGrp="1"/>
-          </p:cNvSpPr>
-          <p:nvPr>
-            <p:ph type="body" idx="1"/>
-          </p:nvPr>
-        </p:nvSpPr>
-        <p:spPr>
-          <a:xfrm>
-            <a:off x="685800" y="4343400"/>
-            <a:ext cx="5486400" cy="4114800"/>
-          </a:xfrm>
-          <a:prstGeom prst="rect">
-            <a:avLst/>
-          </a:prstGeom>
-        </p:spPr>
-        <p:txBody>
-          <a:bodyPr spcFirstLastPara="1" wrap="square" lIns="91425" tIns="91425" rIns="91425" bIns="91425" anchor="t" anchorCtr="0">
-            <a:noAutofit/>
-          </a:bodyPr>
-          <a:lstStyle/>
-          <a:p>
-            <a:pPr marL="0" lvl="0" indent="0" algn="l" rtl="0">
-              <a:spcBef>
-                <a:spcPts val="0"/>
-              </a:spcBef>
-              <a:spcAft>
-                <a:spcPts val="0"/>
-              </a:spcAft>
-              <a:buNone/>
-            </a:pPr>
-            <a:endParaRPr/>
-          </a:p>
-        </p:txBody>
-      </p:sp>
-    </p:spTree>
-  </p:cSld>
-  <p:clrMapOvr>
-    <a:masterClrMapping/>
-  </p:clrMapOvr>
-</p:notes>
-</file>
-
-<file path=ppt/notesSlides/notesSlide8.xml><?xml version="1.0" encoding="utf-8"?>
-<p:notes xmlns:a="http://schemas.openxmlformats.org/drawingml/2006/main" xmlns:r="http://schemas.openxmlformats.org/officeDocument/2006/relationships" xmlns:p="http://schemas.openxmlformats.org/presentationml/2006/main" showMasterSp="0" showMasterPhAnim="0">
-  <p:cSld>
-    <p:spTree>
-      <p:nvGrpSpPr>
-        <p:cNvPr id="1" name="Shape 151"/>
-        <p:cNvGrpSpPr/>
-        <p:nvPr/>
-      </p:nvGrpSpPr>
-      <p:grpSpPr>
-        <a:xfrm>
-          <a:off x="0" y="0"/>
-          <a:ext cx="0" cy="0"/>
-          <a:chOff x="0" y="0"/>
-          <a:chExt cx="0" cy="0"/>
-        </a:xfrm>
-      </p:grpSpPr>
-      <p:sp>
-        <p:nvSpPr>
-          <p:cNvPr id="152" name="Google Shape;152;h52fa8b8a4798773f_0_156:notes"/>
-          <p:cNvSpPr>
-            <a:spLocks noGrp="1" noRot="1" noChangeAspect="1"/>
-          </p:cNvSpPr>
-          <p:nvPr>
-            <p:ph type="sldImg" idx="2"/>
-          </p:nvPr>
-        </p:nvSpPr>
-        <p:spPr>
-          <a:xfrm>
-            <a:off x="381000" y="685800"/>
-            <a:ext cx="6096000" cy="3429000"/>
-          </a:xfrm>
-          <a:custGeom>
-            <a:avLst/>
-            <a:gdLst/>
-            <a:ahLst/>
-            <a:cxnLst/>
-            <a:rect l="l" t="t" r="r" b="b"/>
-            <a:pathLst>
-              <a:path w="120000" h="120000" extrusionOk="0">
-                <a:moveTo>
-                  <a:pt x="0" y="0"/>
-                </a:moveTo>
-                <a:lnTo>
-                  <a:pt x="120000" y="0"/>
-                </a:lnTo>
-                <a:lnTo>
-                  <a:pt x="120000" y="120000"/>
-                </a:lnTo>
-                <a:lnTo>
-                  <a:pt x="0" y="120000"/>
-                </a:lnTo>
-                <a:close/>
-              </a:path>
-            </a:pathLst>
-          </a:custGeom>
-        </p:spPr>
-      </p:sp>
-      <p:sp>
-        <p:nvSpPr>
-          <p:cNvPr id="153" name="Google Shape;153;h52fa8b8a4798773f_0_156:notes"/>
-          <p:cNvSpPr txBox="1">
-            <a:spLocks noGrp="1"/>
-          </p:cNvSpPr>
-          <p:nvPr>
-            <p:ph type="body" idx="1"/>
-          </p:nvPr>
-        </p:nvSpPr>
-        <p:spPr>
-          <a:xfrm>
-            <a:off x="685800" y="4343400"/>
-            <a:ext cx="5486400" cy="4114800"/>
-          </a:xfrm>
-          <a:prstGeom prst="rect">
-            <a:avLst/>
-          </a:prstGeom>
-        </p:spPr>
-        <p:txBody>
-          <a:bodyPr spcFirstLastPara="1" wrap="square" lIns="91425" tIns="91425" rIns="91425" bIns="91425" anchor="t" anchorCtr="0">
-            <a:noAutofit/>
-          </a:bodyPr>
-          <a:lstStyle/>
-          <a:p>
-            <a:pPr marL="0" lvl="0" indent="0" algn="l" rtl="0">
-              <a:spcBef>
-                <a:spcPts val="0"/>
-              </a:spcBef>
-              <a:spcAft>
-                <a:spcPts val="0"/>
-              </a:spcAft>
-              <a:buNone/>
-            </a:pPr>
-            <a:endParaRPr/>
-          </a:p>
-        </p:txBody>
-      </p:sp>
-    </p:spTree>
-  </p:cSld>
-  <p:clrMapOvr>
-    <a:masterClrMapping/>
-  </p:clrMapOvr>
-</p:notes>
-</file>
-
-<file path=ppt/notesSlides/notesSlide9.xml><?xml version="1.0" encoding="utf-8"?>
+<file path=ppt/notesSlides/notesSlide5.xml><?xml version="1.0" encoding="utf-8"?>
 <p:notes xmlns:a="http://schemas.openxmlformats.org/drawingml/2006/main" xmlns:r="http://schemas.openxmlformats.org/officeDocument/2006/relationships" xmlns:p="http://schemas.openxmlformats.org/presentationml/2006/main">
   <p:cSld>
     <p:spTree>
@@ -11775,2467 +11355,6 @@
 </p:sld>
 </file>
 
-<file path=ppt/slides/slide10.xml><?xml version="1.0" encoding="utf-8"?>
-<p:sld xmlns:a="http://schemas.openxmlformats.org/drawingml/2006/main" xmlns:r="http://schemas.openxmlformats.org/officeDocument/2006/relationships" xmlns:p="http://schemas.openxmlformats.org/presentationml/2006/main">
-  <p:cSld>
-    <p:spTree>
-      <p:nvGrpSpPr>
-        <p:cNvPr id="1" name=""/>
-        <p:cNvGrpSpPr/>
-        <p:nvPr/>
-      </p:nvGrpSpPr>
-      <p:grpSpPr>
-        <a:xfrm>
-          <a:off x="0" y="0"/>
-          <a:ext cx="0" cy="0"/>
-          <a:chOff x="0" y="0"/>
-          <a:chExt cx="0" cy="0"/>
-        </a:xfrm>
-      </p:grpSpPr>
-      <p:sp>
-        <p:nvSpPr>
-          <p:cNvPr id="2" name="Title"/>
-          <p:cNvSpPr txBox="1"/>
-          <p:nvPr/>
-        </p:nvSpPr>
-        <p:spPr>
-          <a:xfrm>
-            <a:off x="342900" y="260605"/>
-            <a:ext cx="8435340" cy="392415"/>
-          </a:xfrm>
-          <a:prstGeom prst="rect">
-            <a:avLst/>
-          </a:prstGeom>
-          <a:noFill/>
-        </p:spPr>
-        <p:txBody>
-          <a:bodyPr wrap="square" lIns="0" tIns="0" rIns="0" bIns="0" anchor="t">
-            <a:spAutoFit/>
-          </a:bodyPr>
-          <a:lstStyle/>
-          <a:p>
-            <a:pPr>
-              <a:spcAft>
-                <a:spcPts val="225"/>
-              </a:spcAft>
-            </a:pPr>
-            <a:r>
-              <a:rPr sz="2550" b="1" dirty="0">
-                <a:solidFill>
-                  <a:srgbClr val="12343B"/>
-                </a:solidFill>
-                <a:latin typeface="Calibri"/>
-              </a:rPr>
-              <a:t>How our grant decision agents work together</a:t>
-            </a:r>
-          </a:p>
-        </p:txBody>
-      </p:sp>
-      <p:sp>
-        <p:nvSpPr>
-          <p:cNvPr id="3" name="Subtitle"/>
-          <p:cNvSpPr txBox="1"/>
-          <p:nvPr/>
-        </p:nvSpPr>
-        <p:spPr>
-          <a:xfrm>
-            <a:off x="342900" y="685801"/>
-            <a:ext cx="8435340" cy="161583"/>
-          </a:xfrm>
-          <a:prstGeom prst="rect">
-            <a:avLst/>
-          </a:prstGeom>
-          <a:noFill/>
-        </p:spPr>
-        <p:txBody>
-          <a:bodyPr wrap="square" lIns="0" tIns="0" rIns="0" bIns="0" anchor="t">
-            <a:spAutoFit/>
-          </a:bodyPr>
-          <a:lstStyle/>
-          <a:p>
-            <a:pPr>
-              <a:spcAft>
-                <a:spcPts val="225"/>
-              </a:spcAft>
-            </a:pPr>
-            <a:r>
-              <a:rPr sz="1050">
-                <a:solidFill>
-                  <a:srgbClr val="4A5A5D"/>
-                </a:solidFill>
-                <a:latin typeface="Calibri"/>
-              </a:rPr>
-              <a:t>Anchor-closure track · Central Market, San Francisco · four ADK agents in one chain, data through MCP, everything on Google Cloud</a:t>
-            </a:r>
-          </a:p>
-        </p:txBody>
-      </p:sp>
-      <p:sp>
-        <p:nvSpPr>
-          <p:cNvPr id="4" name="User card"/>
-          <p:cNvSpPr/>
-          <p:nvPr/>
-        </p:nvSpPr>
-        <p:spPr>
-          <a:xfrm>
-            <a:off x="342900" y="1062990"/>
-            <a:ext cx="1577340" cy="672084"/>
-          </a:xfrm>
-          <a:prstGeom prst="roundRect">
-            <a:avLst>
-              <a:gd name="adj" fmla="val 12000"/>
-            </a:avLst>
-          </a:prstGeom>
-          <a:solidFill>
-            <a:srgbClr val="E3EFED"/>
-          </a:solidFill>
-          <a:ln>
-            <a:noFill/>
-          </a:ln>
-          <a:effectLst/>
-        </p:spPr>
-        <p:style>
-          <a:lnRef idx="1">
-            <a:schemeClr val="accent1"/>
-          </a:lnRef>
-          <a:fillRef idx="3">
-            <a:schemeClr val="accent1"/>
-          </a:fillRef>
-          <a:effectRef idx="2">
-            <a:schemeClr val="accent1"/>
-          </a:effectRef>
-          <a:fontRef idx="minor">
-            <a:schemeClr val="lt1"/>
-          </a:fontRef>
-        </p:style>
-        <p:txBody>
-          <a:bodyPr rtlCol="0" anchor="ctr"/>
-          <a:lstStyle/>
-          <a:p>
-            <a:pPr algn="ctr"/>
-            <a:endParaRPr sz="1050"/>
-          </a:p>
-        </p:txBody>
-      </p:sp>
-      <p:sp>
-        <p:nvSpPr>
-          <p:cNvPr id="5" name="TextBox 4"/>
-          <p:cNvSpPr txBox="1"/>
-          <p:nvPr/>
-        </p:nvSpPr>
-        <p:spPr>
-          <a:xfrm>
-            <a:off x="466344" y="1124712"/>
-            <a:ext cx="1330452" cy="568104"/>
-          </a:xfrm>
-          <a:prstGeom prst="rect">
-            <a:avLst/>
-          </a:prstGeom>
-          <a:noFill/>
-        </p:spPr>
-        <p:txBody>
-          <a:bodyPr wrap="square" lIns="0" tIns="0" rIns="0" bIns="0" anchor="t">
-            <a:spAutoFit/>
-          </a:bodyPr>
-          <a:lstStyle/>
-          <a:p>
-            <a:pPr>
-              <a:spcAft>
-                <a:spcPts val="225"/>
-              </a:spcAft>
-            </a:pPr>
-            <a:r>
-              <a:rPr sz="1050" b="1">
-                <a:solidFill>
-                  <a:srgbClr val="12343B"/>
-                </a:solidFill>
-                <a:latin typeface="Calibri"/>
-              </a:rPr>
-              <a:t>Grant officer</a:t>
-            </a:r>
-          </a:p>
-          <a:p>
-            <a:pPr>
-              <a:spcAft>
-                <a:spcPts val="225"/>
-              </a:spcAft>
-            </a:pPr>
-            <a:r>
-              <a:rPr sz="825">
-                <a:solidFill>
-                  <a:srgbClr val="4A5A5D"/>
-                </a:solidFill>
-                <a:latin typeface="Calibri"/>
-              </a:rPr>
-              <a:t>Picks the closing employer, the budget and the grant-effect assumption</a:t>
-            </a:r>
-          </a:p>
-        </p:txBody>
-      </p:sp>
-      <p:cxnSp>
-        <p:nvCxnSpPr>
-          <p:cNvPr id="6" name="Connector 5"/>
-          <p:cNvCxnSpPr/>
-          <p:nvPr/>
-        </p:nvCxnSpPr>
-        <p:spPr>
-          <a:xfrm>
-            <a:off x="1131570" y="1735074"/>
-            <a:ext cx="0" cy="219456"/>
-          </a:xfrm>
-          <a:prstGeom prst="line">
-            <a:avLst/>
-          </a:prstGeom>
-          <a:ln w="22225">
-            <a:solidFill>
-              <a:srgbClr val="C27C00"/>
-            </a:solidFill>
-            <a:tailEnd type="triangle" w="med" len="med"/>
-          </a:ln>
-        </p:spPr>
-        <p:style>
-          <a:lnRef idx="2">
-            <a:schemeClr val="accent1"/>
-          </a:lnRef>
-          <a:fillRef idx="0">
-            <a:schemeClr val="accent1"/>
-          </a:fillRef>
-          <a:effectRef idx="1">
-            <a:schemeClr val="accent1"/>
-          </a:effectRef>
-          <a:fontRef idx="minor">
-            <a:schemeClr val="tx1"/>
-          </a:fontRef>
-        </p:style>
-      </p:cxnSp>
-      <p:sp>
-        <p:nvSpPr>
-          <p:cNvPr id="7" name="Front end card"/>
-          <p:cNvSpPr/>
-          <p:nvPr/>
-        </p:nvSpPr>
-        <p:spPr>
-          <a:xfrm>
-            <a:off x="342900" y="1954530"/>
-            <a:ext cx="1577340" cy="1337310"/>
-          </a:xfrm>
-          <a:prstGeom prst="roundRect">
-            <a:avLst>
-              <a:gd name="adj" fmla="val 6153"/>
-            </a:avLst>
-          </a:prstGeom>
-          <a:solidFill>
-            <a:srgbClr val="FFFFFF"/>
-          </a:solidFill>
-          <a:ln w="19050">
-            <a:solidFill>
-              <a:srgbClr val="C27C00"/>
-            </a:solidFill>
-          </a:ln>
-          <a:effectLst/>
-        </p:spPr>
-        <p:style>
-          <a:lnRef idx="1">
-            <a:schemeClr val="accent1"/>
-          </a:lnRef>
-          <a:fillRef idx="3">
-            <a:schemeClr val="accent1"/>
-          </a:fillRef>
-          <a:effectRef idx="2">
-            <a:schemeClr val="accent1"/>
-          </a:effectRef>
-          <a:fontRef idx="minor">
-            <a:schemeClr val="lt1"/>
-          </a:fontRef>
-        </p:style>
-        <p:txBody>
-          <a:bodyPr rtlCol="0" anchor="ctr"/>
-          <a:lstStyle/>
-          <a:p>
-            <a:pPr algn="ctr"/>
-            <a:endParaRPr sz="1050"/>
-          </a:p>
-        </p:txBody>
-      </p:sp>
-      <p:sp>
-        <p:nvSpPr>
-          <p:cNvPr id="8" name="TextBox 7"/>
-          <p:cNvSpPr txBox="1"/>
-          <p:nvPr/>
-        </p:nvSpPr>
-        <p:spPr>
-          <a:xfrm>
-            <a:off x="466344" y="2023110"/>
-            <a:ext cx="1330452" cy="1000274"/>
-          </a:xfrm>
-          <a:prstGeom prst="rect">
-            <a:avLst/>
-          </a:prstGeom>
-          <a:noFill/>
-        </p:spPr>
-        <p:txBody>
-          <a:bodyPr wrap="square" lIns="0" tIns="0" rIns="0" bIns="0" anchor="t">
-            <a:spAutoFit/>
-          </a:bodyPr>
-          <a:lstStyle/>
-          <a:p>
-            <a:pPr>
-              <a:spcAft>
-                <a:spcPts val="225"/>
-              </a:spcAft>
-            </a:pPr>
-            <a:r>
-              <a:rPr sz="1050" b="1">
-                <a:solidFill>
-                  <a:srgbClr val="12343B"/>
-                </a:solidFill>
-                <a:latin typeface="Calibri"/>
-              </a:rPr>
-              <a:t>Interactive map</a:t>
-            </a:r>
-          </a:p>
-          <a:p>
-            <a:pPr>
-              <a:spcAft>
-                <a:spcPts val="225"/>
-              </a:spcAft>
-            </a:pPr>
-            <a:r>
-              <a:rPr sz="825" b="1">
-                <a:solidFill>
-                  <a:srgbClr val="C27C00"/>
-                </a:solidFill>
-                <a:latin typeface="Calibri"/>
-              </a:rPr>
-              <a:t>Cloud Run · Google Maps JS API</a:t>
-            </a:r>
-          </a:p>
-          <a:p>
-            <a:pPr>
-              <a:spcAft>
-                <a:spcPts val="225"/>
-              </a:spcAft>
-            </a:pPr>
-            <a:r>
-              <a:rPr sz="825">
-                <a:solidFill>
-                  <a:srgbClr val="4A5A5D"/>
-                </a:solidFill>
-                <a:latin typeface="Calibri"/>
-              </a:rPr>
-              <a:t>Hover a business: amount, justification, impact</a:t>
-            </a:r>
-          </a:p>
-          <a:p>
-            <a:pPr>
-              <a:spcAft>
-                <a:spcPts val="225"/>
-              </a:spcAft>
-            </a:pPr>
-            <a:r>
-              <a:rPr sz="825">
-                <a:solidFill>
-                  <a:srgbClr val="4A5A5D"/>
-                </a:solidFill>
-                <a:latin typeface="Calibri"/>
-              </a:rPr>
-              <a:t>The cascade is drawn on the map, anchor to supplier</a:t>
-            </a:r>
-          </a:p>
-        </p:txBody>
-      </p:sp>
-      <p:cxnSp>
-        <p:nvCxnSpPr>
-          <p:cNvPr id="9" name="Connector 8"/>
-          <p:cNvCxnSpPr/>
-          <p:nvPr/>
-        </p:nvCxnSpPr>
-        <p:spPr>
-          <a:xfrm>
-            <a:off x="1920240" y="2297430"/>
-            <a:ext cx="651510" cy="0"/>
-          </a:xfrm>
-          <a:prstGeom prst="line">
-            <a:avLst/>
-          </a:prstGeom>
-          <a:ln w="22225">
-            <a:solidFill>
-              <a:srgbClr val="C27C00"/>
-            </a:solidFill>
-            <a:tailEnd type="triangle" w="med" len="med"/>
-          </a:ln>
-        </p:spPr>
-        <p:style>
-          <a:lnRef idx="2">
-            <a:schemeClr val="accent1"/>
-          </a:lnRef>
-          <a:fillRef idx="0">
-            <a:schemeClr val="accent1"/>
-          </a:fillRef>
-          <a:effectRef idx="1">
-            <a:schemeClr val="accent1"/>
-          </a:effectRef>
-          <a:fontRef idx="minor">
-            <a:schemeClr val="tx1"/>
-          </a:fontRef>
-        </p:style>
-      </p:cxnSp>
-      <p:sp>
-        <p:nvSpPr>
-          <p:cNvPr id="10" name="TextBox 9"/>
-          <p:cNvSpPr txBox="1"/>
-          <p:nvPr/>
-        </p:nvSpPr>
-        <p:spPr>
-          <a:xfrm>
-            <a:off x="1947672" y="2057401"/>
-            <a:ext cx="596646" cy="103875"/>
-          </a:xfrm>
-          <a:prstGeom prst="rect">
-            <a:avLst/>
-          </a:prstGeom>
-          <a:noFill/>
-        </p:spPr>
-        <p:txBody>
-          <a:bodyPr wrap="square" lIns="0" tIns="0" rIns="0" bIns="0" anchor="t">
-            <a:spAutoFit/>
-          </a:bodyPr>
-          <a:lstStyle/>
-          <a:p>
-            <a:pPr algn="ctr">
-              <a:spcAft>
-                <a:spcPts val="225"/>
-              </a:spcAft>
-            </a:pPr>
-            <a:r>
-              <a:rPr sz="675" b="1">
-                <a:solidFill>
-                  <a:srgbClr val="C27C00"/>
-                </a:solidFill>
-                <a:latin typeface="Calibri"/>
-              </a:rPr>
-              <a:t>POST /scenario</a:t>
-            </a:r>
-          </a:p>
-        </p:txBody>
-      </p:sp>
-      <p:cxnSp>
-        <p:nvCxnSpPr>
-          <p:cNvPr id="11" name="Connector 10"/>
-          <p:cNvCxnSpPr/>
-          <p:nvPr/>
-        </p:nvCxnSpPr>
-        <p:spPr>
-          <a:xfrm flipH="1">
-            <a:off x="1920240" y="2914650"/>
-            <a:ext cx="651510" cy="0"/>
-          </a:xfrm>
-          <a:prstGeom prst="line">
-            <a:avLst/>
-          </a:prstGeom>
-          <a:ln w="22225">
-            <a:solidFill>
-              <a:srgbClr val="C27C00"/>
-            </a:solidFill>
-            <a:tailEnd type="triangle" w="med" len="med"/>
-          </a:ln>
-        </p:spPr>
-        <p:style>
-          <a:lnRef idx="2">
-            <a:schemeClr val="accent1"/>
-          </a:lnRef>
-          <a:fillRef idx="0">
-            <a:schemeClr val="accent1"/>
-          </a:fillRef>
-          <a:effectRef idx="1">
-            <a:schemeClr val="accent1"/>
-          </a:effectRef>
-          <a:fontRef idx="minor">
-            <a:schemeClr val="tx1"/>
-          </a:fontRef>
-        </p:style>
-      </p:cxnSp>
-      <p:sp>
-        <p:nvSpPr>
-          <p:cNvPr id="12" name="TextBox 11"/>
-          <p:cNvSpPr txBox="1"/>
-          <p:nvPr/>
-        </p:nvSpPr>
-        <p:spPr>
-          <a:xfrm>
-            <a:off x="1947672" y="2955798"/>
-            <a:ext cx="596646" cy="103875"/>
-          </a:xfrm>
-          <a:prstGeom prst="rect">
-            <a:avLst/>
-          </a:prstGeom>
-          <a:noFill/>
-        </p:spPr>
-        <p:txBody>
-          <a:bodyPr wrap="square" lIns="0" tIns="0" rIns="0" bIns="0" anchor="t">
-            <a:spAutoFit/>
-          </a:bodyPr>
-          <a:lstStyle/>
-          <a:p>
-            <a:pPr algn="ctr">
-              <a:spcAft>
-                <a:spcPts val="225"/>
-              </a:spcAft>
-            </a:pPr>
-            <a:r>
-              <a:rPr sz="675" b="1">
-                <a:solidFill>
-                  <a:srgbClr val="C27C00"/>
-                </a:solidFill>
-                <a:latin typeface="Calibri"/>
-              </a:rPr>
-              <a:t>decisions.json</a:t>
-            </a:r>
-          </a:p>
-        </p:txBody>
-      </p:sp>
-      <p:sp>
-        <p:nvSpPr>
-          <p:cNvPr id="13" name="ADK root agent"/>
-          <p:cNvSpPr/>
-          <p:nvPr/>
-        </p:nvSpPr>
-        <p:spPr>
-          <a:xfrm>
-            <a:off x="2571750" y="1028700"/>
-            <a:ext cx="6227064" cy="2023110"/>
-          </a:xfrm>
-          <a:prstGeom prst="roundRect">
-            <a:avLst>
-              <a:gd name="adj" fmla="val 4067"/>
-            </a:avLst>
-          </a:prstGeom>
-          <a:solidFill>
-            <a:srgbClr val="E3EFED"/>
-          </a:solidFill>
-          <a:ln w="12700">
-            <a:solidFill>
-              <a:srgbClr val="B8D4D0"/>
-            </a:solidFill>
-          </a:ln>
-          <a:effectLst/>
-        </p:spPr>
-        <p:style>
-          <a:lnRef idx="1">
-            <a:schemeClr val="accent1"/>
-          </a:lnRef>
-          <a:fillRef idx="3">
-            <a:schemeClr val="accent1"/>
-          </a:fillRef>
-          <a:effectRef idx="2">
-            <a:schemeClr val="accent1"/>
-          </a:effectRef>
-          <a:fontRef idx="minor">
-            <a:schemeClr val="lt1"/>
-          </a:fontRef>
-        </p:style>
-        <p:txBody>
-          <a:bodyPr rtlCol="0" anchor="ctr"/>
-          <a:lstStyle/>
-          <a:p>
-            <a:pPr algn="ctr"/>
-            <a:endParaRPr sz="1050"/>
-          </a:p>
-        </p:txBody>
-      </p:sp>
-      <p:sp>
-        <p:nvSpPr>
-          <p:cNvPr id="14" name="TextBox 13"/>
-          <p:cNvSpPr txBox="1"/>
-          <p:nvPr/>
-        </p:nvSpPr>
-        <p:spPr>
-          <a:xfrm>
-            <a:off x="2708910" y="1097281"/>
-            <a:ext cx="5952744" cy="161583"/>
-          </a:xfrm>
-          <a:prstGeom prst="rect">
-            <a:avLst/>
-          </a:prstGeom>
-          <a:noFill/>
-        </p:spPr>
-        <p:txBody>
-          <a:bodyPr wrap="square" lIns="0" tIns="0" rIns="0" bIns="0" anchor="t">
-            <a:spAutoFit/>
-          </a:bodyPr>
-          <a:lstStyle/>
-          <a:p>
-            <a:pPr>
-              <a:spcAft>
-                <a:spcPts val="225"/>
-              </a:spcAft>
-            </a:pPr>
-            <a:r>
-              <a:rPr sz="1050" b="1">
-                <a:solidFill>
-                  <a:srgbClr val="12343B"/>
-                </a:solidFill>
-                <a:latin typeface="Calibri"/>
-              </a:rPr>
-              <a:t>ADK root agent </a:t>
-            </a:r>
-            <a:r>
-              <a:rPr sz="1050">
-                <a:solidFill>
-                  <a:srgbClr val="1F6F6B"/>
-                </a:solidFill>
-                <a:latin typeface="Calibri"/>
-              </a:rPr>
-              <a:t>· SequentialAgent · Gemini · deployed on Agent Runtime</a:t>
-            </a:r>
-          </a:p>
-        </p:txBody>
-      </p:sp>
-      <p:sp>
-        <p:nvSpPr>
-          <p:cNvPr id="15" name="Agent 1"/>
-          <p:cNvSpPr/>
-          <p:nvPr/>
-        </p:nvSpPr>
-        <p:spPr>
-          <a:xfrm>
-            <a:off x="2708910" y="1405889"/>
-            <a:ext cx="1323594" cy="1165860"/>
-          </a:xfrm>
-          <a:prstGeom prst="roundRect">
-            <a:avLst>
-              <a:gd name="adj" fmla="val 7058"/>
-            </a:avLst>
-          </a:prstGeom>
-          <a:solidFill>
-            <a:srgbClr val="FFFFFF"/>
-          </a:solidFill>
-          <a:ln w="12700">
-            <a:solidFill>
-              <a:srgbClr val="B8D4D0"/>
-            </a:solidFill>
-          </a:ln>
-          <a:effectLst/>
-        </p:spPr>
-        <p:style>
-          <a:lnRef idx="1">
-            <a:schemeClr val="accent1"/>
-          </a:lnRef>
-          <a:fillRef idx="3">
-            <a:schemeClr val="accent1"/>
-          </a:fillRef>
-          <a:effectRef idx="2">
-            <a:schemeClr val="accent1"/>
-          </a:effectRef>
-          <a:fontRef idx="minor">
-            <a:schemeClr val="lt1"/>
-          </a:fontRef>
-        </p:style>
-        <p:txBody>
-          <a:bodyPr rtlCol="0" anchor="ctr"/>
-          <a:lstStyle/>
-          <a:p>
-            <a:pPr algn="ctr"/>
-            <a:endParaRPr sz="1050"/>
-          </a:p>
-        </p:txBody>
-      </p:sp>
-      <p:sp>
-        <p:nvSpPr>
-          <p:cNvPr id="16" name="Oval 15"/>
-          <p:cNvSpPr/>
-          <p:nvPr/>
-        </p:nvSpPr>
-        <p:spPr>
-          <a:xfrm>
-            <a:off x="2804922" y="1501902"/>
-            <a:ext cx="246888" cy="246888"/>
-          </a:xfrm>
-          <a:prstGeom prst="ellipse">
-            <a:avLst/>
-          </a:prstGeom>
-          <a:solidFill>
-            <a:srgbClr val="1F6F6B"/>
-          </a:solidFill>
-          <a:ln>
-            <a:noFill/>
-          </a:ln>
-          <a:effectLst/>
-        </p:spPr>
-        <p:style>
-          <a:lnRef idx="1">
-            <a:schemeClr val="accent1"/>
-          </a:lnRef>
-          <a:fillRef idx="3">
-            <a:schemeClr val="accent1"/>
-          </a:fillRef>
-          <a:effectRef idx="2">
-            <a:schemeClr val="accent1"/>
-          </a:effectRef>
-          <a:fontRef idx="minor">
-            <a:schemeClr val="lt1"/>
-          </a:fontRef>
-        </p:style>
-        <p:txBody>
-          <a:bodyPr lIns="0" tIns="0" rIns="0" bIns="0" rtlCol="0" anchor="ctr"/>
-          <a:lstStyle/>
-          <a:p>
-            <a:pPr algn="ctr"/>
-            <a:r>
-              <a:rPr sz="975" b="1">
-                <a:solidFill>
-                  <a:srgbClr val="FFFFFF"/>
-                </a:solidFill>
-                <a:latin typeface="Calibri"/>
-              </a:rPr>
-              <a:t>1</a:t>
-            </a:r>
-          </a:p>
-        </p:txBody>
-      </p:sp>
-      <p:sp>
-        <p:nvSpPr>
-          <p:cNvPr id="17" name="TextBox 16"/>
-          <p:cNvSpPr txBox="1"/>
-          <p:nvPr/>
-        </p:nvSpPr>
-        <p:spPr>
-          <a:xfrm>
-            <a:off x="2804922" y="1817370"/>
-            <a:ext cx="1131570" cy="150041"/>
-          </a:xfrm>
-          <a:prstGeom prst="rect">
-            <a:avLst/>
-          </a:prstGeom>
-          <a:noFill/>
-        </p:spPr>
-        <p:txBody>
-          <a:bodyPr wrap="square" lIns="0" tIns="0" rIns="0" bIns="0" anchor="t">
-            <a:spAutoFit/>
-          </a:bodyPr>
-          <a:lstStyle/>
-          <a:p>
-            <a:pPr>
-              <a:spcAft>
-                <a:spcPts val="225"/>
-              </a:spcAft>
-            </a:pPr>
-            <a:r>
-              <a:rPr sz="975" b="1">
-                <a:solidFill>
-                  <a:srgbClr val="12343B"/>
-                </a:solidFill>
-                <a:latin typeface="Calibri"/>
-              </a:rPr>
-              <a:t>Cascade Scout</a:t>
-            </a:r>
-          </a:p>
-        </p:txBody>
-      </p:sp>
-      <p:sp>
-        <p:nvSpPr>
-          <p:cNvPr id="18" name="TextBox 17"/>
-          <p:cNvSpPr txBox="1"/>
-          <p:nvPr/>
-        </p:nvSpPr>
-        <p:spPr>
-          <a:xfrm>
-            <a:off x="2804922" y="2036826"/>
-            <a:ext cx="1131570" cy="380873"/>
-          </a:xfrm>
-          <a:prstGeom prst="rect">
-            <a:avLst/>
-          </a:prstGeom>
-          <a:noFill/>
-        </p:spPr>
-        <p:txBody>
-          <a:bodyPr wrap="square" lIns="0" tIns="0" rIns="0" bIns="0" anchor="t">
-            <a:spAutoFit/>
-          </a:bodyPr>
-          <a:lstStyle/>
-          <a:p>
-            <a:pPr>
-              <a:spcAft>
-                <a:spcPts val="225"/>
-              </a:spcAft>
-            </a:pPr>
-            <a:r>
-              <a:rPr sz="825">
-                <a:solidFill>
-                  <a:srgbClr val="4A5A5D"/>
-                </a:solidFill>
-                <a:latin typeface="Calibri"/>
-              </a:rPr>
-              <a:t>Walks the graph: footfall forward, then supplies backward, 1 to 2 hops</a:t>
-            </a:r>
-          </a:p>
-        </p:txBody>
-      </p:sp>
-      <p:cxnSp>
-        <p:nvCxnSpPr>
-          <p:cNvPr id="19" name="Connector 18"/>
-          <p:cNvCxnSpPr/>
-          <p:nvPr/>
-        </p:nvCxnSpPr>
-        <p:spPr>
-          <a:xfrm>
-            <a:off x="4059936" y="1988820"/>
-            <a:ext cx="164592" cy="0"/>
-          </a:xfrm>
-          <a:prstGeom prst="line">
-            <a:avLst/>
-          </a:prstGeom>
-          <a:ln w="25400">
-            <a:solidFill>
-              <a:srgbClr val="1F6F6B"/>
-            </a:solidFill>
-            <a:tailEnd type="triangle" w="med" len="med"/>
-          </a:ln>
-        </p:spPr>
-        <p:style>
-          <a:lnRef idx="2">
-            <a:schemeClr val="accent1"/>
-          </a:lnRef>
-          <a:fillRef idx="0">
-            <a:schemeClr val="accent1"/>
-          </a:fillRef>
-          <a:effectRef idx="1">
-            <a:schemeClr val="accent1"/>
-          </a:effectRef>
-          <a:fontRef idx="minor">
-            <a:schemeClr val="tx1"/>
-          </a:fontRef>
-        </p:style>
-      </p:cxnSp>
-      <p:sp>
-        <p:nvSpPr>
-          <p:cNvPr id="20" name="Agent 2"/>
-          <p:cNvSpPr/>
-          <p:nvPr/>
-        </p:nvSpPr>
-        <p:spPr>
-          <a:xfrm>
-            <a:off x="4251960" y="1405889"/>
-            <a:ext cx="1323594" cy="1165860"/>
-          </a:xfrm>
-          <a:prstGeom prst="roundRect">
-            <a:avLst>
-              <a:gd name="adj" fmla="val 7058"/>
-            </a:avLst>
-          </a:prstGeom>
-          <a:solidFill>
-            <a:srgbClr val="FFFFFF"/>
-          </a:solidFill>
-          <a:ln w="12700">
-            <a:solidFill>
-              <a:srgbClr val="B8D4D0"/>
-            </a:solidFill>
-          </a:ln>
-          <a:effectLst/>
-        </p:spPr>
-        <p:style>
-          <a:lnRef idx="1">
-            <a:schemeClr val="accent1"/>
-          </a:lnRef>
-          <a:fillRef idx="3">
-            <a:schemeClr val="accent1"/>
-          </a:fillRef>
-          <a:effectRef idx="2">
-            <a:schemeClr val="accent1"/>
-          </a:effectRef>
-          <a:fontRef idx="minor">
-            <a:schemeClr val="lt1"/>
-          </a:fontRef>
-        </p:style>
-        <p:txBody>
-          <a:bodyPr rtlCol="0" anchor="ctr"/>
-          <a:lstStyle/>
-          <a:p>
-            <a:pPr algn="ctr"/>
-            <a:endParaRPr sz="1050"/>
-          </a:p>
-        </p:txBody>
-      </p:sp>
-      <p:sp>
-        <p:nvSpPr>
-          <p:cNvPr id="21" name="Oval 20"/>
-          <p:cNvSpPr/>
-          <p:nvPr/>
-        </p:nvSpPr>
-        <p:spPr>
-          <a:xfrm>
-            <a:off x="4347972" y="1501902"/>
-            <a:ext cx="246888" cy="246888"/>
-          </a:xfrm>
-          <a:prstGeom prst="ellipse">
-            <a:avLst/>
-          </a:prstGeom>
-          <a:solidFill>
-            <a:srgbClr val="1F6F6B"/>
-          </a:solidFill>
-          <a:ln>
-            <a:noFill/>
-          </a:ln>
-          <a:effectLst/>
-        </p:spPr>
-        <p:style>
-          <a:lnRef idx="1">
-            <a:schemeClr val="accent1"/>
-          </a:lnRef>
-          <a:fillRef idx="3">
-            <a:schemeClr val="accent1"/>
-          </a:fillRef>
-          <a:effectRef idx="2">
-            <a:schemeClr val="accent1"/>
-          </a:effectRef>
-          <a:fontRef idx="minor">
-            <a:schemeClr val="lt1"/>
-          </a:fontRef>
-        </p:style>
-        <p:txBody>
-          <a:bodyPr lIns="0" tIns="0" rIns="0" bIns="0" rtlCol="0" anchor="ctr"/>
-          <a:lstStyle/>
-          <a:p>
-            <a:pPr algn="ctr"/>
-            <a:r>
-              <a:rPr sz="975" b="1">
-                <a:solidFill>
-                  <a:srgbClr val="FFFFFF"/>
-                </a:solidFill>
-                <a:latin typeface="Calibri"/>
-              </a:rPr>
-              <a:t>2</a:t>
-            </a:r>
-          </a:p>
-        </p:txBody>
-      </p:sp>
-      <p:sp>
-        <p:nvSpPr>
-          <p:cNvPr id="22" name="TextBox 21"/>
-          <p:cNvSpPr txBox="1"/>
-          <p:nvPr/>
-        </p:nvSpPr>
-        <p:spPr>
-          <a:xfrm>
-            <a:off x="4347972" y="1817370"/>
-            <a:ext cx="1131570" cy="150041"/>
-          </a:xfrm>
-          <a:prstGeom prst="rect">
-            <a:avLst/>
-          </a:prstGeom>
-          <a:noFill/>
-        </p:spPr>
-        <p:txBody>
-          <a:bodyPr wrap="square" lIns="0" tIns="0" rIns="0" bIns="0" anchor="t">
-            <a:spAutoFit/>
-          </a:bodyPr>
-          <a:lstStyle/>
-          <a:p>
-            <a:pPr>
-              <a:spcAft>
-                <a:spcPts val="225"/>
-              </a:spcAft>
-            </a:pPr>
-            <a:r>
-              <a:rPr sz="975" b="1">
-                <a:solidFill>
-                  <a:srgbClr val="12343B"/>
-                </a:solidFill>
-                <a:latin typeface="Calibri"/>
-              </a:rPr>
-              <a:t>Risk Assessor</a:t>
-            </a:r>
-          </a:p>
-        </p:txBody>
-      </p:sp>
-      <p:sp>
-        <p:nvSpPr>
-          <p:cNvPr id="23" name="TextBox 22"/>
-          <p:cNvSpPr txBox="1"/>
-          <p:nvPr/>
-        </p:nvSpPr>
-        <p:spPr>
-          <a:xfrm>
-            <a:off x="4347972" y="2036826"/>
-            <a:ext cx="1131570" cy="380873"/>
-          </a:xfrm>
-          <a:prstGeom prst="rect">
-            <a:avLst/>
-          </a:prstGeom>
-          <a:noFill/>
-        </p:spPr>
-        <p:txBody>
-          <a:bodyPr wrap="square" lIns="0" tIns="0" rIns="0" bIns="0" anchor="t">
-            <a:spAutoFit/>
-          </a:bodyPr>
-          <a:lstStyle/>
-          <a:p>
-            <a:pPr>
-              <a:spcAft>
-                <a:spcPts val="225"/>
-              </a:spcAft>
-            </a:pPr>
-            <a:r>
-              <a:rPr sz="825">
-                <a:solidFill>
-                  <a:srgbClr val="4A5A5D"/>
-                </a:solidFill>
-                <a:latin typeface="Calibri"/>
-              </a:rPr>
-              <a:t>Scores exposure, fragility and tract need for each business</a:t>
-            </a:r>
-          </a:p>
-        </p:txBody>
-      </p:sp>
-      <p:cxnSp>
-        <p:nvCxnSpPr>
-          <p:cNvPr id="24" name="Connector 23"/>
-          <p:cNvCxnSpPr/>
-          <p:nvPr/>
-        </p:nvCxnSpPr>
-        <p:spPr>
-          <a:xfrm>
-            <a:off x="5602986" y="1988820"/>
-            <a:ext cx="164592" cy="0"/>
-          </a:xfrm>
-          <a:prstGeom prst="line">
-            <a:avLst/>
-          </a:prstGeom>
-          <a:ln w="25400">
-            <a:solidFill>
-              <a:srgbClr val="1F6F6B"/>
-            </a:solidFill>
-            <a:tailEnd type="triangle" w="med" len="med"/>
-          </a:ln>
-        </p:spPr>
-        <p:style>
-          <a:lnRef idx="2">
-            <a:schemeClr val="accent1"/>
-          </a:lnRef>
-          <a:fillRef idx="0">
-            <a:schemeClr val="accent1"/>
-          </a:fillRef>
-          <a:effectRef idx="1">
-            <a:schemeClr val="accent1"/>
-          </a:effectRef>
-          <a:fontRef idx="minor">
-            <a:schemeClr val="tx1"/>
-          </a:fontRef>
-        </p:style>
-      </p:cxnSp>
-      <p:sp>
-        <p:nvSpPr>
-          <p:cNvPr id="25" name="Agent 3"/>
-          <p:cNvSpPr/>
-          <p:nvPr/>
-        </p:nvSpPr>
-        <p:spPr>
-          <a:xfrm>
-            <a:off x="5795009" y="1405889"/>
-            <a:ext cx="1323594" cy="1165860"/>
-          </a:xfrm>
-          <a:prstGeom prst="roundRect">
-            <a:avLst>
-              <a:gd name="adj" fmla="val 7058"/>
-            </a:avLst>
-          </a:prstGeom>
-          <a:solidFill>
-            <a:srgbClr val="FFFFFF"/>
-          </a:solidFill>
-          <a:ln w="12700">
-            <a:solidFill>
-              <a:srgbClr val="B8D4D0"/>
-            </a:solidFill>
-          </a:ln>
-          <a:effectLst/>
-        </p:spPr>
-        <p:style>
-          <a:lnRef idx="1">
-            <a:schemeClr val="accent1"/>
-          </a:lnRef>
-          <a:fillRef idx="3">
-            <a:schemeClr val="accent1"/>
-          </a:fillRef>
-          <a:effectRef idx="2">
-            <a:schemeClr val="accent1"/>
-          </a:effectRef>
-          <a:fontRef idx="minor">
-            <a:schemeClr val="lt1"/>
-          </a:fontRef>
-        </p:style>
-        <p:txBody>
-          <a:bodyPr rtlCol="0" anchor="ctr"/>
-          <a:lstStyle/>
-          <a:p>
-            <a:pPr algn="ctr"/>
-            <a:endParaRPr sz="1050"/>
-          </a:p>
-        </p:txBody>
-      </p:sp>
-      <p:sp>
-        <p:nvSpPr>
-          <p:cNvPr id="26" name="Oval 25"/>
-          <p:cNvSpPr/>
-          <p:nvPr/>
-        </p:nvSpPr>
-        <p:spPr>
-          <a:xfrm>
-            <a:off x="5891022" y="1501902"/>
-            <a:ext cx="246888" cy="246888"/>
-          </a:xfrm>
-          <a:prstGeom prst="ellipse">
-            <a:avLst/>
-          </a:prstGeom>
-          <a:solidFill>
-            <a:srgbClr val="C27C00"/>
-          </a:solidFill>
-          <a:ln>
-            <a:noFill/>
-          </a:ln>
-          <a:effectLst/>
-        </p:spPr>
-        <p:style>
-          <a:lnRef idx="1">
-            <a:schemeClr val="accent1"/>
-          </a:lnRef>
-          <a:fillRef idx="3">
-            <a:schemeClr val="accent1"/>
-          </a:fillRef>
-          <a:effectRef idx="2">
-            <a:schemeClr val="accent1"/>
-          </a:effectRef>
-          <a:fontRef idx="minor">
-            <a:schemeClr val="lt1"/>
-          </a:fontRef>
-        </p:style>
-        <p:txBody>
-          <a:bodyPr lIns="0" tIns="0" rIns="0" bIns="0" rtlCol="0" anchor="ctr"/>
-          <a:lstStyle/>
-          <a:p>
-            <a:pPr algn="ctr"/>
-            <a:r>
-              <a:rPr sz="975" b="1">
-                <a:solidFill>
-                  <a:srgbClr val="FFFFFF"/>
-                </a:solidFill>
-                <a:latin typeface="Calibri"/>
-              </a:rPr>
-              <a:t>3</a:t>
-            </a:r>
-          </a:p>
-        </p:txBody>
-      </p:sp>
-      <p:sp>
-        <p:nvSpPr>
-          <p:cNvPr id="27" name="TextBox 26"/>
-          <p:cNvSpPr txBox="1"/>
-          <p:nvPr/>
-        </p:nvSpPr>
-        <p:spPr>
-          <a:xfrm>
-            <a:off x="5891022" y="1817370"/>
-            <a:ext cx="1131570" cy="150041"/>
-          </a:xfrm>
-          <a:prstGeom prst="rect">
-            <a:avLst/>
-          </a:prstGeom>
-          <a:noFill/>
-        </p:spPr>
-        <p:txBody>
-          <a:bodyPr wrap="square" lIns="0" tIns="0" rIns="0" bIns="0" anchor="t">
-            <a:spAutoFit/>
-          </a:bodyPr>
-          <a:lstStyle/>
-          <a:p>
-            <a:pPr>
-              <a:spcAft>
-                <a:spcPts val="225"/>
-              </a:spcAft>
-            </a:pPr>
-            <a:r>
-              <a:rPr sz="975" b="1">
-                <a:solidFill>
-                  <a:srgbClr val="12343B"/>
-                </a:solidFill>
-                <a:latin typeface="Calibri"/>
-              </a:rPr>
-              <a:t>Grant Allocator</a:t>
-            </a:r>
-          </a:p>
-        </p:txBody>
-      </p:sp>
-      <p:sp>
-        <p:nvSpPr>
-          <p:cNvPr id="28" name="TextBox 27"/>
-          <p:cNvSpPr txBox="1"/>
-          <p:nvPr/>
-        </p:nvSpPr>
-        <p:spPr>
-          <a:xfrm>
-            <a:off x="5891022" y="2036826"/>
-            <a:ext cx="1131570" cy="380873"/>
-          </a:xfrm>
-          <a:prstGeom prst="rect">
-            <a:avLst/>
-          </a:prstGeom>
-          <a:noFill/>
-        </p:spPr>
-        <p:txBody>
-          <a:bodyPr wrap="square" lIns="0" tIns="0" rIns="0" bIns="0" anchor="t">
-            <a:spAutoFit/>
-          </a:bodyPr>
-          <a:lstStyle/>
-          <a:p>
-            <a:pPr>
-              <a:spcAft>
-                <a:spcPts val="225"/>
-              </a:spcAft>
-            </a:pPr>
-            <a:r>
-              <a:rPr sz="825">
-                <a:solidFill>
-                  <a:srgbClr val="4A5A5D"/>
-                </a:solidFill>
-                <a:latin typeface="Calibri"/>
-              </a:rPr>
-              <a:t>Splits the budget, names the runner-up, tests the assumption</a:t>
-            </a:r>
-          </a:p>
-        </p:txBody>
-      </p:sp>
-      <p:cxnSp>
-        <p:nvCxnSpPr>
-          <p:cNvPr id="29" name="Connector 28"/>
-          <p:cNvCxnSpPr/>
-          <p:nvPr/>
-        </p:nvCxnSpPr>
-        <p:spPr>
-          <a:xfrm>
-            <a:off x="7146036" y="1988820"/>
-            <a:ext cx="164593" cy="0"/>
-          </a:xfrm>
-          <a:prstGeom prst="line">
-            <a:avLst/>
-          </a:prstGeom>
-          <a:ln w="25400">
-            <a:solidFill>
-              <a:srgbClr val="1F6F6B"/>
-            </a:solidFill>
-            <a:tailEnd type="triangle" w="med" len="med"/>
-          </a:ln>
-        </p:spPr>
-        <p:style>
-          <a:lnRef idx="2">
-            <a:schemeClr val="accent1"/>
-          </a:lnRef>
-          <a:fillRef idx="0">
-            <a:schemeClr val="accent1"/>
-          </a:fillRef>
-          <a:effectRef idx="1">
-            <a:schemeClr val="accent1"/>
-          </a:effectRef>
-          <a:fontRef idx="minor">
-            <a:schemeClr val="tx1"/>
-          </a:fontRef>
-        </p:style>
-      </p:cxnSp>
-      <p:sp>
-        <p:nvSpPr>
-          <p:cNvPr id="30" name="Agent 4"/>
-          <p:cNvSpPr/>
-          <p:nvPr/>
-        </p:nvSpPr>
-        <p:spPr>
-          <a:xfrm>
-            <a:off x="7338060" y="1405889"/>
-            <a:ext cx="1323594" cy="1165860"/>
-          </a:xfrm>
-          <a:prstGeom prst="roundRect">
-            <a:avLst>
-              <a:gd name="adj" fmla="val 7058"/>
-            </a:avLst>
-          </a:prstGeom>
-          <a:solidFill>
-            <a:srgbClr val="FFFFFF"/>
-          </a:solidFill>
-          <a:ln w="12700">
-            <a:solidFill>
-              <a:srgbClr val="B8D4D0"/>
-            </a:solidFill>
-          </a:ln>
-          <a:effectLst/>
-        </p:spPr>
-        <p:style>
-          <a:lnRef idx="1">
-            <a:schemeClr val="accent1"/>
-          </a:lnRef>
-          <a:fillRef idx="3">
-            <a:schemeClr val="accent1"/>
-          </a:fillRef>
-          <a:effectRef idx="2">
-            <a:schemeClr val="accent1"/>
-          </a:effectRef>
-          <a:fontRef idx="minor">
-            <a:schemeClr val="lt1"/>
-          </a:fontRef>
-        </p:style>
-        <p:txBody>
-          <a:bodyPr rtlCol="0" anchor="ctr"/>
-          <a:lstStyle/>
-          <a:p>
-            <a:pPr algn="ctr"/>
-            <a:endParaRPr sz="1050"/>
-          </a:p>
-        </p:txBody>
-      </p:sp>
-      <p:sp>
-        <p:nvSpPr>
-          <p:cNvPr id="31" name="Oval 30"/>
-          <p:cNvSpPr/>
-          <p:nvPr/>
-        </p:nvSpPr>
-        <p:spPr>
-          <a:xfrm>
-            <a:off x="7434072" y="1501902"/>
-            <a:ext cx="246888" cy="246888"/>
-          </a:xfrm>
-          <a:prstGeom prst="ellipse">
-            <a:avLst/>
-          </a:prstGeom>
-          <a:solidFill>
-            <a:srgbClr val="1F6F6B"/>
-          </a:solidFill>
-          <a:ln>
-            <a:noFill/>
-          </a:ln>
-          <a:effectLst/>
-        </p:spPr>
-        <p:style>
-          <a:lnRef idx="1">
-            <a:schemeClr val="accent1"/>
-          </a:lnRef>
-          <a:fillRef idx="3">
-            <a:schemeClr val="accent1"/>
-          </a:fillRef>
-          <a:effectRef idx="2">
-            <a:schemeClr val="accent1"/>
-          </a:effectRef>
-          <a:fontRef idx="minor">
-            <a:schemeClr val="lt1"/>
-          </a:fontRef>
-        </p:style>
-        <p:txBody>
-          <a:bodyPr lIns="0" tIns="0" rIns="0" bIns="0" rtlCol="0" anchor="ctr"/>
-          <a:lstStyle/>
-          <a:p>
-            <a:pPr algn="ctr"/>
-            <a:r>
-              <a:rPr sz="975" b="1">
-                <a:solidFill>
-                  <a:srgbClr val="FFFFFF"/>
-                </a:solidFill>
-                <a:latin typeface="Calibri"/>
-              </a:rPr>
-              <a:t>4</a:t>
-            </a:r>
-          </a:p>
-        </p:txBody>
-      </p:sp>
-      <p:sp>
-        <p:nvSpPr>
-          <p:cNvPr id="32" name="TextBox 31"/>
-          <p:cNvSpPr txBox="1"/>
-          <p:nvPr/>
-        </p:nvSpPr>
-        <p:spPr>
-          <a:xfrm>
-            <a:off x="7434072" y="1817370"/>
-            <a:ext cx="1131570" cy="150041"/>
-          </a:xfrm>
-          <a:prstGeom prst="rect">
-            <a:avLst/>
-          </a:prstGeom>
-          <a:noFill/>
-        </p:spPr>
-        <p:txBody>
-          <a:bodyPr wrap="square" lIns="0" tIns="0" rIns="0" bIns="0" anchor="t">
-            <a:spAutoFit/>
-          </a:bodyPr>
-          <a:lstStyle/>
-          <a:p>
-            <a:pPr>
-              <a:spcAft>
-                <a:spcPts val="225"/>
-              </a:spcAft>
-            </a:pPr>
-            <a:r>
-              <a:rPr sz="975" b="1">
-                <a:solidFill>
-                  <a:srgbClr val="12343B"/>
-                </a:solidFill>
-                <a:latin typeface="Calibri"/>
-              </a:rPr>
-              <a:t>Memo Writer</a:t>
-            </a:r>
-          </a:p>
-        </p:txBody>
-      </p:sp>
-      <p:sp>
-        <p:nvSpPr>
-          <p:cNvPr id="33" name="TextBox 32"/>
-          <p:cNvSpPr txBox="1"/>
-          <p:nvPr/>
-        </p:nvSpPr>
-        <p:spPr>
-          <a:xfrm>
-            <a:off x="7434072" y="2036826"/>
-            <a:ext cx="1131570" cy="253916"/>
-          </a:xfrm>
-          <a:prstGeom prst="rect">
-            <a:avLst/>
-          </a:prstGeom>
-          <a:noFill/>
-        </p:spPr>
-        <p:txBody>
-          <a:bodyPr wrap="square" lIns="0" tIns="0" rIns="0" bIns="0" anchor="t">
-            <a:spAutoFit/>
-          </a:bodyPr>
-          <a:lstStyle/>
-          <a:p>
-            <a:pPr>
-              <a:spcAft>
-                <a:spcPts val="225"/>
-              </a:spcAft>
-            </a:pPr>
-            <a:r>
-              <a:rPr sz="825">
-                <a:solidFill>
-                  <a:srgbClr val="4A5A5D"/>
-                </a:solidFill>
-                <a:latin typeface="Calibri"/>
-              </a:rPr>
-              <a:t>Writes every justification and the grant memo</a:t>
-            </a:r>
-          </a:p>
-        </p:txBody>
-      </p:sp>
-      <p:sp>
-        <p:nvSpPr>
-          <p:cNvPr id="34" name="Session state"/>
-          <p:cNvSpPr/>
-          <p:nvPr/>
-        </p:nvSpPr>
-        <p:spPr>
-          <a:xfrm>
-            <a:off x="2708910" y="2647188"/>
-            <a:ext cx="5952744" cy="274320"/>
-          </a:xfrm>
-          <a:prstGeom prst="roundRect">
-            <a:avLst>
-              <a:gd name="adj" fmla="val 12000"/>
-            </a:avLst>
-          </a:prstGeom>
-          <a:solidFill>
-            <a:srgbClr val="FFFFFF"/>
-          </a:solidFill>
-          <a:ln w="12700">
-            <a:solidFill>
-              <a:srgbClr val="B8D4D0"/>
-            </a:solidFill>
-          </a:ln>
-          <a:effectLst/>
-        </p:spPr>
-        <p:style>
-          <a:lnRef idx="1">
-            <a:schemeClr val="accent1"/>
-          </a:lnRef>
-          <a:fillRef idx="3">
-            <a:schemeClr val="accent1"/>
-          </a:fillRef>
-          <a:effectRef idx="2">
-            <a:schemeClr val="accent1"/>
-          </a:effectRef>
-          <a:fontRef idx="minor">
-            <a:schemeClr val="lt1"/>
-          </a:fontRef>
-        </p:style>
-        <p:txBody>
-          <a:bodyPr rtlCol="0" anchor="ctr"/>
-          <a:lstStyle/>
-          <a:p>
-            <a:pPr algn="ctr"/>
-            <a:endParaRPr sz="1050"/>
-          </a:p>
-        </p:txBody>
-      </p:sp>
-      <p:sp>
-        <p:nvSpPr>
-          <p:cNvPr id="35" name="TextBox 34"/>
-          <p:cNvSpPr txBox="1"/>
-          <p:nvPr/>
-        </p:nvSpPr>
-        <p:spPr>
-          <a:xfrm>
-            <a:off x="2811780" y="2720870"/>
-            <a:ext cx="5747004" cy="126958"/>
-          </a:xfrm>
-          <a:prstGeom prst="rect">
-            <a:avLst/>
-          </a:prstGeom>
-          <a:noFill/>
-        </p:spPr>
-        <p:txBody>
-          <a:bodyPr wrap="square" lIns="0" tIns="0" rIns="0" bIns="0" anchor="ctr">
-            <a:spAutoFit/>
-          </a:bodyPr>
-          <a:lstStyle/>
-          <a:p>
-            <a:pPr>
-              <a:spcAft>
-                <a:spcPts val="225"/>
-              </a:spcAft>
-            </a:pPr>
-            <a:r>
-              <a:rPr sz="825" b="1">
-                <a:solidFill>
-                  <a:srgbClr val="1F6F6B"/>
-                </a:solidFill>
-                <a:latin typeface="Calibri"/>
-              </a:rPr>
-              <a:t>Shared session.state   </a:t>
-            </a:r>
-            <a:r>
-              <a:rPr sz="825">
-                <a:solidFill>
-                  <a:srgbClr val="12343B"/>
-                </a:solidFill>
-                <a:latin typeface="Calibri"/>
-              </a:rPr>
-              <a:t>cascade  →  risk  →  allocation  →  decisions</a:t>
-            </a:r>
-          </a:p>
-        </p:txBody>
-      </p:sp>
-      <p:sp>
-        <p:nvSpPr>
-          <p:cNvPr id="36" name="MCP Toolbox"/>
-          <p:cNvSpPr/>
-          <p:nvPr/>
-        </p:nvSpPr>
-        <p:spPr>
-          <a:xfrm>
-            <a:off x="2708911" y="3326130"/>
-            <a:ext cx="2866643" cy="720090"/>
-          </a:xfrm>
-          <a:prstGeom prst="roundRect">
-            <a:avLst>
-              <a:gd name="adj" fmla="val 11428"/>
-            </a:avLst>
-          </a:prstGeom>
-          <a:solidFill>
-            <a:srgbClr val="FFFFFF"/>
-          </a:solidFill>
-          <a:ln w="19050">
-            <a:solidFill>
-              <a:srgbClr val="1F6F6B"/>
-            </a:solidFill>
-          </a:ln>
-          <a:effectLst/>
-        </p:spPr>
-        <p:style>
-          <a:lnRef idx="1">
-            <a:schemeClr val="accent1"/>
-          </a:lnRef>
-          <a:fillRef idx="3">
-            <a:schemeClr val="accent1"/>
-          </a:fillRef>
-          <a:effectRef idx="2">
-            <a:schemeClr val="accent1"/>
-          </a:effectRef>
-          <a:fontRef idx="minor">
-            <a:schemeClr val="lt1"/>
-          </a:fontRef>
-        </p:style>
-        <p:txBody>
-          <a:bodyPr rtlCol="0" anchor="ctr"/>
-          <a:lstStyle/>
-          <a:p>
-            <a:pPr algn="ctr"/>
-            <a:endParaRPr sz="1050"/>
-          </a:p>
-        </p:txBody>
-      </p:sp>
-      <p:sp>
-        <p:nvSpPr>
-          <p:cNvPr id="37" name="TextBox 36"/>
-          <p:cNvSpPr txBox="1"/>
-          <p:nvPr/>
-        </p:nvSpPr>
-        <p:spPr>
-          <a:xfrm>
-            <a:off x="2832354" y="3394710"/>
-            <a:ext cx="2619756" cy="429605"/>
-          </a:xfrm>
-          <a:prstGeom prst="rect">
-            <a:avLst/>
-          </a:prstGeom>
-          <a:noFill/>
-        </p:spPr>
-        <p:txBody>
-          <a:bodyPr wrap="square" lIns="0" tIns="0" rIns="0" bIns="0" anchor="t">
-            <a:spAutoFit/>
-          </a:bodyPr>
-          <a:lstStyle/>
-          <a:p>
-            <a:pPr>
-              <a:spcAft>
-                <a:spcPts val="225"/>
-              </a:spcAft>
-            </a:pPr>
-            <a:r>
-              <a:rPr sz="975" b="1">
-                <a:solidFill>
-                  <a:srgbClr val="12343B"/>
-                </a:solidFill>
-                <a:latin typeface="Calibri"/>
-              </a:rPr>
-              <a:t>MCP Toolbox for Databases </a:t>
-            </a:r>
-            <a:r>
-              <a:rPr sz="825">
-                <a:solidFill>
-                  <a:srgbClr val="1F6F6B"/>
-                </a:solidFill>
-                <a:latin typeface="Calibri"/>
-              </a:rPr>
-              <a:t>· Cloud Run</a:t>
-            </a:r>
-          </a:p>
-          <a:p>
-            <a:pPr>
-              <a:spcAft>
-                <a:spcPts val="225"/>
-              </a:spcAft>
-            </a:pPr>
-            <a:r>
-              <a:rPr sz="825">
-                <a:solidFill>
-                  <a:srgbClr val="4A5A5D"/>
-                </a:solidFill>
-                <a:latin typeface="Calibri"/>
-              </a:rPr>
-              <a:t>anchor_cascade (GQL) · supply_cascade · business_profile · tract_profile · loan_history</a:t>
-            </a:r>
-          </a:p>
-        </p:txBody>
-      </p:sp>
-      <p:sp>
-        <p:nvSpPr>
-          <p:cNvPr id="38" name="Python tools"/>
-          <p:cNvSpPr/>
-          <p:nvPr/>
-        </p:nvSpPr>
-        <p:spPr>
-          <a:xfrm>
-            <a:off x="5795010" y="3326130"/>
-            <a:ext cx="2866643" cy="720090"/>
-          </a:xfrm>
-          <a:prstGeom prst="roundRect">
-            <a:avLst>
-              <a:gd name="adj" fmla="val 11428"/>
-            </a:avLst>
-          </a:prstGeom>
-          <a:solidFill>
-            <a:srgbClr val="FFFFFF"/>
-          </a:solidFill>
-          <a:ln w="19050">
-            <a:solidFill>
-              <a:srgbClr val="C27C00"/>
-            </a:solidFill>
-          </a:ln>
-          <a:effectLst/>
-        </p:spPr>
-        <p:style>
-          <a:lnRef idx="1">
-            <a:schemeClr val="accent1"/>
-          </a:lnRef>
-          <a:fillRef idx="3">
-            <a:schemeClr val="accent1"/>
-          </a:fillRef>
-          <a:effectRef idx="2">
-            <a:schemeClr val="accent1"/>
-          </a:effectRef>
-          <a:fontRef idx="minor">
-            <a:schemeClr val="lt1"/>
-          </a:fontRef>
-        </p:style>
-        <p:txBody>
-          <a:bodyPr rtlCol="0" anchor="ctr"/>
-          <a:lstStyle/>
-          <a:p>
-            <a:pPr algn="ctr"/>
-            <a:endParaRPr sz="1050"/>
-          </a:p>
-        </p:txBody>
-      </p:sp>
-      <p:sp>
-        <p:nvSpPr>
-          <p:cNvPr id="39" name="TextBox 38"/>
-          <p:cNvSpPr txBox="1"/>
-          <p:nvPr/>
-        </p:nvSpPr>
-        <p:spPr>
-          <a:xfrm>
-            <a:off x="5918453" y="3394710"/>
-            <a:ext cx="2619756" cy="429605"/>
-          </a:xfrm>
-          <a:prstGeom prst="rect">
-            <a:avLst/>
-          </a:prstGeom>
-          <a:noFill/>
-        </p:spPr>
-        <p:txBody>
-          <a:bodyPr wrap="square" lIns="0" tIns="0" rIns="0" bIns="0" anchor="t">
-            <a:spAutoFit/>
-          </a:bodyPr>
-          <a:lstStyle/>
-          <a:p>
-            <a:pPr>
-              <a:spcAft>
-                <a:spcPts val="225"/>
-              </a:spcAft>
-            </a:pPr>
-            <a:r>
-              <a:rPr sz="975" b="1">
-                <a:solidFill>
-                  <a:srgbClr val="12343B"/>
-                </a:solidFill>
-                <a:latin typeface="Calibri"/>
-              </a:rPr>
-              <a:t>Custom Python tools </a:t>
-            </a:r>
-            <a:r>
-              <a:rPr sz="825">
-                <a:solidFill>
-                  <a:srgbClr val="C27C00"/>
-                </a:solidFill>
-                <a:latin typeface="Calibri"/>
-              </a:rPr>
-              <a:t>· ADK FunctionTool</a:t>
-            </a:r>
-          </a:p>
-          <a:p>
-            <a:pPr>
-              <a:spcAft>
-                <a:spcPts val="225"/>
-              </a:spcAft>
-            </a:pPr>
-            <a:r>
-              <a:rPr sz="825">
-                <a:solidFill>
-                  <a:srgbClr val="4A5A5D"/>
-                </a:solidFill>
-                <a:latin typeface="Calibri"/>
-              </a:rPr>
-              <a:t>score_exposure · fragility · allocate_budget · sensitivity · equity_audit · build_memo</a:t>
-            </a:r>
-          </a:p>
-        </p:txBody>
-      </p:sp>
-      <p:cxnSp>
-        <p:nvCxnSpPr>
-          <p:cNvPr id="40" name="Connector 39"/>
-          <p:cNvCxnSpPr/>
-          <p:nvPr/>
-        </p:nvCxnSpPr>
-        <p:spPr>
-          <a:xfrm>
-            <a:off x="3370707" y="3051810"/>
-            <a:ext cx="0" cy="274320"/>
-          </a:xfrm>
-          <a:prstGeom prst="line">
-            <a:avLst/>
-          </a:prstGeom>
-          <a:ln w="22225">
-            <a:solidFill>
-              <a:srgbClr val="1F6F6B"/>
-            </a:solidFill>
-            <a:prstDash val="dash"/>
-            <a:tailEnd type="triangle" w="med" len="med"/>
-          </a:ln>
-        </p:spPr>
-        <p:style>
-          <a:lnRef idx="2">
-            <a:schemeClr val="accent1"/>
-          </a:lnRef>
-          <a:fillRef idx="0">
-            <a:schemeClr val="accent1"/>
-          </a:fillRef>
-          <a:effectRef idx="1">
-            <a:schemeClr val="accent1"/>
-          </a:effectRef>
-          <a:fontRef idx="minor">
-            <a:schemeClr val="tx1"/>
-          </a:fontRef>
-        </p:style>
-      </p:cxnSp>
-      <p:cxnSp>
-        <p:nvCxnSpPr>
-          <p:cNvPr id="41" name="Connector 40"/>
-          <p:cNvCxnSpPr/>
-          <p:nvPr/>
-        </p:nvCxnSpPr>
-        <p:spPr>
-          <a:xfrm>
-            <a:off x="4913757" y="3051810"/>
-            <a:ext cx="0" cy="274320"/>
-          </a:xfrm>
-          <a:prstGeom prst="line">
-            <a:avLst/>
-          </a:prstGeom>
-          <a:ln w="22225">
-            <a:solidFill>
-              <a:srgbClr val="1F6F6B"/>
-            </a:solidFill>
-            <a:prstDash val="dash"/>
-            <a:tailEnd type="triangle" w="med" len="med"/>
-          </a:ln>
-        </p:spPr>
-        <p:style>
-          <a:lnRef idx="2">
-            <a:schemeClr val="accent1"/>
-          </a:lnRef>
-          <a:fillRef idx="0">
-            <a:schemeClr val="accent1"/>
-          </a:fillRef>
-          <a:effectRef idx="1">
-            <a:schemeClr val="accent1"/>
-          </a:effectRef>
-          <a:fontRef idx="minor">
-            <a:schemeClr val="tx1"/>
-          </a:fontRef>
-        </p:style>
-      </p:cxnSp>
-      <p:cxnSp>
-        <p:nvCxnSpPr>
-          <p:cNvPr id="42" name="Connector 41"/>
-          <p:cNvCxnSpPr/>
-          <p:nvPr/>
-        </p:nvCxnSpPr>
-        <p:spPr>
-          <a:xfrm>
-            <a:off x="6456807" y="3051810"/>
-            <a:ext cx="0" cy="274320"/>
-          </a:xfrm>
-          <a:prstGeom prst="line">
-            <a:avLst/>
-          </a:prstGeom>
-          <a:ln w="22225">
-            <a:solidFill>
-              <a:srgbClr val="C27C00"/>
-            </a:solidFill>
-            <a:prstDash val="sysDot"/>
-            <a:tailEnd type="triangle" w="med" len="med"/>
-          </a:ln>
-        </p:spPr>
-        <p:style>
-          <a:lnRef idx="2">
-            <a:schemeClr val="accent1"/>
-          </a:lnRef>
-          <a:fillRef idx="0">
-            <a:schemeClr val="accent1"/>
-          </a:fillRef>
-          <a:effectRef idx="1">
-            <a:schemeClr val="accent1"/>
-          </a:effectRef>
-          <a:fontRef idx="minor">
-            <a:schemeClr val="tx1"/>
-          </a:fontRef>
-        </p:style>
-      </p:cxnSp>
-      <p:cxnSp>
-        <p:nvCxnSpPr>
-          <p:cNvPr id="43" name="Connector 42"/>
-          <p:cNvCxnSpPr/>
-          <p:nvPr/>
-        </p:nvCxnSpPr>
-        <p:spPr>
-          <a:xfrm>
-            <a:off x="7999857" y="3051810"/>
-            <a:ext cx="0" cy="274320"/>
-          </a:xfrm>
-          <a:prstGeom prst="line">
-            <a:avLst/>
-          </a:prstGeom>
-          <a:ln w="22225">
-            <a:solidFill>
-              <a:srgbClr val="C27C00"/>
-            </a:solidFill>
-            <a:prstDash val="sysDot"/>
-            <a:tailEnd type="triangle" w="med" len="med"/>
-          </a:ln>
-        </p:spPr>
-        <p:style>
-          <a:lnRef idx="2">
-            <a:schemeClr val="accent1"/>
-          </a:lnRef>
-          <a:fillRef idx="0">
-            <a:schemeClr val="accent1"/>
-          </a:fillRef>
-          <a:effectRef idx="1">
-            <a:schemeClr val="accent1"/>
-          </a:effectRef>
-          <a:fontRef idx="minor">
-            <a:schemeClr val="tx1"/>
-          </a:fontRef>
-        </p:style>
-      </p:cxnSp>
-      <p:sp>
-        <p:nvSpPr>
-          <p:cNvPr id="44" name="BigQuery"/>
-          <p:cNvSpPr/>
-          <p:nvPr/>
-        </p:nvSpPr>
-        <p:spPr>
-          <a:xfrm>
-            <a:off x="2708910" y="4286250"/>
-            <a:ext cx="5952744" cy="534924"/>
-          </a:xfrm>
-          <a:prstGeom prst="roundRect">
-            <a:avLst>
-              <a:gd name="adj" fmla="val 12000"/>
-            </a:avLst>
-          </a:prstGeom>
-          <a:solidFill>
-            <a:srgbClr val="12343B"/>
-          </a:solidFill>
-          <a:ln>
-            <a:noFill/>
-          </a:ln>
-          <a:effectLst/>
-        </p:spPr>
-        <p:style>
-          <a:lnRef idx="1">
-            <a:schemeClr val="accent1"/>
-          </a:lnRef>
-          <a:fillRef idx="3">
-            <a:schemeClr val="accent1"/>
-          </a:fillRef>
-          <a:effectRef idx="2">
-            <a:schemeClr val="accent1"/>
-          </a:effectRef>
-          <a:fontRef idx="minor">
-            <a:schemeClr val="lt1"/>
-          </a:fontRef>
-        </p:style>
-        <p:txBody>
-          <a:bodyPr rtlCol="0" anchor="ctr"/>
-          <a:lstStyle/>
-          <a:p>
-            <a:pPr algn="ctr"/>
-            <a:endParaRPr sz="1050"/>
-          </a:p>
-        </p:txBody>
-      </p:sp>
-      <p:sp>
-        <p:nvSpPr>
-          <p:cNvPr id="45" name="TextBox 44"/>
-          <p:cNvSpPr txBox="1"/>
-          <p:nvPr/>
-        </p:nvSpPr>
-        <p:spPr>
-          <a:xfrm>
-            <a:off x="2846071" y="4416105"/>
-            <a:ext cx="5678423" cy="302647"/>
-          </a:xfrm>
-          <a:prstGeom prst="rect">
-            <a:avLst/>
-          </a:prstGeom>
-          <a:noFill/>
-        </p:spPr>
-        <p:txBody>
-          <a:bodyPr wrap="square" lIns="0" tIns="0" rIns="0" bIns="0" anchor="ctr">
-            <a:spAutoFit/>
-          </a:bodyPr>
-          <a:lstStyle/>
-          <a:p>
-            <a:pPr>
-              <a:spcAft>
-                <a:spcPts val="225"/>
-              </a:spcAft>
-            </a:pPr>
-            <a:r>
-              <a:rPr sz="975" b="1">
-                <a:solidFill>
-                  <a:srgbClr val="FFFFFF"/>
-                </a:solidFill>
-                <a:latin typeface="Calibri"/>
-              </a:rPr>
-              <a:t>BigQuery </a:t>
-            </a:r>
-            <a:r>
-              <a:rPr sz="825">
-                <a:solidFill>
-                  <a:srgbClr val="B8D4D0"/>
-                </a:solidFill>
-                <a:latin typeface="Calibri"/>
-              </a:rPr>
-              <a:t>· a4i_econ · property graph LocalEconomy, queried with GQL · Enterprise reservation</a:t>
-            </a:r>
-          </a:p>
-          <a:p>
-            <a:pPr>
-              <a:spcAft>
-                <a:spcPts val="225"/>
-              </a:spcAft>
-            </a:pPr>
-            <a:r>
-              <a:rPr sz="825">
-                <a:solidFill>
-                  <a:srgbClr val="FFFFFF"/>
-                </a:solidFill>
-                <a:latin typeface="Calibri"/>
-              </a:rPr>
-              <a:t>businesses · employer_blocks · supplies · draws_footfall_from · borrowed_from · tract_demographics</a:t>
-            </a:r>
-          </a:p>
-        </p:txBody>
-      </p:sp>
-      <p:cxnSp>
-        <p:nvCxnSpPr>
-          <p:cNvPr id="46" name="Connector 45"/>
-          <p:cNvCxnSpPr/>
-          <p:nvPr/>
-        </p:nvCxnSpPr>
-        <p:spPr>
-          <a:xfrm>
-            <a:off x="4142232" y="4046220"/>
-            <a:ext cx="0" cy="240031"/>
-          </a:xfrm>
-          <a:prstGeom prst="line">
-            <a:avLst/>
-          </a:prstGeom>
-          <a:ln w="22225">
-            <a:solidFill>
-              <a:srgbClr val="1F6F6B"/>
-            </a:solidFill>
-            <a:prstDash val="dash"/>
-            <a:tailEnd type="triangle" w="med" len="med"/>
-          </a:ln>
-        </p:spPr>
-        <p:style>
-          <a:lnRef idx="2">
-            <a:schemeClr val="accent1"/>
-          </a:lnRef>
-          <a:fillRef idx="0">
-            <a:schemeClr val="accent1"/>
-          </a:fillRef>
-          <a:effectRef idx="1">
-            <a:schemeClr val="accent1"/>
-          </a:effectRef>
-          <a:fontRef idx="minor">
-            <a:schemeClr val="tx1"/>
-          </a:fontRef>
-        </p:style>
-      </p:cxnSp>
-      <p:sp>
-        <p:nvSpPr>
-          <p:cNvPr id="47" name="Legend"/>
-          <p:cNvSpPr/>
-          <p:nvPr/>
-        </p:nvSpPr>
-        <p:spPr>
-          <a:xfrm>
-            <a:off x="342900" y="3566160"/>
-            <a:ext cx="1577340" cy="1255014"/>
-          </a:xfrm>
-          <a:prstGeom prst="roundRect">
-            <a:avLst>
-              <a:gd name="adj" fmla="val 6557"/>
-            </a:avLst>
-          </a:prstGeom>
-          <a:solidFill>
-            <a:srgbClr val="FFFFFF"/>
-          </a:solidFill>
-          <a:ln w="12700">
-            <a:solidFill>
-              <a:srgbClr val="B8D4D0"/>
-            </a:solidFill>
-          </a:ln>
-          <a:effectLst/>
-        </p:spPr>
-        <p:style>
-          <a:lnRef idx="1">
-            <a:schemeClr val="accent1"/>
-          </a:lnRef>
-          <a:fillRef idx="3">
-            <a:schemeClr val="accent1"/>
-          </a:fillRef>
-          <a:effectRef idx="2">
-            <a:schemeClr val="accent1"/>
-          </a:effectRef>
-          <a:fontRef idx="minor">
-            <a:schemeClr val="lt1"/>
-          </a:fontRef>
-        </p:style>
-        <p:txBody>
-          <a:bodyPr rtlCol="0" anchor="ctr"/>
-          <a:lstStyle/>
-          <a:p>
-            <a:pPr algn="ctr"/>
-            <a:endParaRPr sz="1050"/>
-          </a:p>
-        </p:txBody>
-      </p:sp>
-      <p:sp>
-        <p:nvSpPr>
-          <p:cNvPr id="48" name="TextBox 47"/>
-          <p:cNvSpPr txBox="1"/>
-          <p:nvPr/>
-        </p:nvSpPr>
-        <p:spPr>
-          <a:xfrm>
-            <a:off x="466344" y="3634740"/>
-            <a:ext cx="1330452" cy="150041"/>
-          </a:xfrm>
-          <a:prstGeom prst="rect">
-            <a:avLst/>
-          </a:prstGeom>
-          <a:noFill/>
-        </p:spPr>
-        <p:txBody>
-          <a:bodyPr wrap="square" lIns="0" tIns="0" rIns="0" bIns="0" anchor="t">
-            <a:spAutoFit/>
-          </a:bodyPr>
-          <a:lstStyle/>
-          <a:p>
-            <a:pPr>
-              <a:spcAft>
-                <a:spcPts val="225"/>
-              </a:spcAft>
-            </a:pPr>
-            <a:r>
-              <a:rPr sz="975" b="1">
-                <a:solidFill>
-                  <a:srgbClr val="12343B"/>
-                </a:solidFill>
-                <a:latin typeface="Calibri"/>
-              </a:rPr>
-              <a:t>How they talk</a:t>
-            </a:r>
-          </a:p>
-        </p:txBody>
-      </p:sp>
-      <p:cxnSp>
-        <p:nvCxnSpPr>
-          <p:cNvPr id="49" name="Connector 48"/>
-          <p:cNvCxnSpPr/>
-          <p:nvPr/>
-        </p:nvCxnSpPr>
-        <p:spPr>
-          <a:xfrm>
-            <a:off x="466344" y="3963924"/>
-            <a:ext cx="342900" cy="0"/>
-          </a:xfrm>
-          <a:prstGeom prst="line">
-            <a:avLst/>
-          </a:prstGeom>
-          <a:ln w="22225">
-            <a:solidFill>
-              <a:srgbClr val="C27C00"/>
-            </a:solidFill>
-            <a:tailEnd type="triangle" w="med" len="med"/>
-          </a:ln>
-        </p:spPr>
-        <p:style>
-          <a:lnRef idx="2">
-            <a:schemeClr val="accent1"/>
-          </a:lnRef>
-          <a:fillRef idx="0">
-            <a:schemeClr val="accent1"/>
-          </a:fillRef>
-          <a:effectRef idx="1">
-            <a:schemeClr val="accent1"/>
-          </a:effectRef>
-          <a:fontRef idx="minor">
-            <a:schemeClr val="tx1"/>
-          </a:fontRef>
-        </p:style>
-      </p:cxnSp>
-      <p:sp>
-        <p:nvSpPr>
-          <p:cNvPr id="50" name="TextBox 49"/>
-          <p:cNvSpPr txBox="1"/>
-          <p:nvPr/>
-        </p:nvSpPr>
-        <p:spPr>
-          <a:xfrm>
-            <a:off x="891541" y="3907304"/>
-            <a:ext cx="925829" cy="126958"/>
-          </a:xfrm>
-          <a:prstGeom prst="rect">
-            <a:avLst/>
-          </a:prstGeom>
-          <a:noFill/>
-        </p:spPr>
-        <p:txBody>
-          <a:bodyPr wrap="square" lIns="0" tIns="0" rIns="0" bIns="0" anchor="ctr">
-            <a:spAutoFit/>
-          </a:bodyPr>
-          <a:lstStyle/>
-          <a:p>
-            <a:pPr>
-              <a:spcAft>
-                <a:spcPts val="225"/>
-              </a:spcAft>
-            </a:pPr>
-            <a:r>
-              <a:rPr sz="825">
-                <a:solidFill>
-                  <a:srgbClr val="4A5A5D"/>
-                </a:solidFill>
-                <a:latin typeface="Calibri"/>
-              </a:rPr>
-              <a:t>HTTPS request</a:t>
-            </a:r>
-          </a:p>
-        </p:txBody>
-      </p:sp>
-      <p:cxnSp>
-        <p:nvCxnSpPr>
-          <p:cNvPr id="51" name="Connector 50"/>
-          <p:cNvCxnSpPr/>
-          <p:nvPr/>
-        </p:nvCxnSpPr>
-        <p:spPr>
-          <a:xfrm>
-            <a:off x="466344" y="4169664"/>
-            <a:ext cx="342900" cy="0"/>
-          </a:xfrm>
-          <a:prstGeom prst="line">
-            <a:avLst/>
-          </a:prstGeom>
-          <a:ln w="22225">
-            <a:solidFill>
-              <a:srgbClr val="1F6F6B"/>
-            </a:solidFill>
-            <a:tailEnd type="triangle" w="med" len="med"/>
-          </a:ln>
-        </p:spPr>
-        <p:style>
-          <a:lnRef idx="2">
-            <a:schemeClr val="accent1"/>
-          </a:lnRef>
-          <a:fillRef idx="0">
-            <a:schemeClr val="accent1"/>
-          </a:fillRef>
-          <a:effectRef idx="1">
-            <a:schemeClr val="accent1"/>
-          </a:effectRef>
-          <a:fontRef idx="minor">
-            <a:schemeClr val="tx1"/>
-          </a:fontRef>
-        </p:style>
-      </p:cxnSp>
-      <p:sp>
-        <p:nvSpPr>
-          <p:cNvPr id="52" name="TextBox 51"/>
-          <p:cNvSpPr txBox="1"/>
-          <p:nvPr/>
-        </p:nvSpPr>
-        <p:spPr>
-          <a:xfrm>
-            <a:off x="891541" y="4113044"/>
-            <a:ext cx="925829" cy="126958"/>
-          </a:xfrm>
-          <a:prstGeom prst="rect">
-            <a:avLst/>
-          </a:prstGeom>
-          <a:noFill/>
-        </p:spPr>
-        <p:txBody>
-          <a:bodyPr wrap="square" lIns="0" tIns="0" rIns="0" bIns="0" anchor="ctr">
-            <a:spAutoFit/>
-          </a:bodyPr>
-          <a:lstStyle/>
-          <a:p>
-            <a:pPr>
-              <a:spcAft>
-                <a:spcPts val="225"/>
-              </a:spcAft>
-            </a:pPr>
-            <a:r>
-              <a:rPr sz="825">
-                <a:solidFill>
-                  <a:srgbClr val="4A5A5D"/>
-                </a:solidFill>
-                <a:latin typeface="Calibri"/>
-              </a:rPr>
-              <a:t>ADK state handoff</a:t>
-            </a:r>
-          </a:p>
-        </p:txBody>
-      </p:sp>
-      <p:cxnSp>
-        <p:nvCxnSpPr>
-          <p:cNvPr id="53" name="Connector 52"/>
-          <p:cNvCxnSpPr/>
-          <p:nvPr/>
-        </p:nvCxnSpPr>
-        <p:spPr>
-          <a:xfrm>
-            <a:off x="466344" y="4375404"/>
-            <a:ext cx="342900" cy="0"/>
-          </a:xfrm>
-          <a:prstGeom prst="line">
-            <a:avLst/>
-          </a:prstGeom>
-          <a:ln w="22225">
-            <a:solidFill>
-              <a:srgbClr val="1F6F6B"/>
-            </a:solidFill>
-            <a:prstDash val="dash"/>
-            <a:tailEnd type="triangle" w="med" len="med"/>
-          </a:ln>
-        </p:spPr>
-        <p:style>
-          <a:lnRef idx="2">
-            <a:schemeClr val="accent1"/>
-          </a:lnRef>
-          <a:fillRef idx="0">
-            <a:schemeClr val="accent1"/>
-          </a:fillRef>
-          <a:effectRef idx="1">
-            <a:schemeClr val="accent1"/>
-          </a:effectRef>
-          <a:fontRef idx="minor">
-            <a:schemeClr val="tx1"/>
-          </a:fontRef>
-        </p:style>
-      </p:cxnSp>
-      <p:sp>
-        <p:nvSpPr>
-          <p:cNvPr id="54" name="TextBox 53"/>
-          <p:cNvSpPr txBox="1"/>
-          <p:nvPr/>
-        </p:nvSpPr>
-        <p:spPr>
-          <a:xfrm>
-            <a:off x="891541" y="4318784"/>
-            <a:ext cx="925829" cy="126958"/>
-          </a:xfrm>
-          <a:prstGeom prst="rect">
-            <a:avLst/>
-          </a:prstGeom>
-          <a:noFill/>
-        </p:spPr>
-        <p:txBody>
-          <a:bodyPr wrap="square" lIns="0" tIns="0" rIns="0" bIns="0" anchor="ctr">
-            <a:spAutoFit/>
-          </a:bodyPr>
-          <a:lstStyle/>
-          <a:p>
-            <a:pPr>
-              <a:spcAft>
-                <a:spcPts val="225"/>
-              </a:spcAft>
-            </a:pPr>
-            <a:r>
-              <a:rPr sz="825">
-                <a:solidFill>
-                  <a:srgbClr val="4A5A5D"/>
-                </a:solidFill>
-                <a:latin typeface="Calibri"/>
-              </a:rPr>
-              <a:t>MCP tool call</a:t>
-            </a:r>
-          </a:p>
-        </p:txBody>
-      </p:sp>
-      <p:cxnSp>
-        <p:nvCxnSpPr>
-          <p:cNvPr id="55" name="Connector 54"/>
-          <p:cNvCxnSpPr/>
-          <p:nvPr/>
-        </p:nvCxnSpPr>
-        <p:spPr>
-          <a:xfrm>
-            <a:off x="466344" y="4581144"/>
-            <a:ext cx="342900" cy="0"/>
-          </a:xfrm>
-          <a:prstGeom prst="line">
-            <a:avLst/>
-          </a:prstGeom>
-          <a:ln w="22225">
-            <a:solidFill>
-              <a:srgbClr val="C27C00"/>
-            </a:solidFill>
-            <a:prstDash val="sysDot"/>
-            <a:tailEnd type="triangle" w="med" len="med"/>
-          </a:ln>
-        </p:spPr>
-        <p:style>
-          <a:lnRef idx="2">
-            <a:schemeClr val="accent1"/>
-          </a:lnRef>
-          <a:fillRef idx="0">
-            <a:schemeClr val="accent1"/>
-          </a:fillRef>
-          <a:effectRef idx="1">
-            <a:schemeClr val="accent1"/>
-          </a:effectRef>
-          <a:fontRef idx="minor">
-            <a:schemeClr val="tx1"/>
-          </a:fontRef>
-        </p:style>
-      </p:cxnSp>
-      <p:sp>
-        <p:nvSpPr>
-          <p:cNvPr id="56" name="TextBox 55"/>
-          <p:cNvSpPr txBox="1"/>
-          <p:nvPr/>
-        </p:nvSpPr>
-        <p:spPr>
-          <a:xfrm>
-            <a:off x="891541" y="4524524"/>
-            <a:ext cx="925829" cy="126958"/>
-          </a:xfrm>
-          <a:prstGeom prst="rect">
-            <a:avLst/>
-          </a:prstGeom>
-          <a:noFill/>
-        </p:spPr>
-        <p:txBody>
-          <a:bodyPr wrap="square" lIns="0" tIns="0" rIns="0" bIns="0" anchor="ctr">
-            <a:spAutoFit/>
-          </a:bodyPr>
-          <a:lstStyle/>
-          <a:p>
-            <a:pPr>
-              <a:spcAft>
-                <a:spcPts val="225"/>
-              </a:spcAft>
-            </a:pPr>
-            <a:r>
-              <a:rPr sz="825">
-                <a:solidFill>
-                  <a:srgbClr val="4A5A5D"/>
-                </a:solidFill>
-                <a:latin typeface="Calibri"/>
-              </a:rPr>
-              <a:t>Python function call</a:t>
-            </a:r>
-          </a:p>
-        </p:txBody>
-      </p:sp>
-    </p:spTree>
-  </p:cSld>
-  <p:clrMapOvr>
-    <a:masterClrMapping/>
-  </p:clrMapOvr>
-</p:sld>
-</file>
-
 <file path=ppt/slides/slide2.xml><?xml version="1.0" encoding="utf-8"?>
 <p:sld xmlns:a="http://schemas.openxmlformats.org/drawingml/2006/main" xmlns:r="http://schemas.openxmlformats.org/officeDocument/2006/relationships" xmlns:p="http://schemas.openxmlformats.org/presentationml/2006/main">
   <p:cSld>
@@ -14269,7 +11388,7 @@
         </p:nvSpPr>
         <p:spPr>
           <a:xfrm>
-            <a:off x="5790775" y="2586700"/>
+            <a:off x="5774733" y="2523032"/>
             <a:ext cx="3080700" cy="613800"/>
           </a:xfrm>
           <a:prstGeom prst="rect">
@@ -14299,7 +11418,7 @@
               <a:buNone/>
             </a:pPr>
             <a:r>
-              <a:rPr lang="en" sz="2400">
+              <a:rPr lang="en" sz="2400" dirty="0">
                 <a:solidFill>
                   <a:schemeClr val="lt1"/>
                 </a:solidFill>
@@ -14308,9 +11427,9 @@
                 <a:cs typeface="Google Sans Flex Medium"/>
                 <a:sym typeface="Google Sans Flex Medium"/>
               </a:rPr>
-              <a:t>Team name here</a:t>
+              <a:t>ATL-13 Pro Max </a:t>
             </a:r>
-            <a:endParaRPr sz="2400">
+            <a:endParaRPr sz="2400" dirty="0">
               <a:solidFill>
                 <a:schemeClr val="lt1"/>
               </a:solidFill>
@@ -14386,11 +11505,17 @@
         <p:nvGraphicFramePr>
           <p:cNvPr id="125" name="Google Shape;125;p29"/>
           <p:cNvGraphicFramePr/>
-          <p:nvPr/>
+          <p:nvPr>
+            <p:extLst>
+              <p:ext uri="{D42A27DB-BD31-4B8C-83A1-F6EECF244321}">
+                <p14:modId xmlns:p14="http://schemas.microsoft.com/office/powerpoint/2010/main" val="2489115301"/>
+              </p:ext>
+            </p:extLst>
+          </p:nvPr>
         </p:nvGraphicFramePr>
         <p:xfrm>
           <a:off x="577750" y="1357275"/>
-          <a:ext cx="8117675" cy="3569355"/>
+          <a:ext cx="8117675" cy="3691275"/>
         </p:xfrm>
         <a:graphic>
           <a:graphicData uri="http://schemas.openxmlformats.org/drawingml/2006/table">
@@ -14992,14 +12117,14 @@
                         <a:buNone/>
                       </a:pPr>
                       <a:r>
-                        <a:rPr lang="en">
+                        <a:rPr lang="en" sz="800" dirty="0">
                           <a:solidFill>
                             <a:schemeClr val="lt1"/>
                           </a:solidFill>
                         </a:rPr>
                         <a:t>Amogh U</a:t>
                       </a:r>
-                      <a:endParaRPr>
+                      <a:endParaRPr sz="800" dirty="0">
                         <a:solidFill>
                           <a:schemeClr val="lt1"/>
                         </a:solidFill>
@@ -15059,7 +12184,19 @@
                         </a:spcAft>
                         <a:buNone/>
                       </a:pPr>
-                      <a:endParaRPr/>
+                      <a:r>
+                        <a:rPr lang="en-US" sz="800" dirty="0" err="1">
+                          <a:solidFill>
+                            <a:schemeClr val="bg1"/>
+                          </a:solidFill>
+                        </a:rPr>
+                        <a:t>Amogh.Upadhyay@cox.com</a:t>
+                      </a:r>
+                      <a:endParaRPr sz="800" dirty="0">
+                        <a:solidFill>
+                          <a:schemeClr val="bg1"/>
+                        </a:solidFill>
+                      </a:endParaRPr>
                     </a:p>
                   </a:txBody>
                   <a:tcPr marL="91425" marR="91425" marT="91425" marB="91425">
@@ -15115,7 +12252,19 @@
                         </a:spcAft>
                         <a:buNone/>
                       </a:pPr>
-                      <a:endParaRPr/>
+                      <a:r>
+                        <a:rPr lang="en-US" sz="800" dirty="0">
+                          <a:solidFill>
+                            <a:schemeClr val="bg1"/>
+                          </a:solidFill>
+                        </a:rPr>
+                        <a:t>678-644-2677</a:t>
+                      </a:r>
+                      <a:endParaRPr sz="800" dirty="0">
+                        <a:solidFill>
+                          <a:schemeClr val="bg1"/>
+                        </a:solidFill>
+                      </a:endParaRPr>
                     </a:p>
                   </a:txBody>
                   <a:tcPr marL="91425" marR="91425" marT="91425" marB="91425">
@@ -15171,9 +12320,17 @@
                         </a:spcAft>
                         <a:buNone/>
                       </a:pPr>
-                      <a:endParaRPr>
+                      <a:r>
+                        <a:rPr lang="en-US" sz="800" dirty="0">
+                          <a:solidFill>
+                            <a:schemeClr val="bg1"/>
+                          </a:solidFill>
+                        </a:rPr>
+                        <a:t>yes</a:t>
+                      </a:r>
+                      <a:endParaRPr sz="800" dirty="0">
                         <a:solidFill>
-                          <a:schemeClr val="lt1"/>
+                          <a:schemeClr val="bg1"/>
                         </a:solidFill>
                       </a:endParaRPr>
                     </a:p>
@@ -15231,9 +12388,17 @@
                         </a:spcAft>
                         <a:buNone/>
                       </a:pPr>
-                      <a:endParaRPr i="1">
+                      <a:r>
+                        <a:rPr lang="en-US" sz="800" i="1" dirty="0">
+                          <a:solidFill>
+                            <a:schemeClr val="bg1"/>
+                          </a:solidFill>
+                        </a:rPr>
+                        <a:t>Yes</a:t>
+                      </a:r>
+                      <a:endParaRPr sz="800" i="1" dirty="0">
                         <a:solidFill>
-                          <a:schemeClr val="lt1"/>
+                          <a:schemeClr val="bg1"/>
                         </a:solidFill>
                       </a:endParaRPr>
                     </a:p>
@@ -15291,7 +12456,19 @@
                         </a:spcAft>
                         <a:buNone/>
                       </a:pPr>
-                      <a:endParaRPr/>
+                      <a:r>
+                        <a:rPr lang="en-US" sz="800" dirty="0" err="1">
+                          <a:solidFill>
+                            <a:schemeClr val="bg1"/>
+                          </a:solidFill>
+                        </a:rPr>
+                        <a:t>murali@pisharat@cox.com</a:t>
+                      </a:r>
+                      <a:endParaRPr sz="800" dirty="0">
+                        <a:solidFill>
+                          <a:schemeClr val="bg1"/>
+                        </a:solidFill>
+                      </a:endParaRPr>
                     </a:p>
                   </a:txBody>
                   <a:tcPr marL="91425" marR="91425" marT="91425" marB="91425">
@@ -15355,14 +12532,14 @@
                         <a:buNone/>
                       </a:pPr>
                       <a:r>
-                        <a:rPr lang="en">
+                        <a:rPr lang="en" sz="800" dirty="0">
                           <a:solidFill>
                             <a:schemeClr val="lt1"/>
                           </a:solidFill>
                         </a:rPr>
                         <a:t>Nabil B</a:t>
                       </a:r>
-                      <a:endParaRPr>
+                      <a:endParaRPr sz="800" dirty="0">
                         <a:solidFill>
                           <a:schemeClr val="lt1"/>
                         </a:solidFill>
@@ -15422,7 +12599,19 @@
                         </a:spcAft>
                         <a:buNone/>
                       </a:pPr>
-                      <a:endParaRPr/>
+                      <a:r>
+                        <a:rPr lang="en-US" sz="800" dirty="0" err="1">
+                          <a:solidFill>
+                            <a:schemeClr val="bg1"/>
+                          </a:solidFill>
+                        </a:rPr>
+                        <a:t>Nabil.bendannoun@randstadusa.com</a:t>
+                      </a:r>
+                      <a:endParaRPr sz="800" dirty="0">
+                        <a:solidFill>
+                          <a:schemeClr val="bg1"/>
+                        </a:solidFill>
+                      </a:endParaRPr>
                     </a:p>
                   </a:txBody>
                   <a:tcPr marL="91425" marR="91425" marT="91425" marB="91425">
@@ -15478,7 +12667,19 @@
                         </a:spcAft>
                         <a:buNone/>
                       </a:pPr>
-                      <a:endParaRPr/>
+                      <a:r>
+                        <a:rPr lang="en-US" sz="800" dirty="0">
+                          <a:solidFill>
+                            <a:schemeClr val="bg1"/>
+                          </a:solidFill>
+                        </a:rPr>
+                        <a:t>678-696-9940</a:t>
+                      </a:r>
+                      <a:endParaRPr sz="800" dirty="0">
+                        <a:solidFill>
+                          <a:schemeClr val="bg1"/>
+                        </a:solidFill>
+                      </a:endParaRPr>
                     </a:p>
                   </a:txBody>
                   <a:tcPr marL="91425" marR="91425" marT="91425" marB="91425">
@@ -15534,9 +12735,17 @@
                         </a:spcAft>
                         <a:buNone/>
                       </a:pPr>
-                      <a:endParaRPr>
+                      <a:r>
+                        <a:rPr lang="en-US" sz="800" dirty="0">
+                          <a:solidFill>
+                            <a:schemeClr val="bg1"/>
+                          </a:solidFill>
+                        </a:rPr>
+                        <a:t>yes</a:t>
+                      </a:r>
+                      <a:endParaRPr sz="800" dirty="0">
                         <a:solidFill>
-                          <a:schemeClr val="lt1"/>
+                          <a:schemeClr val="bg1"/>
                         </a:solidFill>
                       </a:endParaRPr>
                     </a:p>
@@ -15594,9 +12803,9 @@
                         </a:spcAft>
                         <a:buNone/>
                       </a:pPr>
-                      <a:endParaRPr>
+                      <a:endParaRPr sz="800" dirty="0">
                         <a:solidFill>
-                          <a:schemeClr val="lt1"/>
+                          <a:schemeClr val="bg1"/>
                         </a:solidFill>
                       </a:endParaRPr>
                     </a:p>
@@ -15654,7 +12863,11 @@
                         </a:spcAft>
                         <a:buNone/>
                       </a:pPr>
-                      <a:endParaRPr/>
+                      <a:endParaRPr sz="800">
+                        <a:solidFill>
+                          <a:schemeClr val="bg1"/>
+                        </a:solidFill>
+                      </a:endParaRPr>
                     </a:p>
                   </a:txBody>
                   <a:tcPr marL="91425" marR="91425" marT="91425" marB="91425">
@@ -15718,14 +12931,14 @@
                         <a:buNone/>
                       </a:pPr>
                       <a:r>
-                        <a:rPr lang="en">
+                        <a:rPr lang="en" sz="800" dirty="0">
                           <a:solidFill>
                             <a:schemeClr val="lt1"/>
                           </a:solidFill>
                         </a:rPr>
-                        <a:t>Mastan </a:t>
+                        <a:t>Mastan  S</a:t>
                       </a:r>
-                      <a:endParaRPr>
+                      <a:endParaRPr sz="800" dirty="0">
                         <a:solidFill>
                           <a:schemeClr val="lt1"/>
                         </a:solidFill>
@@ -15785,7 +12998,19 @@
                         </a:spcAft>
                         <a:buNone/>
                       </a:pPr>
-                      <a:endParaRPr/>
+                      <a:r>
+                        <a:rPr lang="en-US" sz="800" dirty="0" err="1">
+                          <a:solidFill>
+                            <a:schemeClr val="bg1"/>
+                          </a:solidFill>
+                        </a:rPr>
+                        <a:t>Mastan_Sheik@homedepot.com</a:t>
+                      </a:r>
+                      <a:endParaRPr sz="800" dirty="0">
+                        <a:solidFill>
+                          <a:schemeClr val="bg1"/>
+                        </a:solidFill>
+                      </a:endParaRPr>
                     </a:p>
                   </a:txBody>
                   <a:tcPr marL="91425" marR="91425" marT="91425" marB="91425">
@@ -15841,7 +13066,19 @@
                         </a:spcAft>
                         <a:buNone/>
                       </a:pPr>
-                      <a:endParaRPr/>
+                      <a:r>
+                        <a:rPr lang="en-US" sz="800" dirty="0">
+                          <a:solidFill>
+                            <a:schemeClr val="bg1"/>
+                          </a:solidFill>
+                        </a:rPr>
+                        <a:t>404-820-5556</a:t>
+                      </a:r>
+                      <a:endParaRPr sz="800" dirty="0">
+                        <a:solidFill>
+                          <a:schemeClr val="bg1"/>
+                        </a:solidFill>
+                      </a:endParaRPr>
                     </a:p>
                   </a:txBody>
                   <a:tcPr marL="91425" marR="91425" marT="91425" marB="91425">
@@ -15897,9 +13134,9 @@
                         </a:spcAft>
                         <a:buNone/>
                       </a:pPr>
-                      <a:endParaRPr>
+                      <a:endParaRPr sz="800" dirty="0">
                         <a:solidFill>
-                          <a:schemeClr val="lt1"/>
+                          <a:schemeClr val="bg1"/>
                         </a:solidFill>
                       </a:endParaRPr>
                     </a:p>
@@ -15957,9 +13194,9 @@
                         </a:spcAft>
                         <a:buNone/>
                       </a:pPr>
-                      <a:endParaRPr>
+                      <a:endParaRPr sz="800">
                         <a:solidFill>
-                          <a:schemeClr val="lt1"/>
+                          <a:schemeClr val="bg1"/>
                         </a:solidFill>
                       </a:endParaRPr>
                     </a:p>
@@ -16017,7 +13254,11 @@
                         </a:spcAft>
                         <a:buNone/>
                       </a:pPr>
-                      <a:endParaRPr/>
+                      <a:endParaRPr sz="800">
+                        <a:solidFill>
+                          <a:schemeClr val="bg1"/>
+                        </a:solidFill>
+                      </a:endParaRPr>
                     </a:p>
                   </a:txBody>
                   <a:tcPr marL="91425" marR="91425" marT="91425" marB="91425">
@@ -16081,14 +13322,14 @@
                         <a:buNone/>
                       </a:pPr>
                       <a:r>
-                        <a:rPr lang="en">
+                        <a:rPr lang="en" sz="800">
                           <a:solidFill>
                             <a:schemeClr val="lt1"/>
                           </a:solidFill>
                         </a:rPr>
                         <a:t>Julio G</a:t>
                       </a:r>
-                      <a:endParaRPr>
+                      <a:endParaRPr sz="800">
                         <a:solidFill>
                           <a:schemeClr val="lt1"/>
                         </a:solidFill>
@@ -16148,7 +13389,19 @@
                         </a:spcAft>
                         <a:buNone/>
                       </a:pPr>
-                      <a:endParaRPr/>
+                      <a:r>
+                        <a:rPr lang="en-US" sz="800" dirty="0" err="1">
+                          <a:solidFill>
+                            <a:schemeClr val="bg1"/>
+                          </a:solidFill>
+                        </a:rPr>
+                        <a:t>Julio.Garciagil@Equifax.com</a:t>
+                      </a:r>
+                      <a:endParaRPr sz="800" dirty="0">
+                        <a:solidFill>
+                          <a:schemeClr val="bg1"/>
+                        </a:solidFill>
+                      </a:endParaRPr>
                     </a:p>
                   </a:txBody>
                   <a:tcPr marL="91425" marR="91425" marT="91425" marB="91425">
@@ -16204,7 +13457,19 @@
                         </a:spcAft>
                         <a:buNone/>
                       </a:pPr>
-                      <a:endParaRPr/>
+                      <a:r>
+                        <a:rPr lang="en-US" sz="800" dirty="0">
+                          <a:solidFill>
+                            <a:schemeClr val="bg1"/>
+                          </a:solidFill>
+                        </a:rPr>
+                        <a:t>786-447-0835</a:t>
+                      </a:r>
+                      <a:endParaRPr sz="800" dirty="0">
+                        <a:solidFill>
+                          <a:schemeClr val="bg1"/>
+                        </a:solidFill>
+                      </a:endParaRPr>
                     </a:p>
                   </a:txBody>
                   <a:tcPr marL="91425" marR="91425" marT="91425" marB="91425">
@@ -16260,9 +13525,17 @@
                         </a:spcAft>
                         <a:buNone/>
                       </a:pPr>
-                      <a:endParaRPr>
+                      <a:r>
+                        <a:rPr lang="en-US" sz="800" dirty="0">
+                          <a:solidFill>
+                            <a:schemeClr val="bg1"/>
+                          </a:solidFill>
+                        </a:rPr>
+                        <a:t>yes</a:t>
+                      </a:r>
+                      <a:endParaRPr sz="800" dirty="0">
                         <a:solidFill>
-                          <a:schemeClr val="lt1"/>
+                          <a:schemeClr val="bg1"/>
                         </a:solidFill>
                       </a:endParaRPr>
                     </a:p>
@@ -16320,9 +13593,9 @@
                         </a:spcAft>
                         <a:buNone/>
                       </a:pPr>
-                      <a:endParaRPr>
+                      <a:endParaRPr sz="800" dirty="0">
                         <a:solidFill>
-                          <a:schemeClr val="lt1"/>
+                          <a:schemeClr val="bg1"/>
                         </a:solidFill>
                       </a:endParaRPr>
                     </a:p>
@@ -16380,7 +13653,11 @@
                         </a:spcAft>
                         <a:buNone/>
                       </a:pPr>
-                      <a:endParaRPr/>
+                      <a:endParaRPr sz="800" dirty="0">
+                        <a:solidFill>
+                          <a:schemeClr val="bg1"/>
+                        </a:solidFill>
+                      </a:endParaRPr>
                     </a:p>
                   </a:txBody>
                   <a:tcPr marL="91425" marR="91425" marT="91425" marB="91425">
@@ -16611,7 +13888,7 @@
                         </a:spcAft>
                         <a:buNone/>
                       </a:pPr>
-                      <a:endParaRPr>
+                      <a:endParaRPr dirty="0">
                         <a:solidFill>
                           <a:schemeClr val="lt1"/>
                         </a:solidFill>
@@ -16671,7 +13948,7 @@
                         </a:spcAft>
                         <a:buNone/>
                       </a:pPr>
-                      <a:endParaRPr>
+                      <a:endParaRPr dirty="0">
                         <a:solidFill>
                           <a:schemeClr val="lt1"/>
                         </a:solidFill>
@@ -16731,7 +14008,7 @@
                         </a:spcAft>
                         <a:buNone/>
                       </a:pPr>
-                      <a:endParaRPr/>
+                      <a:endParaRPr dirty="0"/>
                     </a:p>
                   </a:txBody>
                   <a:tcPr marL="91425" marR="91425" marT="91425" marB="91425">
@@ -17022,7 +14299,7 @@
                         </a:spcAft>
                         <a:buNone/>
                       </a:pPr>
-                      <a:endParaRPr>
+                      <a:endParaRPr dirty="0">
                         <a:solidFill>
                           <a:schemeClr val="lt1"/>
                         </a:solidFill>
@@ -17082,7 +14359,7 @@
                         </a:spcAft>
                         <a:buNone/>
                       </a:pPr>
-                      <a:endParaRPr/>
+                      <a:endParaRPr dirty="0"/>
                     </a:p>
                   </a:txBody>
                   <a:tcPr marL="91425" marR="91425" marT="91425" marB="91425">
@@ -17373,7 +14650,7 @@
                         </a:spcAft>
                         <a:buNone/>
                       </a:pPr>
-                      <a:endParaRPr>
+                      <a:endParaRPr dirty="0">
                         <a:solidFill>
                           <a:schemeClr val="lt1"/>
                         </a:solidFill>
@@ -17433,7 +14710,7 @@
                         </a:spcAft>
                         <a:buNone/>
                       </a:pPr>
-                      <a:endParaRPr/>
+                      <a:endParaRPr dirty="0"/>
                     </a:p>
                   </a:txBody>
                   <a:tcPr marL="91425" marR="91425" marT="91425" marB="91425">
@@ -17784,7 +15061,7 @@
                         </a:spcAft>
                         <a:buNone/>
                       </a:pPr>
-                      <a:endParaRPr/>
+                      <a:endParaRPr dirty="0"/>
                     </a:p>
                   </a:txBody>
                   <a:tcPr marL="91425" marR="91425" marT="91425" marB="91425">
@@ -18118,560 +15395,6 @@
 <file path=ppt/slides/slide4.xml><?xml version="1.0" encoding="utf-8"?>
 <p:sld xmlns:a="http://schemas.openxmlformats.org/drawingml/2006/main" xmlns:r="http://schemas.openxmlformats.org/officeDocument/2006/relationships" xmlns:p="http://schemas.openxmlformats.org/presentationml/2006/main">
   <p:cSld>
-    <p:bg>
-      <p:bgPr>
-        <a:solidFill>
-          <a:srgbClr val="121317"/>
-        </a:solidFill>
-        <a:effectLst/>
-      </p:bgPr>
-    </p:bg>
-    <p:spTree>
-      <p:nvGrpSpPr>
-        <p:cNvPr id="1" name="Shape 131"/>
-        <p:cNvGrpSpPr/>
-        <p:nvPr/>
-      </p:nvGrpSpPr>
-      <p:grpSpPr>
-        <a:xfrm>
-          <a:off x="0" y="0"/>
-          <a:ext cx="0" cy="0"/>
-          <a:chOff x="0" y="0"/>
-          <a:chExt cx="0" cy="0"/>
-        </a:xfrm>
-      </p:grpSpPr>
-      <p:sp>
-        <p:nvSpPr>
-          <p:cNvPr id="132" name="Google Shape;132;p30"/>
-          <p:cNvSpPr txBox="1">
-            <a:spLocks noGrp="1"/>
-          </p:cNvSpPr>
-          <p:nvPr>
-            <p:ph type="sldNum" idx="12"/>
-          </p:nvPr>
-        </p:nvSpPr>
-        <p:spPr>
-          <a:xfrm>
-            <a:off x="8365633" y="4708887"/>
-            <a:ext cx="548700" cy="393600"/>
-          </a:xfrm>
-          <a:prstGeom prst="rect">
-            <a:avLst/>
-          </a:prstGeom>
-        </p:spPr>
-        <p:txBody>
-          <a:bodyPr spcFirstLastPara="1" wrap="square" lIns="91425" tIns="91425" rIns="91425" bIns="91425" anchor="ctr" anchorCtr="0">
-            <a:normAutofit/>
-          </a:bodyPr>
-          <a:lstStyle/>
-          <a:p>
-            <a:pPr marL="0" lvl="0" indent="0" algn="r" rtl="0">
-              <a:spcBef>
-                <a:spcPts val="0"/>
-              </a:spcBef>
-              <a:spcAft>
-                <a:spcPts val="0"/>
-              </a:spcAft>
-              <a:buNone/>
-            </a:pPr>
-            <a:fld id="{00000000-1234-1234-1234-123412341234}" type="slidenum">
-              <a:rPr lang="en"/>
-              <a:t>4</a:t>
-            </a:fld>
-            <a:endParaRPr/>
-          </a:p>
-        </p:txBody>
-      </p:sp>
-      <p:pic>
-        <p:nvPicPr>
-          <p:cNvPr id="133" name="Google Shape;133;p30" title="A4I_whiteArtboard 28.5-NYC.png"/>
-          <p:cNvPicPr preferRelativeResize="0"/>
-          <p:nvPr/>
-        </p:nvPicPr>
-        <p:blipFill rotWithShape="1">
-          <a:blip r:embed="rId3">
-            <a:alphaModFix/>
-          </a:blip>
-          <a:srcRect l="32349" r="40091"/>
-          <a:stretch/>
-        </p:blipFill>
-        <p:spPr>
-          <a:xfrm>
-            <a:off x="1774475" y="471199"/>
-            <a:ext cx="1003551" cy="2048250"/>
-          </a:xfrm>
-          <a:prstGeom prst="rect">
-            <a:avLst/>
-          </a:prstGeom>
-          <a:noFill/>
-          <a:ln>
-            <a:noFill/>
-          </a:ln>
-        </p:spPr>
-      </p:pic>
-      <p:pic>
-        <p:nvPicPr>
-          <p:cNvPr id="134" name="Google Shape;134;p30" title="A4I_whiteArtboard 28.5-NYC.png"/>
-          <p:cNvPicPr preferRelativeResize="0"/>
-          <p:nvPr/>
-        </p:nvPicPr>
-        <p:blipFill rotWithShape="1">
-          <a:blip r:embed="rId3">
-            <a:alphaModFix/>
-          </a:blip>
-          <a:srcRect l="32349" r="40091"/>
-          <a:stretch/>
-        </p:blipFill>
-        <p:spPr>
-          <a:xfrm rot="10800000">
-            <a:off x="6382750" y="506306"/>
-            <a:ext cx="1003551" cy="2048250"/>
-          </a:xfrm>
-          <a:prstGeom prst="rect">
-            <a:avLst/>
-          </a:prstGeom>
-          <a:noFill/>
-          <a:ln>
-            <a:noFill/>
-          </a:ln>
-        </p:spPr>
-      </p:pic>
-      <p:sp>
-        <p:nvSpPr>
-          <p:cNvPr id="135" name="Google Shape;135;p30"/>
-          <p:cNvSpPr txBox="1"/>
-          <p:nvPr/>
-        </p:nvSpPr>
-        <p:spPr>
-          <a:xfrm>
-            <a:off x="2769600" y="2637075"/>
-            <a:ext cx="3604800" cy="2071800"/>
-          </a:xfrm>
-          <a:prstGeom prst="rect">
-            <a:avLst/>
-          </a:prstGeom>
-          <a:noFill/>
-          <a:ln>
-            <a:noFill/>
-          </a:ln>
-        </p:spPr>
-        <p:txBody>
-          <a:bodyPr spcFirstLastPara="1" wrap="square" lIns="91425" tIns="91425" rIns="91425" bIns="91425" anchor="t" anchorCtr="0">
-            <a:spAutoFit/>
-          </a:bodyPr>
-          <a:lstStyle/>
-          <a:p>
-            <a:pPr marL="0" lvl="0" indent="0" algn="ctr" rtl="0">
-              <a:lnSpc>
-                <a:spcPct val="105000"/>
-              </a:lnSpc>
-              <a:spcBef>
-                <a:spcPts val="1200"/>
-              </a:spcBef>
-              <a:spcAft>
-                <a:spcPts val="0"/>
-              </a:spcAft>
-              <a:buNone/>
-            </a:pPr>
-            <a:r>
-              <a:rPr lang="en" sz="1200">
-                <a:solidFill>
-                  <a:schemeClr val="lt1"/>
-                </a:solidFill>
-                <a:latin typeface="Google Sans Flex Medium"/>
-                <a:ea typeface="Google Sans Flex Medium"/>
-                <a:cs typeface="Google Sans Flex Medium"/>
-                <a:sym typeface="Google Sans Flex Medium"/>
-              </a:rPr>
-              <a:t>Real-world challenge</a:t>
-            </a:r>
-            <a:br>
-              <a:rPr lang="en" sz="1200">
-                <a:solidFill>
-                  <a:schemeClr val="lt1"/>
-                </a:solidFill>
-                <a:latin typeface="Google Sans Flex Medium"/>
-                <a:ea typeface="Google Sans Flex Medium"/>
-                <a:cs typeface="Google Sans Flex Medium"/>
-                <a:sym typeface="Google Sans Flex Medium"/>
-              </a:rPr>
-            </a:br>
-            <a:r>
-              <a:rPr lang="en" sz="1200">
-                <a:solidFill>
-                  <a:schemeClr val="lt1"/>
-                </a:solidFill>
-                <a:latin typeface="Google Sans Flex"/>
-                <a:ea typeface="Google Sans Flex"/>
-                <a:cs typeface="Google Sans Flex"/>
-                <a:sym typeface="Google Sans Flex"/>
-              </a:rPr>
-              <a:t>A clear description of the specific real-world challenge your team is tackling.</a:t>
-            </a:r>
-            <a:endParaRPr sz="1200">
-              <a:solidFill>
-                <a:schemeClr val="dk1"/>
-              </a:solidFill>
-            </a:endParaRPr>
-          </a:p>
-          <a:p>
-            <a:pPr marL="0" lvl="0" indent="0" algn="ctr" rtl="0">
-              <a:lnSpc>
-                <a:spcPct val="105000"/>
-              </a:lnSpc>
-              <a:spcBef>
-                <a:spcPts val="2100"/>
-              </a:spcBef>
-              <a:spcAft>
-                <a:spcPts val="0"/>
-              </a:spcAft>
-              <a:buNone/>
-            </a:pPr>
-            <a:r>
-              <a:rPr lang="en" sz="1200">
-                <a:solidFill>
-                  <a:schemeClr val="lt1"/>
-                </a:solidFill>
-                <a:latin typeface="Google Sans Flex Medium"/>
-                <a:ea typeface="Google Sans Flex Medium"/>
-                <a:cs typeface="Google Sans Flex Medium"/>
-                <a:sym typeface="Google Sans Flex Medium"/>
-              </a:rPr>
-              <a:t>Details</a:t>
-            </a:r>
-            <a:br>
-              <a:rPr lang="en" sz="1200">
-                <a:solidFill>
-                  <a:schemeClr val="lt1"/>
-                </a:solidFill>
-                <a:latin typeface="Google Sans Flex Medium"/>
-                <a:ea typeface="Google Sans Flex Medium"/>
-                <a:cs typeface="Google Sans Flex Medium"/>
-                <a:sym typeface="Google Sans Flex Medium"/>
-              </a:rPr>
-            </a:br>
-            <a:r>
-              <a:rPr lang="en" sz="1200">
-                <a:solidFill>
-                  <a:schemeClr val="lt1"/>
-                </a:solidFill>
-                <a:latin typeface="Google Sans Flex"/>
-                <a:ea typeface="Google Sans Flex"/>
-                <a:cs typeface="Google Sans Flex"/>
-                <a:sym typeface="Google Sans Flex"/>
-              </a:rPr>
-              <a:t>Call out who benefits from solving this challenge and why it matters on a broader societal scale.</a:t>
-            </a:r>
-            <a:endParaRPr sz="1200">
-              <a:solidFill>
-                <a:srgbClr val="F8F8F8"/>
-              </a:solidFill>
-              <a:latin typeface="Google Sans Flex"/>
-              <a:ea typeface="Google Sans Flex"/>
-              <a:cs typeface="Google Sans Flex"/>
-              <a:sym typeface="Google Sans Flex"/>
-            </a:endParaRPr>
-          </a:p>
-          <a:p>
-            <a:pPr marL="0" lvl="0" indent="0" algn="ctr" rtl="0">
-              <a:lnSpc>
-                <a:spcPct val="105000"/>
-              </a:lnSpc>
-              <a:spcBef>
-                <a:spcPts val="2100"/>
-              </a:spcBef>
-              <a:spcAft>
-                <a:spcPts val="2100"/>
-              </a:spcAft>
-              <a:buNone/>
-            </a:pPr>
-            <a:endParaRPr sz="1200">
-              <a:solidFill>
-                <a:schemeClr val="lt1"/>
-              </a:solidFill>
-              <a:latin typeface="Google Sans Flex Medium"/>
-              <a:ea typeface="Google Sans Flex Medium"/>
-              <a:cs typeface="Google Sans Flex Medium"/>
-              <a:sym typeface="Google Sans Flex Medium"/>
-            </a:endParaRPr>
-          </a:p>
-        </p:txBody>
-      </p:sp>
-    </p:spTree>
-  </p:cSld>
-  <p:clrMapOvr>
-    <a:masterClrMapping/>
-  </p:clrMapOvr>
-</p:sld>
-</file>
-
-<file path=ppt/slides/slide5.xml><?xml version="1.0" encoding="utf-8"?>
-<p:sld xmlns:a="http://schemas.openxmlformats.org/drawingml/2006/main" xmlns:r="http://schemas.openxmlformats.org/officeDocument/2006/relationships" xmlns:p="http://schemas.openxmlformats.org/presentationml/2006/main">
-  <p:cSld>
-    <p:bg>
-      <p:bgPr>
-        <a:solidFill>
-          <a:srgbClr val="121317"/>
-        </a:solidFill>
-        <a:effectLst/>
-      </p:bgPr>
-    </p:bg>
-    <p:spTree>
-      <p:nvGrpSpPr>
-        <p:cNvPr id="1" name="Shape 139"/>
-        <p:cNvGrpSpPr/>
-        <p:nvPr/>
-      </p:nvGrpSpPr>
-      <p:grpSpPr>
-        <a:xfrm>
-          <a:off x="0" y="0"/>
-          <a:ext cx="0" cy="0"/>
-          <a:chOff x="0" y="0"/>
-          <a:chExt cx="0" cy="0"/>
-        </a:xfrm>
-      </p:grpSpPr>
-      <p:sp>
-        <p:nvSpPr>
-          <p:cNvPr id="140" name="Google Shape;140;p31"/>
-          <p:cNvSpPr txBox="1">
-            <a:spLocks noGrp="1"/>
-          </p:cNvSpPr>
-          <p:nvPr>
-            <p:ph type="sldNum" idx="12"/>
-          </p:nvPr>
-        </p:nvSpPr>
-        <p:spPr>
-          <a:xfrm>
-            <a:off x="8365633" y="4708887"/>
-            <a:ext cx="548700" cy="393600"/>
-          </a:xfrm>
-          <a:prstGeom prst="rect">
-            <a:avLst/>
-          </a:prstGeom>
-        </p:spPr>
-        <p:txBody>
-          <a:bodyPr spcFirstLastPara="1" wrap="square" lIns="91425" tIns="91425" rIns="91425" bIns="91425" anchor="ctr" anchorCtr="0">
-            <a:normAutofit/>
-          </a:bodyPr>
-          <a:lstStyle/>
-          <a:p>
-            <a:pPr marL="0" lvl="0" indent="0" algn="r" rtl="0">
-              <a:spcBef>
-                <a:spcPts val="0"/>
-              </a:spcBef>
-              <a:spcAft>
-                <a:spcPts val="0"/>
-              </a:spcAft>
-              <a:buNone/>
-            </a:pPr>
-            <a:fld id="{00000000-1234-1234-1234-123412341234}" type="slidenum">
-              <a:rPr lang="en"/>
-              <a:t>5</a:t>
-            </a:fld>
-            <a:endParaRPr/>
-          </a:p>
-        </p:txBody>
-      </p:sp>
-      <p:sp>
-        <p:nvSpPr>
-          <p:cNvPr id="141" name="Google Shape;141;p31"/>
-          <p:cNvSpPr txBox="1"/>
-          <p:nvPr/>
-        </p:nvSpPr>
-        <p:spPr>
-          <a:xfrm>
-            <a:off x="2585575" y="2405175"/>
-            <a:ext cx="3862800" cy="1727100"/>
-          </a:xfrm>
-          <a:prstGeom prst="rect">
-            <a:avLst/>
-          </a:prstGeom>
-          <a:noFill/>
-          <a:ln>
-            <a:noFill/>
-          </a:ln>
-        </p:spPr>
-        <p:txBody>
-          <a:bodyPr spcFirstLastPara="1" wrap="square" lIns="91425" tIns="91425" rIns="91425" bIns="91425" anchor="t" anchorCtr="0">
-            <a:spAutoFit/>
-          </a:bodyPr>
-          <a:lstStyle/>
-          <a:p>
-            <a:pPr marL="0" lvl="0" indent="0" algn="ctr" rtl="0">
-              <a:lnSpc>
-                <a:spcPct val="105000"/>
-              </a:lnSpc>
-              <a:spcBef>
-                <a:spcPts val="1200"/>
-              </a:spcBef>
-              <a:spcAft>
-                <a:spcPts val="2100"/>
-              </a:spcAft>
-              <a:buNone/>
-            </a:pPr>
-            <a:r>
-              <a:rPr lang="en" sz="1200">
-                <a:solidFill>
-                  <a:schemeClr val="lt1"/>
-                </a:solidFill>
-                <a:latin typeface="Google Sans Flex Medium"/>
-                <a:ea typeface="Google Sans Flex Medium"/>
-                <a:cs typeface="Google Sans Flex Medium"/>
-                <a:sym typeface="Google Sans Flex Medium"/>
-              </a:rPr>
-              <a:t>Our Agent</a:t>
-            </a:r>
-            <a:br>
-              <a:rPr lang="en" sz="1200">
-                <a:solidFill>
-                  <a:schemeClr val="lt1"/>
-                </a:solidFill>
-                <a:latin typeface="Google Sans Flex"/>
-                <a:ea typeface="Google Sans Flex"/>
-                <a:cs typeface="Google Sans Flex"/>
-                <a:sym typeface="Google Sans Flex"/>
-              </a:rPr>
-            </a:br>
-            <a:r>
-              <a:rPr lang="en" sz="1200">
-                <a:solidFill>
-                  <a:schemeClr val="lt1"/>
-                </a:solidFill>
-                <a:latin typeface="Google Sans Flex"/>
-                <a:ea typeface="Google Sans Flex"/>
-                <a:cs typeface="Google Sans Flex"/>
-                <a:sym typeface="Google Sans Flex"/>
-              </a:rPr>
-              <a:t>An explanation of how your custom AI agent solution creates meaningful change.</a:t>
-            </a:r>
-            <a:br>
-              <a:rPr lang="en" sz="1200">
-                <a:solidFill>
-                  <a:schemeClr val="lt1"/>
-                </a:solidFill>
-                <a:latin typeface="Google Sans Flex"/>
-                <a:ea typeface="Google Sans Flex"/>
-                <a:cs typeface="Google Sans Flex"/>
-                <a:sym typeface="Google Sans Flex"/>
-              </a:rPr>
-            </a:br>
-            <a:br>
-              <a:rPr lang="en" sz="1200">
-                <a:solidFill>
-                  <a:schemeClr val="lt1"/>
-                </a:solidFill>
-                <a:latin typeface="Google Sans Flex"/>
-                <a:ea typeface="Google Sans Flex"/>
-                <a:cs typeface="Google Sans Flex"/>
-                <a:sym typeface="Google Sans Flex"/>
-              </a:rPr>
-            </a:br>
-            <a:r>
-              <a:rPr lang="en" sz="1200">
-                <a:solidFill>
-                  <a:schemeClr val="lt1"/>
-                </a:solidFill>
-                <a:latin typeface="Google Sans Flex Medium"/>
-                <a:ea typeface="Google Sans Flex Medium"/>
-                <a:cs typeface="Google Sans Flex Medium"/>
-                <a:sym typeface="Google Sans Flex Medium"/>
-              </a:rPr>
-              <a:t>Details</a:t>
-            </a:r>
-            <a:br>
-              <a:rPr lang="en" sz="1200">
-                <a:solidFill>
-                  <a:schemeClr val="lt1"/>
-                </a:solidFill>
-                <a:latin typeface="Google Sans Flex"/>
-                <a:ea typeface="Google Sans Flex"/>
-                <a:cs typeface="Google Sans Flex"/>
-                <a:sym typeface="Google Sans Flex"/>
-              </a:rPr>
-            </a:br>
-            <a:r>
-              <a:rPr lang="en" sz="1200">
-                <a:solidFill>
-                  <a:schemeClr val="lt1"/>
-                </a:solidFill>
-                <a:latin typeface="Google Sans Flex"/>
-                <a:ea typeface="Google Sans Flex"/>
-                <a:cs typeface="Google Sans Flex"/>
-                <a:sym typeface="Google Sans Flex"/>
-              </a:rPr>
-              <a:t>Describe how your target users would interact with and use this solution, and outline the concrete, positive outcomes they will experience.</a:t>
-            </a:r>
-            <a:endParaRPr sz="1200"/>
-          </a:p>
-        </p:txBody>
-      </p:sp>
-      <p:pic>
-        <p:nvPicPr>
-          <p:cNvPr id="142" name="Google Shape;142;p31"/>
-          <p:cNvPicPr preferRelativeResize="0"/>
-          <p:nvPr/>
-        </p:nvPicPr>
-        <p:blipFill>
-          <a:blip r:embed="rId3">
-            <a:alphaModFix/>
-          </a:blip>
-          <a:stretch>
-            <a:fillRect/>
-          </a:stretch>
-        </p:blipFill>
-        <p:spPr>
-          <a:xfrm rot="10800000">
-            <a:off x="0" y="1225522"/>
-            <a:ext cx="1936451" cy="2692450"/>
-          </a:xfrm>
-          <a:prstGeom prst="rect">
-            <a:avLst/>
-          </a:prstGeom>
-          <a:noFill/>
-          <a:ln>
-            <a:noFill/>
-          </a:ln>
-        </p:spPr>
-      </p:pic>
-      <p:pic>
-        <p:nvPicPr>
-          <p:cNvPr id="143" name="Google Shape;143;p31"/>
-          <p:cNvPicPr preferRelativeResize="0"/>
-          <p:nvPr/>
-        </p:nvPicPr>
-        <p:blipFill>
-          <a:blip r:embed="rId3">
-            <a:alphaModFix/>
-          </a:blip>
-          <a:stretch>
-            <a:fillRect/>
-          </a:stretch>
-        </p:blipFill>
-        <p:spPr>
-          <a:xfrm>
-            <a:off x="7207550" y="1225522"/>
-            <a:ext cx="1936451" cy="2692450"/>
-          </a:xfrm>
-          <a:prstGeom prst="rect">
-            <a:avLst/>
-          </a:prstGeom>
-          <a:noFill/>
-          <a:ln>
-            <a:noFill/>
-          </a:ln>
-        </p:spPr>
-      </p:pic>
-    </p:spTree>
-  </p:cSld>
-  <p:clrMapOvr>
-    <a:masterClrMapping/>
-  </p:clrMapOvr>
-</p:sld>
-</file>
-
-<file path=ppt/slides/slide6.xml><?xml version="1.0" encoding="utf-8"?>
-<p:sld xmlns:a="http://schemas.openxmlformats.org/drawingml/2006/main" xmlns:r="http://schemas.openxmlformats.org/officeDocument/2006/relationships" xmlns:p="http://schemas.openxmlformats.org/presentationml/2006/main">
-  <p:cSld>
     <p:spTree>
       <p:nvGrpSpPr>
         <p:cNvPr id="1" name=""/>
@@ -18718,7 +15441,7 @@
             </a:pPr>
             <a:fld id="{00000000-1234-1234-1234-123412341234}" type="slidenum">
               <a:rPr lang="en" smtClean="0"/>
-              <a:t>6</a:t>
+              <a:t>4</a:t>
             </a:fld>
             <a:endParaRPr lang="en"/>
           </a:p>
@@ -20016,110 +16739,7 @@
 </p:sld>
 </file>
 
-<file path=ppt/slides/slide7.xml><?xml version="1.0" encoding="utf-8"?>
-<p:sld xmlns:a="http://schemas.openxmlformats.org/drawingml/2006/main" xmlns:r="http://schemas.openxmlformats.org/officeDocument/2006/relationships" xmlns:p="http://schemas.openxmlformats.org/presentationml/2006/main">
-  <p:cSld>
-    <p:bg>
-      <p:bgPr>
-        <a:solidFill>
-          <a:srgbClr val="121317"/>
-        </a:solidFill>
-        <a:effectLst/>
-      </p:bgPr>
-    </p:bg>
-    <p:spTree>
-      <p:nvGrpSpPr>
-        <p:cNvPr id="1" name="Shape 147"/>
-        <p:cNvGrpSpPr/>
-        <p:nvPr/>
-      </p:nvGrpSpPr>
-      <p:grpSpPr>
-        <a:xfrm>
-          <a:off x="0" y="0"/>
-          <a:ext cx="0" cy="0"/>
-          <a:chOff x="0" y="0"/>
-          <a:chExt cx="0" cy="0"/>
-        </a:xfrm>
-      </p:grpSpPr>
-      <p:sp>
-        <p:nvSpPr>
-          <p:cNvPr id="149" name="Google Shape;149;p32"/>
-          <p:cNvSpPr txBox="1">
-            <a:spLocks noGrp="1"/>
-          </p:cNvSpPr>
-          <p:nvPr>
-            <p:ph type="sldNum" idx="12"/>
-          </p:nvPr>
-        </p:nvSpPr>
-        <p:spPr>
-          <a:xfrm>
-            <a:off x="8365633" y="4708887"/>
-            <a:ext cx="548700" cy="393600"/>
-          </a:xfrm>
-          <a:prstGeom prst="rect">
-            <a:avLst/>
-          </a:prstGeom>
-        </p:spPr>
-        <p:txBody>
-          <a:bodyPr spcFirstLastPara="1" wrap="square" lIns="91425" tIns="91425" rIns="91425" bIns="91425" anchor="ctr" anchorCtr="0">
-            <a:normAutofit/>
-          </a:bodyPr>
-          <a:lstStyle/>
-          <a:p>
-            <a:pPr marL="0" lvl="0" indent="0" algn="r" rtl="0">
-              <a:spcBef>
-                <a:spcPts val="0"/>
-              </a:spcBef>
-              <a:spcAft>
-                <a:spcPts val="0"/>
-              </a:spcAft>
-              <a:buNone/>
-            </a:pPr>
-            <a:fld id="{00000000-1234-1234-1234-123412341234}" type="slidenum">
-              <a:rPr lang="en"/>
-              <a:t>7</a:t>
-            </a:fld>
-            <a:endParaRPr/>
-          </a:p>
-        </p:txBody>
-      </p:sp>
-      <p:pic>
-        <p:nvPicPr>
-          <p:cNvPr id="150" name="Google Shape;150;p32"/>
-          <p:cNvPicPr preferRelativeResize="0"/>
-          <p:nvPr/>
-        </p:nvPicPr>
-        <p:blipFill>
-          <a:blip r:embed="rId3">
-            <a:alphaModFix/>
-          </a:blip>
-          <a:stretch>
-            <a:fillRect/>
-          </a:stretch>
-        </p:blipFill>
-        <p:spPr>
-          <a:xfrm rot="10800000">
-            <a:off x="4144783" y="527517"/>
-            <a:ext cx="4769550" cy="951275"/>
-          </a:xfrm>
-          <a:prstGeom prst="rect">
-            <a:avLst/>
-          </a:prstGeom>
-          <a:noFill/>
-          <a:ln>
-            <a:noFill/>
-          </a:ln>
-        </p:spPr>
-      </p:pic>
-    </p:spTree>
-  </p:cSld>
-  <p:clrMapOvr>
-    <a:masterClrMapping/>
-  </p:clrMapOvr>
-</p:sld>
-</file>
-
-<file path=ppt/slides/slide8.xml><?xml version="1.0" encoding="utf-8"?>
+<file path=ppt/slides/slide5.xml><?xml version="1.0" encoding="utf-8"?>
 <p:sld xmlns:a="http://schemas.openxmlformats.org/drawingml/2006/main" xmlns:r="http://schemas.openxmlformats.org/officeDocument/2006/relationships" xmlns:p="http://schemas.openxmlformats.org/presentationml/2006/main">
   <p:cSld>
     <p:spTree>
@@ -20161,7 +16781,7 @@
             <a:r>
               <a:rPr sz="2550" b="1">
                 <a:solidFill>
-                  <a:srgbClr val="12343B"/>
+                  <a:srgbClr val="FFFFFF"/>
                 </a:solidFill>
                 <a:latin typeface="Calibri"/>
               </a:rPr>
@@ -20195,7 +16815,7 @@
             <a:r>
               <a:rPr sz="975">
                 <a:solidFill>
-                  <a:srgbClr val="4A5A5D"/>
+                  <a:srgbClr val="B8C4C6"/>
                 </a:solidFill>
                 <a:latin typeface="Calibri"/>
               </a:rPr>
@@ -20912,7 +17532,7 @@
                           </a:solidFill>
                           <a:latin typeface="Calibri"/>
                         </a:rPr>
-                        <a:t>Edge</a:t>
+                        <a:t>Lookup</a:t>
                       </a:r>
                     </a:p>
                   </a:txBody>
@@ -21426,7 +18046,7 @@
                 </a:solidFill>
                 <a:latin typeface="Calibri"/>
               </a:rPr>
-              <a:t>Footfall from finance, professional, health, education jobs</a:t>
+              <a:t>Footfall: all of a block's jobs, split evenly over retail, food, personal-service and arts shops</a:t>
             </a:r>
           </a:p>
         </p:txBody>
@@ -21801,20 +18421,12 @@
 </p:sld>
 </file>
 
-<file path=ppt/slides/slide9.xml><?xml version="1.0" encoding="utf-8"?>
+<file path=ppt/slides/slide6.xml><?xml version="1.0" encoding="utf-8"?>
 <p:sld xmlns:a="http://schemas.openxmlformats.org/drawingml/2006/main" xmlns:r="http://schemas.openxmlformats.org/officeDocument/2006/relationships" xmlns:p="http://schemas.openxmlformats.org/presentationml/2006/main">
   <p:cSld>
-    <p:bg>
-      <p:bgPr>
-        <a:solidFill>
-          <a:srgbClr val="121317"/>
-        </a:solidFill>
-        <a:effectLst/>
-      </p:bgPr>
-    </p:bg>
     <p:spTree>
       <p:nvGrpSpPr>
-        <p:cNvPr id="1" name="Shape 154"/>
+        <p:cNvPr id="1" name=""/>
         <p:cNvGrpSpPr/>
         <p:nvPr/>
       </p:nvGrpSpPr>
@@ -21828,307 +18440,2437 @@
       </p:grpSpPr>
       <p:sp>
         <p:nvSpPr>
-          <p:cNvPr id="155" name="Google Shape;155;p33"/>
+          <p:cNvPr id="2" name="Title"/>
           <p:cNvSpPr txBox="1"/>
           <p:nvPr/>
         </p:nvSpPr>
         <p:spPr>
           <a:xfrm>
-            <a:off x="609400" y="2019250"/>
-            <a:ext cx="4605300" cy="2242800"/>
+            <a:off x="342900" y="260605"/>
+            <a:ext cx="8435340" cy="392415"/>
           </a:xfrm>
           <a:prstGeom prst="rect">
             <a:avLst/>
           </a:prstGeom>
           <a:noFill/>
-          <a:ln>
-            <a:noFill/>
-          </a:ln>
         </p:spPr>
         <p:txBody>
-          <a:bodyPr spcFirstLastPara="1" wrap="square" lIns="91425" tIns="91425" rIns="91425" bIns="91425" anchor="t" anchorCtr="0">
-            <a:noAutofit/>
+          <a:bodyPr wrap="square" lIns="0" tIns="0" rIns="0" bIns="0" anchor="t">
+            <a:spAutoFit/>
           </a:bodyPr>
           <a:lstStyle/>
           <a:p>
-            <a:pPr marL="0" lvl="0" indent="0" algn="l" rtl="0">
-              <a:lnSpc>
-                <a:spcPct val="105000"/>
-              </a:lnSpc>
-              <a:spcBef>
-                <a:spcPts val="1200"/>
-              </a:spcBef>
-              <a:spcAft>
-                <a:spcPts val="0"/>
-              </a:spcAft>
-              <a:buNone/>
+            <a:pPr>
+              <a:spcAft>
+                <a:spcPts val="225"/>
+              </a:spcAft>
             </a:pPr>
             <a:r>
-              <a:rPr lang="en" dirty="0">
-                <a:solidFill>
-                  <a:schemeClr val="lt1"/>
-                </a:solidFill>
-                <a:latin typeface="Google Sans Flex Medium"/>
-                <a:ea typeface="Google Sans Flex Medium"/>
-                <a:cs typeface="Google Sans Flex Medium"/>
-                <a:sym typeface="Google Sans Flex Medium"/>
+              <a:rPr sz="2550" b="1" dirty="0">
+                <a:solidFill>
+                  <a:srgbClr val="FFFFFF"/>
+                </a:solidFill>
+                <a:latin typeface="Calibri"/>
               </a:rPr>
-              <a:t>What to Include</a:t>
+              <a:t>How our grant decision agents work together</a:t>
             </a:r>
-            <a:br>
-              <a:rPr lang="en" dirty="0">
-                <a:solidFill>
-                  <a:schemeClr val="lt1"/>
-                </a:solidFill>
-                <a:latin typeface="Google Sans Flex Medium"/>
-                <a:ea typeface="Google Sans Flex Medium"/>
-                <a:cs typeface="Google Sans Flex Medium"/>
-                <a:sym typeface="Google Sans Flex Medium"/>
-              </a:rPr>
-            </a:br>
-            <a:r>
-              <a:rPr lang="en" sz="1200" dirty="0">
-                <a:solidFill>
-                  <a:schemeClr val="lt1"/>
-                </a:solidFill>
-                <a:latin typeface="Google Sans Flex"/>
-                <a:ea typeface="Google Sans Flex"/>
-                <a:cs typeface="Google Sans Flex"/>
-                <a:sym typeface="Google Sans Flex"/>
-              </a:rPr>
-              <a:t>A visual blueprint of your technical build.</a:t>
-            </a:r>
-            <a:endParaRPr sz="1200" dirty="0">
-              <a:solidFill>
-                <a:schemeClr val="lt1"/>
-              </a:solidFill>
-              <a:latin typeface="Google Sans Flex"/>
-              <a:ea typeface="Google Sans Flex"/>
-              <a:cs typeface="Google Sans Flex"/>
-              <a:sym typeface="Google Sans Flex"/>
-            </a:endParaRPr>
-          </a:p>
-          <a:p>
-            <a:pPr marL="0" lvl="0" indent="0" algn="l" rtl="0">
-              <a:lnSpc>
-                <a:spcPct val="105000"/>
-              </a:lnSpc>
-              <a:spcBef>
-                <a:spcPts val="2100"/>
-              </a:spcBef>
-              <a:spcAft>
-                <a:spcPts val="1200"/>
-              </a:spcAft>
-              <a:buNone/>
-            </a:pPr>
-            <a:r>
-              <a:rPr lang="en" dirty="0">
-                <a:solidFill>
-                  <a:schemeClr val="lt1"/>
-                </a:solidFill>
-                <a:latin typeface="Google Sans Flex Medium"/>
-                <a:ea typeface="Google Sans Flex Medium"/>
-                <a:cs typeface="Google Sans Flex Medium"/>
-                <a:sym typeface="Google Sans Flex Medium"/>
-              </a:rPr>
-              <a:t>Details</a:t>
-            </a:r>
-            <a:br>
-              <a:rPr lang="en" dirty="0">
-                <a:solidFill>
-                  <a:schemeClr val="lt1"/>
-                </a:solidFill>
-                <a:latin typeface="Google Sans Flex Medium"/>
-                <a:ea typeface="Google Sans Flex Medium"/>
-                <a:cs typeface="Google Sans Flex Medium"/>
-                <a:sym typeface="Google Sans Flex Medium"/>
-              </a:rPr>
-            </a:br>
-            <a:r>
-              <a:rPr lang="en" sz="1200" dirty="0">
-                <a:solidFill>
-                  <a:schemeClr val="lt1"/>
-                </a:solidFill>
-                <a:latin typeface="Google Sans Flex"/>
-                <a:ea typeface="Google Sans Flex"/>
-                <a:cs typeface="Google Sans Flex"/>
-                <a:sym typeface="Google Sans Flex"/>
-              </a:rPr>
-              <a:t>Provide a simple, clean schematic or diagram showing how your multi-agent chains are structured, how they communicate (using tools like the Agent Development Kit/ADK or Model Context Protocol/MCP), and how they interact with one another.</a:t>
-            </a:r>
-            <a:endParaRPr sz="1200" dirty="0">
-              <a:solidFill>
-                <a:schemeClr val="lt1"/>
-              </a:solidFill>
-              <a:latin typeface="Google Sans Flex"/>
-              <a:ea typeface="Google Sans Flex"/>
-              <a:cs typeface="Google Sans Flex"/>
-              <a:sym typeface="Google Sans Flex"/>
-            </a:endParaRPr>
           </a:p>
         </p:txBody>
       </p:sp>
       <p:sp>
         <p:nvSpPr>
-          <p:cNvPr id="156" name="Google Shape;156;p33"/>
-          <p:cNvSpPr txBox="1">
-            <a:spLocks noGrp="1"/>
-          </p:cNvSpPr>
-          <p:nvPr>
-            <p:ph type="sldNum" idx="12"/>
-          </p:nvPr>
+          <p:cNvPr id="3" name="Subtitle"/>
+          <p:cNvSpPr txBox="1"/>
+          <p:nvPr/>
         </p:nvSpPr>
         <p:spPr>
           <a:xfrm>
-            <a:off x="8365633" y="4708887"/>
-            <a:ext cx="548700" cy="393600"/>
+            <a:off x="342900" y="685801"/>
+            <a:ext cx="8435340" cy="161583"/>
           </a:xfrm>
           <a:prstGeom prst="rect">
             <a:avLst/>
           </a:prstGeom>
+          <a:noFill/>
         </p:spPr>
         <p:txBody>
-          <a:bodyPr spcFirstLastPara="1" wrap="square" lIns="91425" tIns="91425" rIns="91425" bIns="91425" anchor="ctr" anchorCtr="0">
-            <a:normAutofit/>
+          <a:bodyPr wrap="square" lIns="0" tIns="0" rIns="0" bIns="0" anchor="t">
+            <a:spAutoFit/>
           </a:bodyPr>
           <a:lstStyle/>
           <a:p>
-            <a:pPr marL="0" lvl="0" indent="0" algn="r" rtl="0">
-              <a:spcBef>
-                <a:spcPts val="0"/>
-              </a:spcBef>
-              <a:spcAft>
-                <a:spcPts val="0"/>
-              </a:spcAft>
-              <a:buNone/>
+            <a:pPr>
+              <a:spcAft>
+                <a:spcPts val="225"/>
+              </a:spcAft>
             </a:pPr>
-            <a:fld id="{00000000-1234-1234-1234-123412341234}" type="slidenum">
-              <a:rPr lang="en"/>
-              <a:t>9</a:t>
-            </a:fld>
-            <a:endParaRPr/>
+            <a:r>
+              <a:rPr sz="1050">
+                <a:solidFill>
+                  <a:srgbClr val="B8C4C6"/>
+                </a:solidFill>
+                <a:latin typeface="Calibri"/>
+              </a:rPr>
+              <a:t>Anchor-closure track · Central Market, San Francisco · four ADK agents in one chain, data through MCP, everything on Google Cloud</a:t>
+            </a:r>
           </a:p>
         </p:txBody>
       </p:sp>
       <p:sp>
         <p:nvSpPr>
-          <p:cNvPr id="157" name="Google Shape;157;p33"/>
+          <p:cNvPr id="4" name="User card"/>
+          <p:cNvSpPr/>
+          <p:nvPr/>
+        </p:nvSpPr>
+        <p:spPr>
+          <a:xfrm>
+            <a:off x="342900" y="1062990"/>
+            <a:ext cx="1577340" cy="672084"/>
+          </a:xfrm>
+          <a:prstGeom prst="roundRect">
+            <a:avLst>
+              <a:gd name="adj" fmla="val 12000"/>
+            </a:avLst>
+          </a:prstGeom>
+          <a:solidFill>
+            <a:srgbClr val="E3EFED"/>
+          </a:solidFill>
+          <a:ln>
+            <a:noFill/>
+          </a:ln>
+          <a:effectLst/>
+        </p:spPr>
+        <p:style>
+          <a:lnRef idx="1">
+            <a:schemeClr val="accent1"/>
+          </a:lnRef>
+          <a:fillRef idx="3">
+            <a:schemeClr val="accent1"/>
+          </a:fillRef>
+          <a:effectRef idx="2">
+            <a:schemeClr val="accent1"/>
+          </a:effectRef>
+          <a:fontRef idx="minor">
+            <a:schemeClr val="lt1"/>
+          </a:fontRef>
+        </p:style>
+        <p:txBody>
+          <a:bodyPr rtlCol="0" anchor="ctr"/>
+          <a:lstStyle/>
+          <a:p>
+            <a:pPr algn="ctr"/>
+            <a:endParaRPr sz="1050"/>
+          </a:p>
+        </p:txBody>
+      </p:sp>
+      <p:sp>
+        <p:nvSpPr>
+          <p:cNvPr id="5" name="TextBox 4"/>
           <p:cNvSpPr txBox="1"/>
           <p:nvPr/>
         </p:nvSpPr>
         <p:spPr>
           <a:xfrm>
-            <a:off x="425666" y="509013"/>
-            <a:ext cx="855600" cy="1315500"/>
+            <a:off x="466344" y="1124712"/>
+            <a:ext cx="1330452" cy="568104"/>
           </a:xfrm>
           <a:prstGeom prst="rect">
             <a:avLst/>
           </a:prstGeom>
           <a:noFill/>
-          <a:ln>
-            <a:noFill/>
-          </a:ln>
         </p:spPr>
         <p:txBody>
-          <a:bodyPr spcFirstLastPara="1" wrap="square" lIns="91425" tIns="91425" rIns="91425" bIns="91425" anchor="t" anchorCtr="0">
-            <a:noAutofit/>
+          <a:bodyPr wrap="square" lIns="0" tIns="0" rIns="0" bIns="0" anchor="t">
+            <a:spAutoFit/>
           </a:bodyPr>
           <a:lstStyle/>
           <a:p>
-            <a:pPr marL="0" lvl="0" indent="0" algn="l" rtl="0">
-              <a:lnSpc>
-                <a:spcPct val="90000"/>
-              </a:lnSpc>
-              <a:spcBef>
-                <a:spcPts val="0"/>
-              </a:spcBef>
-              <a:spcAft>
-                <a:spcPts val="0"/>
-              </a:spcAft>
-              <a:buNone/>
+            <a:pPr>
+              <a:spcAft>
+                <a:spcPts val="225"/>
+              </a:spcAft>
             </a:pPr>
             <a:r>
-              <a:rPr lang="en" sz="9000">
-                <a:solidFill>
-                  <a:srgbClr val="F8F8F8"/>
-                </a:solidFill>
-                <a:latin typeface="Google Sans Flex Thin"/>
-                <a:ea typeface="Google Sans Flex Thin"/>
-                <a:cs typeface="Google Sans Flex Thin"/>
-                <a:sym typeface="Google Sans Flex Thin"/>
+              <a:rPr sz="1050" b="1">
+                <a:solidFill>
+                  <a:srgbClr val="12343B"/>
+                </a:solidFill>
+                <a:latin typeface="Calibri"/>
               </a:rPr>
-              <a:t>(</a:t>
+              <a:t>Grant officer</a:t>
             </a:r>
-            <a:endParaRPr sz="9000">
-              <a:solidFill>
-                <a:srgbClr val="F8F8F8"/>
-              </a:solidFill>
-              <a:latin typeface="Google Sans Flex Thin"/>
-              <a:ea typeface="Google Sans Flex Thin"/>
-              <a:cs typeface="Google Sans Flex Thin"/>
-              <a:sym typeface="Google Sans Flex Thin"/>
-            </a:endParaRPr>
+          </a:p>
+          <a:p>
+            <a:pPr>
+              <a:spcAft>
+                <a:spcPts val="225"/>
+              </a:spcAft>
+            </a:pPr>
+            <a:r>
+              <a:rPr sz="825">
+                <a:solidFill>
+                  <a:srgbClr val="4A5A5D"/>
+                </a:solidFill>
+                <a:latin typeface="Calibri"/>
+              </a:rPr>
+              <a:t>Picks the closing employer, the budget and the grant-effect assumption</a:t>
+            </a:r>
+          </a:p>
+        </p:txBody>
+      </p:sp>
+      <p:cxnSp>
+        <p:nvCxnSpPr>
+          <p:cNvPr id="6" name="Connector 5"/>
+          <p:cNvCxnSpPr/>
+          <p:nvPr/>
+        </p:nvCxnSpPr>
+        <p:spPr>
+          <a:xfrm>
+            <a:off x="1131570" y="1735074"/>
+            <a:ext cx="0" cy="219456"/>
+          </a:xfrm>
+          <a:prstGeom prst="line">
+            <a:avLst/>
+          </a:prstGeom>
+          <a:ln w="22225">
+            <a:solidFill>
+              <a:srgbClr val="C27C00"/>
+            </a:solidFill>
+            <a:tailEnd type="triangle" w="med" len="med"/>
+          </a:ln>
+        </p:spPr>
+        <p:style>
+          <a:lnRef idx="2">
+            <a:schemeClr val="accent1"/>
+          </a:lnRef>
+          <a:fillRef idx="0">
+            <a:schemeClr val="accent1"/>
+          </a:fillRef>
+          <a:effectRef idx="1">
+            <a:schemeClr val="accent1"/>
+          </a:effectRef>
+          <a:fontRef idx="minor">
+            <a:schemeClr val="tx1"/>
+          </a:fontRef>
+        </p:style>
+      </p:cxnSp>
+      <p:sp>
+        <p:nvSpPr>
+          <p:cNvPr id="7" name="Front end card"/>
+          <p:cNvSpPr/>
+          <p:nvPr/>
+        </p:nvSpPr>
+        <p:spPr>
+          <a:xfrm>
+            <a:off x="342900" y="1954530"/>
+            <a:ext cx="1577340" cy="1337310"/>
+          </a:xfrm>
+          <a:prstGeom prst="roundRect">
+            <a:avLst>
+              <a:gd name="adj" fmla="val 6153"/>
+            </a:avLst>
+          </a:prstGeom>
+          <a:solidFill>
+            <a:srgbClr val="FFFFFF"/>
+          </a:solidFill>
+          <a:ln w="19050">
+            <a:solidFill>
+              <a:srgbClr val="C27C00"/>
+            </a:solidFill>
+          </a:ln>
+          <a:effectLst/>
+        </p:spPr>
+        <p:style>
+          <a:lnRef idx="1">
+            <a:schemeClr val="accent1"/>
+          </a:lnRef>
+          <a:fillRef idx="3">
+            <a:schemeClr val="accent1"/>
+          </a:fillRef>
+          <a:effectRef idx="2">
+            <a:schemeClr val="accent1"/>
+          </a:effectRef>
+          <a:fontRef idx="minor">
+            <a:schemeClr val="lt1"/>
+          </a:fontRef>
+        </p:style>
+        <p:txBody>
+          <a:bodyPr rtlCol="0" anchor="ctr"/>
+          <a:lstStyle/>
+          <a:p>
+            <a:pPr algn="ctr"/>
+            <a:endParaRPr sz="1050"/>
           </a:p>
         </p:txBody>
       </p:sp>
       <p:sp>
         <p:nvSpPr>
-          <p:cNvPr id="158" name="Google Shape;158;p33"/>
+          <p:cNvPr id="8" name="TextBox 7"/>
           <p:cNvSpPr txBox="1"/>
           <p:nvPr/>
         </p:nvSpPr>
         <p:spPr>
-          <a:xfrm rot="10800000">
-            <a:off x="3230216" y="585213"/>
-            <a:ext cx="855600" cy="1315500"/>
+          <a:xfrm>
+            <a:off x="466344" y="2023110"/>
+            <a:ext cx="1330452" cy="1000274"/>
           </a:xfrm>
           <a:prstGeom prst="rect">
             <a:avLst/>
           </a:prstGeom>
           <a:noFill/>
+        </p:spPr>
+        <p:txBody>
+          <a:bodyPr wrap="square" lIns="0" tIns="0" rIns="0" bIns="0" anchor="t">
+            <a:spAutoFit/>
+          </a:bodyPr>
+          <a:lstStyle/>
+          <a:p>
+            <a:pPr>
+              <a:spcAft>
+                <a:spcPts val="225"/>
+              </a:spcAft>
+            </a:pPr>
+            <a:r>
+              <a:rPr sz="1050" b="1">
+                <a:solidFill>
+                  <a:srgbClr val="12343B"/>
+                </a:solidFill>
+                <a:latin typeface="Calibri"/>
+              </a:rPr>
+              <a:t>Interactive map</a:t>
+            </a:r>
+          </a:p>
+          <a:p>
+            <a:pPr>
+              <a:spcAft>
+                <a:spcPts val="225"/>
+              </a:spcAft>
+            </a:pPr>
+            <a:r>
+              <a:rPr sz="825" b="1">
+                <a:solidFill>
+                  <a:srgbClr val="C27C00"/>
+                </a:solidFill>
+                <a:latin typeface="Calibri"/>
+              </a:rPr>
+              <a:t>Cloud Run · Google Maps JS API</a:t>
+            </a:r>
+          </a:p>
+          <a:p>
+            <a:pPr>
+              <a:spcAft>
+                <a:spcPts val="225"/>
+              </a:spcAft>
+            </a:pPr>
+            <a:r>
+              <a:rPr sz="825">
+                <a:solidFill>
+                  <a:srgbClr val="4A5A5D"/>
+                </a:solidFill>
+                <a:latin typeface="Calibri"/>
+              </a:rPr>
+              <a:t>Hover a business: amount, justification, impact</a:t>
+            </a:r>
+          </a:p>
+          <a:p>
+            <a:pPr>
+              <a:spcAft>
+                <a:spcPts val="225"/>
+              </a:spcAft>
+            </a:pPr>
+            <a:r>
+              <a:rPr sz="825">
+                <a:solidFill>
+                  <a:srgbClr val="4A5A5D"/>
+                </a:solidFill>
+                <a:latin typeface="Calibri"/>
+              </a:rPr>
+              <a:t>The cascade is drawn on the map, anchor to supplier</a:t>
+            </a:r>
+          </a:p>
+        </p:txBody>
+      </p:sp>
+      <p:cxnSp>
+        <p:nvCxnSpPr>
+          <p:cNvPr id="9" name="Connector 8"/>
+          <p:cNvCxnSpPr/>
+          <p:nvPr/>
+        </p:nvCxnSpPr>
+        <p:spPr>
+          <a:xfrm>
+            <a:off x="1920240" y="2297430"/>
+            <a:ext cx="651510" cy="0"/>
+          </a:xfrm>
+          <a:prstGeom prst="line">
+            <a:avLst/>
+          </a:prstGeom>
+          <a:ln w="22225">
+            <a:solidFill>
+              <a:srgbClr val="C27C00"/>
+            </a:solidFill>
+            <a:tailEnd type="triangle" w="med" len="med"/>
+          </a:ln>
+        </p:spPr>
+        <p:style>
+          <a:lnRef idx="2">
+            <a:schemeClr val="accent1"/>
+          </a:lnRef>
+          <a:fillRef idx="0">
+            <a:schemeClr val="accent1"/>
+          </a:fillRef>
+          <a:effectRef idx="1">
+            <a:schemeClr val="accent1"/>
+          </a:effectRef>
+          <a:fontRef idx="minor">
+            <a:schemeClr val="tx1"/>
+          </a:fontRef>
+        </p:style>
+      </p:cxnSp>
+      <p:sp>
+        <p:nvSpPr>
+          <p:cNvPr id="10" name="TextBox 9"/>
+          <p:cNvSpPr txBox="1"/>
+          <p:nvPr/>
+        </p:nvSpPr>
+        <p:spPr>
+          <a:xfrm>
+            <a:off x="1947672" y="2057401"/>
+            <a:ext cx="596646" cy="103875"/>
+          </a:xfrm>
+          <a:prstGeom prst="rect">
+            <a:avLst/>
+          </a:prstGeom>
+          <a:noFill/>
+        </p:spPr>
+        <p:txBody>
+          <a:bodyPr wrap="square" lIns="0" tIns="0" rIns="0" bIns="0" anchor="t">
+            <a:spAutoFit/>
+          </a:bodyPr>
+          <a:lstStyle/>
+          <a:p>
+            <a:pPr algn="ctr">
+              <a:spcAft>
+                <a:spcPts val="225"/>
+              </a:spcAft>
+            </a:pPr>
+            <a:r>
+              <a:rPr sz="675" b="1">
+                <a:solidFill>
+                  <a:srgbClr val="C27C00"/>
+                </a:solidFill>
+                <a:latin typeface="Calibri"/>
+              </a:rPr>
+              <a:t>POST /scenario</a:t>
+            </a:r>
+          </a:p>
+        </p:txBody>
+      </p:sp>
+      <p:cxnSp>
+        <p:nvCxnSpPr>
+          <p:cNvPr id="11" name="Connector 10"/>
+          <p:cNvCxnSpPr/>
+          <p:nvPr/>
+        </p:nvCxnSpPr>
+        <p:spPr>
+          <a:xfrm flipH="1">
+            <a:off x="1920240" y="2914650"/>
+            <a:ext cx="651510" cy="0"/>
+          </a:xfrm>
+          <a:prstGeom prst="line">
+            <a:avLst/>
+          </a:prstGeom>
+          <a:ln w="22225">
+            <a:solidFill>
+              <a:srgbClr val="C27C00"/>
+            </a:solidFill>
+            <a:tailEnd type="triangle" w="med" len="med"/>
+          </a:ln>
+        </p:spPr>
+        <p:style>
+          <a:lnRef idx="2">
+            <a:schemeClr val="accent1"/>
+          </a:lnRef>
+          <a:fillRef idx="0">
+            <a:schemeClr val="accent1"/>
+          </a:fillRef>
+          <a:effectRef idx="1">
+            <a:schemeClr val="accent1"/>
+          </a:effectRef>
+          <a:fontRef idx="minor">
+            <a:schemeClr val="tx1"/>
+          </a:fontRef>
+        </p:style>
+      </p:cxnSp>
+      <p:sp>
+        <p:nvSpPr>
+          <p:cNvPr id="12" name="TextBox 11"/>
+          <p:cNvSpPr txBox="1"/>
+          <p:nvPr/>
+        </p:nvSpPr>
+        <p:spPr>
+          <a:xfrm>
+            <a:off x="1947672" y="2955798"/>
+            <a:ext cx="596646" cy="103875"/>
+          </a:xfrm>
+          <a:prstGeom prst="rect">
+            <a:avLst/>
+          </a:prstGeom>
+          <a:noFill/>
+        </p:spPr>
+        <p:txBody>
+          <a:bodyPr wrap="square" lIns="0" tIns="0" rIns="0" bIns="0" anchor="t">
+            <a:spAutoFit/>
+          </a:bodyPr>
+          <a:lstStyle/>
+          <a:p>
+            <a:pPr algn="ctr">
+              <a:spcAft>
+                <a:spcPts val="225"/>
+              </a:spcAft>
+            </a:pPr>
+            <a:r>
+              <a:rPr sz="675" b="1">
+                <a:solidFill>
+                  <a:srgbClr val="C27C00"/>
+                </a:solidFill>
+                <a:latin typeface="Calibri"/>
+              </a:rPr>
+              <a:t>decisions.json</a:t>
+            </a:r>
+          </a:p>
+        </p:txBody>
+      </p:sp>
+      <p:sp>
+        <p:nvSpPr>
+          <p:cNvPr id="13" name="ADK root agent"/>
+          <p:cNvSpPr/>
+          <p:nvPr/>
+        </p:nvSpPr>
+        <p:spPr>
+          <a:xfrm>
+            <a:off x="2571750" y="1028700"/>
+            <a:ext cx="6227064" cy="2023110"/>
+          </a:xfrm>
+          <a:prstGeom prst="roundRect">
+            <a:avLst>
+              <a:gd name="adj" fmla="val 4067"/>
+            </a:avLst>
+          </a:prstGeom>
+          <a:solidFill>
+            <a:srgbClr val="E3EFED"/>
+          </a:solidFill>
+          <a:ln w="12700">
+            <a:solidFill>
+              <a:srgbClr val="B8D4D0"/>
+            </a:solidFill>
+          </a:ln>
+          <a:effectLst/>
+        </p:spPr>
+        <p:style>
+          <a:lnRef idx="1">
+            <a:schemeClr val="accent1"/>
+          </a:lnRef>
+          <a:fillRef idx="3">
+            <a:schemeClr val="accent1"/>
+          </a:fillRef>
+          <a:effectRef idx="2">
+            <a:schemeClr val="accent1"/>
+          </a:effectRef>
+          <a:fontRef idx="minor">
+            <a:schemeClr val="lt1"/>
+          </a:fontRef>
+        </p:style>
+        <p:txBody>
+          <a:bodyPr rtlCol="0" anchor="ctr"/>
+          <a:lstStyle/>
+          <a:p>
+            <a:pPr algn="ctr"/>
+            <a:endParaRPr sz="1050"/>
+          </a:p>
+        </p:txBody>
+      </p:sp>
+      <p:sp>
+        <p:nvSpPr>
+          <p:cNvPr id="14" name="TextBox 13"/>
+          <p:cNvSpPr txBox="1"/>
+          <p:nvPr/>
+        </p:nvSpPr>
+        <p:spPr>
+          <a:xfrm>
+            <a:off x="2708910" y="1097281"/>
+            <a:ext cx="5952744" cy="161583"/>
+          </a:xfrm>
+          <a:prstGeom prst="rect">
+            <a:avLst/>
+          </a:prstGeom>
+          <a:noFill/>
+        </p:spPr>
+        <p:txBody>
+          <a:bodyPr wrap="square" lIns="0" tIns="0" rIns="0" bIns="0" anchor="t">
+            <a:spAutoFit/>
+          </a:bodyPr>
+          <a:lstStyle/>
+          <a:p>
+            <a:pPr>
+              <a:spcAft>
+                <a:spcPts val="225"/>
+              </a:spcAft>
+            </a:pPr>
+            <a:r>
+              <a:rPr sz="1050" b="1">
+                <a:solidFill>
+                  <a:srgbClr val="12343B"/>
+                </a:solidFill>
+                <a:latin typeface="Calibri"/>
+              </a:rPr>
+              <a:t>ADK root agent </a:t>
+            </a:r>
+            <a:r>
+              <a:rPr sz="1050">
+                <a:solidFill>
+                  <a:srgbClr val="1F6F6B"/>
+                </a:solidFill>
+                <a:latin typeface="Calibri"/>
+              </a:rPr>
+              <a:t>· SequentialAgent · Gemini · deployed on Agent Runtime</a:t>
+            </a:r>
+          </a:p>
+        </p:txBody>
+      </p:sp>
+      <p:sp>
+        <p:nvSpPr>
+          <p:cNvPr id="15" name="Agent 1"/>
+          <p:cNvSpPr/>
+          <p:nvPr/>
+        </p:nvSpPr>
+        <p:spPr>
+          <a:xfrm>
+            <a:off x="2708910" y="1405889"/>
+            <a:ext cx="1323594" cy="1165860"/>
+          </a:xfrm>
+          <a:prstGeom prst="roundRect">
+            <a:avLst>
+              <a:gd name="adj" fmla="val 7058"/>
+            </a:avLst>
+          </a:prstGeom>
+          <a:solidFill>
+            <a:srgbClr val="FFFFFF"/>
+          </a:solidFill>
+          <a:ln w="12700">
+            <a:solidFill>
+              <a:srgbClr val="B8D4D0"/>
+            </a:solidFill>
+          </a:ln>
+          <a:effectLst/>
+        </p:spPr>
+        <p:style>
+          <a:lnRef idx="1">
+            <a:schemeClr val="accent1"/>
+          </a:lnRef>
+          <a:fillRef idx="3">
+            <a:schemeClr val="accent1"/>
+          </a:fillRef>
+          <a:effectRef idx="2">
+            <a:schemeClr val="accent1"/>
+          </a:effectRef>
+          <a:fontRef idx="minor">
+            <a:schemeClr val="lt1"/>
+          </a:fontRef>
+        </p:style>
+        <p:txBody>
+          <a:bodyPr rtlCol="0" anchor="ctr"/>
+          <a:lstStyle/>
+          <a:p>
+            <a:pPr algn="ctr"/>
+            <a:endParaRPr sz="1050"/>
+          </a:p>
+        </p:txBody>
+      </p:sp>
+      <p:sp>
+        <p:nvSpPr>
+          <p:cNvPr id="16" name="Oval 15"/>
+          <p:cNvSpPr/>
+          <p:nvPr/>
+        </p:nvSpPr>
+        <p:spPr>
+          <a:xfrm>
+            <a:off x="2804922" y="1501902"/>
+            <a:ext cx="246888" cy="246888"/>
+          </a:xfrm>
+          <a:prstGeom prst="ellipse">
+            <a:avLst/>
+          </a:prstGeom>
+          <a:solidFill>
+            <a:srgbClr val="1F6F6B"/>
+          </a:solidFill>
           <a:ln>
             <a:noFill/>
           </a:ln>
+          <a:effectLst/>
+        </p:spPr>
+        <p:style>
+          <a:lnRef idx="1">
+            <a:schemeClr val="accent1"/>
+          </a:lnRef>
+          <a:fillRef idx="3">
+            <a:schemeClr val="accent1"/>
+          </a:fillRef>
+          <a:effectRef idx="2">
+            <a:schemeClr val="accent1"/>
+          </a:effectRef>
+          <a:fontRef idx="minor">
+            <a:schemeClr val="lt1"/>
+          </a:fontRef>
+        </p:style>
+        <p:txBody>
+          <a:bodyPr lIns="0" tIns="0" rIns="0" bIns="0" rtlCol="0" anchor="ctr"/>
+          <a:lstStyle/>
+          <a:p>
+            <a:pPr algn="ctr"/>
+            <a:r>
+              <a:rPr sz="975" b="1">
+                <a:solidFill>
+                  <a:srgbClr val="FFFFFF"/>
+                </a:solidFill>
+                <a:latin typeface="Calibri"/>
+              </a:rPr>
+              <a:t>1</a:t>
+            </a:r>
+          </a:p>
+        </p:txBody>
+      </p:sp>
+      <p:sp>
+        <p:nvSpPr>
+          <p:cNvPr id="17" name="TextBox 16"/>
+          <p:cNvSpPr txBox="1"/>
+          <p:nvPr/>
+        </p:nvSpPr>
+        <p:spPr>
+          <a:xfrm>
+            <a:off x="2804922" y="1817370"/>
+            <a:ext cx="1131570" cy="150041"/>
+          </a:xfrm>
+          <a:prstGeom prst="rect">
+            <a:avLst/>
+          </a:prstGeom>
+          <a:noFill/>
         </p:spPr>
         <p:txBody>
-          <a:bodyPr spcFirstLastPara="1" wrap="square" lIns="91425" tIns="91425" rIns="91425" bIns="91425" anchor="t" anchorCtr="0">
-            <a:noAutofit/>
+          <a:bodyPr wrap="square" lIns="0" tIns="0" rIns="0" bIns="0" anchor="t">
+            <a:spAutoFit/>
           </a:bodyPr>
           <a:lstStyle/>
           <a:p>
-            <a:pPr marL="0" lvl="0" indent="0" algn="l" rtl="0">
-              <a:lnSpc>
-                <a:spcPct val="90000"/>
-              </a:lnSpc>
-              <a:spcBef>
-                <a:spcPts val="0"/>
-              </a:spcBef>
-              <a:spcAft>
-                <a:spcPts val="0"/>
-              </a:spcAft>
-              <a:buNone/>
+            <a:pPr>
+              <a:spcAft>
+                <a:spcPts val="225"/>
+              </a:spcAft>
             </a:pPr>
             <a:r>
-              <a:rPr lang="en" sz="9000">
-                <a:solidFill>
-                  <a:srgbClr val="F8F8F8"/>
-                </a:solidFill>
-                <a:latin typeface="Google Sans Flex Thin"/>
-                <a:ea typeface="Google Sans Flex Thin"/>
-                <a:cs typeface="Google Sans Flex Thin"/>
-                <a:sym typeface="Google Sans Flex Thin"/>
+              <a:rPr sz="975" b="1">
+                <a:solidFill>
+                  <a:srgbClr val="12343B"/>
+                </a:solidFill>
+                <a:latin typeface="Calibri"/>
               </a:rPr>
-              <a:t>(</a:t>
+              <a:t>Cascade Scout</a:t>
             </a:r>
-            <a:endParaRPr sz="9000">
-              <a:solidFill>
-                <a:srgbClr val="F8F8F8"/>
-              </a:solidFill>
-              <a:latin typeface="Google Sans Flex Thin"/>
-              <a:ea typeface="Google Sans Flex Thin"/>
-              <a:cs typeface="Google Sans Flex Thin"/>
-              <a:sym typeface="Google Sans Flex Thin"/>
-            </a:endParaRPr>
+          </a:p>
+        </p:txBody>
+      </p:sp>
+      <p:sp>
+        <p:nvSpPr>
+          <p:cNvPr id="18" name="TextBox 17"/>
+          <p:cNvSpPr txBox="1"/>
+          <p:nvPr/>
+        </p:nvSpPr>
+        <p:spPr>
+          <a:xfrm>
+            <a:off x="2804922" y="2036826"/>
+            <a:ext cx="1131570" cy="380873"/>
+          </a:xfrm>
+          <a:prstGeom prst="rect">
+            <a:avLst/>
+          </a:prstGeom>
+          <a:noFill/>
+        </p:spPr>
+        <p:txBody>
+          <a:bodyPr wrap="square" lIns="0" tIns="0" rIns="0" bIns="0" anchor="t">
+            <a:spAutoFit/>
+          </a:bodyPr>
+          <a:lstStyle/>
+          <a:p>
+            <a:pPr>
+              <a:spcAft>
+                <a:spcPts val="225"/>
+              </a:spcAft>
+            </a:pPr>
+            <a:r>
+              <a:rPr sz="825">
+                <a:solidFill>
+                  <a:srgbClr val="4A5A5D"/>
+                </a:solidFill>
+                <a:latin typeface="Calibri"/>
+              </a:rPr>
+              <a:t>Walks the graph: footfall forward, then supplies backward, 1 to 2 hops</a:t>
+            </a:r>
+          </a:p>
+        </p:txBody>
+      </p:sp>
+      <p:cxnSp>
+        <p:nvCxnSpPr>
+          <p:cNvPr id="19" name="Connector 18"/>
+          <p:cNvCxnSpPr/>
+          <p:nvPr/>
+        </p:nvCxnSpPr>
+        <p:spPr>
+          <a:xfrm>
+            <a:off x="4059936" y="1988820"/>
+            <a:ext cx="164592" cy="0"/>
+          </a:xfrm>
+          <a:prstGeom prst="line">
+            <a:avLst/>
+          </a:prstGeom>
+          <a:ln w="25400">
+            <a:solidFill>
+              <a:srgbClr val="1F6F6B"/>
+            </a:solidFill>
+            <a:tailEnd type="triangle" w="med" len="med"/>
+          </a:ln>
+        </p:spPr>
+        <p:style>
+          <a:lnRef idx="2">
+            <a:schemeClr val="accent1"/>
+          </a:lnRef>
+          <a:fillRef idx="0">
+            <a:schemeClr val="accent1"/>
+          </a:fillRef>
+          <a:effectRef idx="1">
+            <a:schemeClr val="accent1"/>
+          </a:effectRef>
+          <a:fontRef idx="minor">
+            <a:schemeClr val="tx1"/>
+          </a:fontRef>
+        </p:style>
+      </p:cxnSp>
+      <p:sp>
+        <p:nvSpPr>
+          <p:cNvPr id="20" name="Agent 2"/>
+          <p:cNvSpPr/>
+          <p:nvPr/>
+        </p:nvSpPr>
+        <p:spPr>
+          <a:xfrm>
+            <a:off x="4251960" y="1405889"/>
+            <a:ext cx="1323594" cy="1165860"/>
+          </a:xfrm>
+          <a:prstGeom prst="roundRect">
+            <a:avLst>
+              <a:gd name="adj" fmla="val 7058"/>
+            </a:avLst>
+          </a:prstGeom>
+          <a:solidFill>
+            <a:srgbClr val="FFFFFF"/>
+          </a:solidFill>
+          <a:ln w="12700">
+            <a:solidFill>
+              <a:srgbClr val="B8D4D0"/>
+            </a:solidFill>
+          </a:ln>
+          <a:effectLst/>
+        </p:spPr>
+        <p:style>
+          <a:lnRef idx="1">
+            <a:schemeClr val="accent1"/>
+          </a:lnRef>
+          <a:fillRef idx="3">
+            <a:schemeClr val="accent1"/>
+          </a:fillRef>
+          <a:effectRef idx="2">
+            <a:schemeClr val="accent1"/>
+          </a:effectRef>
+          <a:fontRef idx="minor">
+            <a:schemeClr val="lt1"/>
+          </a:fontRef>
+        </p:style>
+        <p:txBody>
+          <a:bodyPr rtlCol="0" anchor="ctr"/>
+          <a:lstStyle/>
+          <a:p>
+            <a:pPr algn="ctr"/>
+            <a:endParaRPr sz="1050"/>
+          </a:p>
+        </p:txBody>
+      </p:sp>
+      <p:sp>
+        <p:nvSpPr>
+          <p:cNvPr id="21" name="Oval 20"/>
+          <p:cNvSpPr/>
+          <p:nvPr/>
+        </p:nvSpPr>
+        <p:spPr>
+          <a:xfrm>
+            <a:off x="4347972" y="1501902"/>
+            <a:ext cx="246888" cy="246888"/>
+          </a:xfrm>
+          <a:prstGeom prst="ellipse">
+            <a:avLst/>
+          </a:prstGeom>
+          <a:solidFill>
+            <a:srgbClr val="1F6F6B"/>
+          </a:solidFill>
+          <a:ln>
+            <a:noFill/>
+          </a:ln>
+          <a:effectLst/>
+        </p:spPr>
+        <p:style>
+          <a:lnRef idx="1">
+            <a:schemeClr val="accent1"/>
+          </a:lnRef>
+          <a:fillRef idx="3">
+            <a:schemeClr val="accent1"/>
+          </a:fillRef>
+          <a:effectRef idx="2">
+            <a:schemeClr val="accent1"/>
+          </a:effectRef>
+          <a:fontRef idx="minor">
+            <a:schemeClr val="lt1"/>
+          </a:fontRef>
+        </p:style>
+        <p:txBody>
+          <a:bodyPr lIns="0" tIns="0" rIns="0" bIns="0" rtlCol="0" anchor="ctr"/>
+          <a:lstStyle/>
+          <a:p>
+            <a:pPr algn="ctr"/>
+            <a:r>
+              <a:rPr sz="975" b="1">
+                <a:solidFill>
+                  <a:srgbClr val="FFFFFF"/>
+                </a:solidFill>
+                <a:latin typeface="Calibri"/>
+              </a:rPr>
+              <a:t>2</a:t>
+            </a:r>
+          </a:p>
+        </p:txBody>
+      </p:sp>
+      <p:sp>
+        <p:nvSpPr>
+          <p:cNvPr id="22" name="TextBox 21"/>
+          <p:cNvSpPr txBox="1"/>
+          <p:nvPr/>
+        </p:nvSpPr>
+        <p:spPr>
+          <a:xfrm>
+            <a:off x="4347972" y="1817370"/>
+            <a:ext cx="1131570" cy="150041"/>
+          </a:xfrm>
+          <a:prstGeom prst="rect">
+            <a:avLst/>
+          </a:prstGeom>
+          <a:noFill/>
+        </p:spPr>
+        <p:txBody>
+          <a:bodyPr wrap="square" lIns="0" tIns="0" rIns="0" bIns="0" anchor="t">
+            <a:spAutoFit/>
+          </a:bodyPr>
+          <a:lstStyle/>
+          <a:p>
+            <a:pPr>
+              <a:spcAft>
+                <a:spcPts val="225"/>
+              </a:spcAft>
+            </a:pPr>
+            <a:r>
+              <a:rPr sz="975" b="1">
+                <a:solidFill>
+                  <a:srgbClr val="12343B"/>
+                </a:solidFill>
+                <a:latin typeface="Calibri"/>
+              </a:rPr>
+              <a:t>Risk Assessor</a:t>
+            </a:r>
+          </a:p>
+        </p:txBody>
+      </p:sp>
+      <p:sp>
+        <p:nvSpPr>
+          <p:cNvPr id="23" name="TextBox 22"/>
+          <p:cNvSpPr txBox="1"/>
+          <p:nvPr/>
+        </p:nvSpPr>
+        <p:spPr>
+          <a:xfrm>
+            <a:off x="4347972" y="2036826"/>
+            <a:ext cx="1131570" cy="380873"/>
+          </a:xfrm>
+          <a:prstGeom prst="rect">
+            <a:avLst/>
+          </a:prstGeom>
+          <a:noFill/>
+        </p:spPr>
+        <p:txBody>
+          <a:bodyPr wrap="square" lIns="0" tIns="0" rIns="0" bIns="0" anchor="t">
+            <a:spAutoFit/>
+          </a:bodyPr>
+          <a:lstStyle/>
+          <a:p>
+            <a:pPr>
+              <a:spcAft>
+                <a:spcPts val="225"/>
+              </a:spcAft>
+            </a:pPr>
+            <a:r>
+              <a:rPr sz="825">
+                <a:solidFill>
+                  <a:srgbClr val="4A5A5D"/>
+                </a:solidFill>
+                <a:latin typeface="Calibri"/>
+              </a:rPr>
+              <a:t>Scores exposure, fragility and tract need for each business</a:t>
+            </a:r>
+          </a:p>
+        </p:txBody>
+      </p:sp>
+      <p:cxnSp>
+        <p:nvCxnSpPr>
+          <p:cNvPr id="24" name="Connector 23"/>
+          <p:cNvCxnSpPr/>
+          <p:nvPr/>
+        </p:nvCxnSpPr>
+        <p:spPr>
+          <a:xfrm>
+            <a:off x="5602986" y="1988820"/>
+            <a:ext cx="164592" cy="0"/>
+          </a:xfrm>
+          <a:prstGeom prst="line">
+            <a:avLst/>
+          </a:prstGeom>
+          <a:ln w="25400">
+            <a:solidFill>
+              <a:srgbClr val="1F6F6B"/>
+            </a:solidFill>
+            <a:tailEnd type="triangle" w="med" len="med"/>
+          </a:ln>
+        </p:spPr>
+        <p:style>
+          <a:lnRef idx="2">
+            <a:schemeClr val="accent1"/>
+          </a:lnRef>
+          <a:fillRef idx="0">
+            <a:schemeClr val="accent1"/>
+          </a:fillRef>
+          <a:effectRef idx="1">
+            <a:schemeClr val="accent1"/>
+          </a:effectRef>
+          <a:fontRef idx="minor">
+            <a:schemeClr val="tx1"/>
+          </a:fontRef>
+        </p:style>
+      </p:cxnSp>
+      <p:sp>
+        <p:nvSpPr>
+          <p:cNvPr id="25" name="Agent 3"/>
+          <p:cNvSpPr/>
+          <p:nvPr/>
+        </p:nvSpPr>
+        <p:spPr>
+          <a:xfrm>
+            <a:off x="5795009" y="1405889"/>
+            <a:ext cx="1323594" cy="1165860"/>
+          </a:xfrm>
+          <a:prstGeom prst="roundRect">
+            <a:avLst>
+              <a:gd name="adj" fmla="val 7058"/>
+            </a:avLst>
+          </a:prstGeom>
+          <a:solidFill>
+            <a:srgbClr val="FFFFFF"/>
+          </a:solidFill>
+          <a:ln w="12700">
+            <a:solidFill>
+              <a:srgbClr val="B8D4D0"/>
+            </a:solidFill>
+          </a:ln>
+          <a:effectLst/>
+        </p:spPr>
+        <p:style>
+          <a:lnRef idx="1">
+            <a:schemeClr val="accent1"/>
+          </a:lnRef>
+          <a:fillRef idx="3">
+            <a:schemeClr val="accent1"/>
+          </a:fillRef>
+          <a:effectRef idx="2">
+            <a:schemeClr val="accent1"/>
+          </a:effectRef>
+          <a:fontRef idx="minor">
+            <a:schemeClr val="lt1"/>
+          </a:fontRef>
+        </p:style>
+        <p:txBody>
+          <a:bodyPr rtlCol="0" anchor="ctr"/>
+          <a:lstStyle/>
+          <a:p>
+            <a:pPr algn="ctr"/>
+            <a:endParaRPr sz="1050"/>
+          </a:p>
+        </p:txBody>
+      </p:sp>
+      <p:sp>
+        <p:nvSpPr>
+          <p:cNvPr id="26" name="Oval 25"/>
+          <p:cNvSpPr/>
+          <p:nvPr/>
+        </p:nvSpPr>
+        <p:spPr>
+          <a:xfrm>
+            <a:off x="5891022" y="1501902"/>
+            <a:ext cx="246888" cy="246888"/>
+          </a:xfrm>
+          <a:prstGeom prst="ellipse">
+            <a:avLst/>
+          </a:prstGeom>
+          <a:solidFill>
+            <a:srgbClr val="C27C00"/>
+          </a:solidFill>
+          <a:ln>
+            <a:noFill/>
+          </a:ln>
+          <a:effectLst/>
+        </p:spPr>
+        <p:style>
+          <a:lnRef idx="1">
+            <a:schemeClr val="accent1"/>
+          </a:lnRef>
+          <a:fillRef idx="3">
+            <a:schemeClr val="accent1"/>
+          </a:fillRef>
+          <a:effectRef idx="2">
+            <a:schemeClr val="accent1"/>
+          </a:effectRef>
+          <a:fontRef idx="minor">
+            <a:schemeClr val="lt1"/>
+          </a:fontRef>
+        </p:style>
+        <p:txBody>
+          <a:bodyPr lIns="0" tIns="0" rIns="0" bIns="0" rtlCol="0" anchor="ctr"/>
+          <a:lstStyle/>
+          <a:p>
+            <a:pPr algn="ctr"/>
+            <a:r>
+              <a:rPr sz="975" b="1">
+                <a:solidFill>
+                  <a:srgbClr val="FFFFFF"/>
+                </a:solidFill>
+                <a:latin typeface="Calibri"/>
+              </a:rPr>
+              <a:t>3</a:t>
+            </a:r>
+          </a:p>
+        </p:txBody>
+      </p:sp>
+      <p:sp>
+        <p:nvSpPr>
+          <p:cNvPr id="27" name="TextBox 26"/>
+          <p:cNvSpPr txBox="1"/>
+          <p:nvPr/>
+        </p:nvSpPr>
+        <p:spPr>
+          <a:xfrm>
+            <a:off x="5891022" y="1817370"/>
+            <a:ext cx="1131570" cy="150041"/>
+          </a:xfrm>
+          <a:prstGeom prst="rect">
+            <a:avLst/>
+          </a:prstGeom>
+          <a:noFill/>
+        </p:spPr>
+        <p:txBody>
+          <a:bodyPr wrap="square" lIns="0" tIns="0" rIns="0" bIns="0" anchor="t">
+            <a:spAutoFit/>
+          </a:bodyPr>
+          <a:lstStyle/>
+          <a:p>
+            <a:pPr>
+              <a:spcAft>
+                <a:spcPts val="225"/>
+              </a:spcAft>
+            </a:pPr>
+            <a:r>
+              <a:rPr sz="975" b="1">
+                <a:solidFill>
+                  <a:srgbClr val="12343B"/>
+                </a:solidFill>
+                <a:latin typeface="Calibri"/>
+              </a:rPr>
+              <a:t>Grant Allocator</a:t>
+            </a:r>
+          </a:p>
+        </p:txBody>
+      </p:sp>
+      <p:sp>
+        <p:nvSpPr>
+          <p:cNvPr id="28" name="TextBox 27"/>
+          <p:cNvSpPr txBox="1"/>
+          <p:nvPr/>
+        </p:nvSpPr>
+        <p:spPr>
+          <a:xfrm>
+            <a:off x="5891022" y="2036826"/>
+            <a:ext cx="1131570" cy="380873"/>
+          </a:xfrm>
+          <a:prstGeom prst="rect">
+            <a:avLst/>
+          </a:prstGeom>
+          <a:noFill/>
+        </p:spPr>
+        <p:txBody>
+          <a:bodyPr wrap="square" lIns="0" tIns="0" rIns="0" bIns="0" anchor="t">
+            <a:spAutoFit/>
+          </a:bodyPr>
+          <a:lstStyle/>
+          <a:p>
+            <a:pPr>
+              <a:spcAft>
+                <a:spcPts val="225"/>
+              </a:spcAft>
+            </a:pPr>
+            <a:r>
+              <a:rPr sz="825">
+                <a:solidFill>
+                  <a:srgbClr val="4A5A5D"/>
+                </a:solidFill>
+                <a:latin typeface="Calibri"/>
+              </a:rPr>
+              <a:t>Splits the budget, names the runner-up, tests the assumption</a:t>
+            </a:r>
+          </a:p>
+        </p:txBody>
+      </p:sp>
+      <p:cxnSp>
+        <p:nvCxnSpPr>
+          <p:cNvPr id="29" name="Connector 28"/>
+          <p:cNvCxnSpPr/>
+          <p:nvPr/>
+        </p:nvCxnSpPr>
+        <p:spPr>
+          <a:xfrm>
+            <a:off x="7146036" y="1988820"/>
+            <a:ext cx="164593" cy="0"/>
+          </a:xfrm>
+          <a:prstGeom prst="line">
+            <a:avLst/>
+          </a:prstGeom>
+          <a:ln w="25400">
+            <a:solidFill>
+              <a:srgbClr val="1F6F6B"/>
+            </a:solidFill>
+            <a:tailEnd type="triangle" w="med" len="med"/>
+          </a:ln>
+        </p:spPr>
+        <p:style>
+          <a:lnRef idx="2">
+            <a:schemeClr val="accent1"/>
+          </a:lnRef>
+          <a:fillRef idx="0">
+            <a:schemeClr val="accent1"/>
+          </a:fillRef>
+          <a:effectRef idx="1">
+            <a:schemeClr val="accent1"/>
+          </a:effectRef>
+          <a:fontRef idx="minor">
+            <a:schemeClr val="tx1"/>
+          </a:fontRef>
+        </p:style>
+      </p:cxnSp>
+      <p:sp>
+        <p:nvSpPr>
+          <p:cNvPr id="30" name="Agent 4"/>
+          <p:cNvSpPr/>
+          <p:nvPr/>
+        </p:nvSpPr>
+        <p:spPr>
+          <a:xfrm>
+            <a:off x="7338060" y="1405889"/>
+            <a:ext cx="1323594" cy="1165860"/>
+          </a:xfrm>
+          <a:prstGeom prst="roundRect">
+            <a:avLst>
+              <a:gd name="adj" fmla="val 7058"/>
+            </a:avLst>
+          </a:prstGeom>
+          <a:solidFill>
+            <a:srgbClr val="FFFFFF"/>
+          </a:solidFill>
+          <a:ln w="12700">
+            <a:solidFill>
+              <a:srgbClr val="B8D4D0"/>
+            </a:solidFill>
+          </a:ln>
+          <a:effectLst/>
+        </p:spPr>
+        <p:style>
+          <a:lnRef idx="1">
+            <a:schemeClr val="accent1"/>
+          </a:lnRef>
+          <a:fillRef idx="3">
+            <a:schemeClr val="accent1"/>
+          </a:fillRef>
+          <a:effectRef idx="2">
+            <a:schemeClr val="accent1"/>
+          </a:effectRef>
+          <a:fontRef idx="minor">
+            <a:schemeClr val="lt1"/>
+          </a:fontRef>
+        </p:style>
+        <p:txBody>
+          <a:bodyPr rtlCol="0" anchor="ctr"/>
+          <a:lstStyle/>
+          <a:p>
+            <a:pPr algn="ctr"/>
+            <a:endParaRPr sz="1050"/>
+          </a:p>
+        </p:txBody>
+      </p:sp>
+      <p:sp>
+        <p:nvSpPr>
+          <p:cNvPr id="31" name="Oval 30"/>
+          <p:cNvSpPr/>
+          <p:nvPr/>
+        </p:nvSpPr>
+        <p:spPr>
+          <a:xfrm>
+            <a:off x="7434072" y="1501902"/>
+            <a:ext cx="246888" cy="246888"/>
+          </a:xfrm>
+          <a:prstGeom prst="ellipse">
+            <a:avLst/>
+          </a:prstGeom>
+          <a:solidFill>
+            <a:srgbClr val="1F6F6B"/>
+          </a:solidFill>
+          <a:ln>
+            <a:noFill/>
+          </a:ln>
+          <a:effectLst/>
+        </p:spPr>
+        <p:style>
+          <a:lnRef idx="1">
+            <a:schemeClr val="accent1"/>
+          </a:lnRef>
+          <a:fillRef idx="3">
+            <a:schemeClr val="accent1"/>
+          </a:fillRef>
+          <a:effectRef idx="2">
+            <a:schemeClr val="accent1"/>
+          </a:effectRef>
+          <a:fontRef idx="minor">
+            <a:schemeClr val="lt1"/>
+          </a:fontRef>
+        </p:style>
+        <p:txBody>
+          <a:bodyPr lIns="0" tIns="0" rIns="0" bIns="0" rtlCol="0" anchor="ctr"/>
+          <a:lstStyle/>
+          <a:p>
+            <a:pPr algn="ctr"/>
+            <a:r>
+              <a:rPr sz="975" b="1">
+                <a:solidFill>
+                  <a:srgbClr val="FFFFFF"/>
+                </a:solidFill>
+                <a:latin typeface="Calibri"/>
+              </a:rPr>
+              <a:t>4</a:t>
+            </a:r>
+          </a:p>
+        </p:txBody>
+      </p:sp>
+      <p:sp>
+        <p:nvSpPr>
+          <p:cNvPr id="32" name="TextBox 31"/>
+          <p:cNvSpPr txBox="1"/>
+          <p:nvPr/>
+        </p:nvSpPr>
+        <p:spPr>
+          <a:xfrm>
+            <a:off x="7434072" y="1817370"/>
+            <a:ext cx="1131570" cy="150041"/>
+          </a:xfrm>
+          <a:prstGeom prst="rect">
+            <a:avLst/>
+          </a:prstGeom>
+          <a:noFill/>
+        </p:spPr>
+        <p:txBody>
+          <a:bodyPr wrap="square" lIns="0" tIns="0" rIns="0" bIns="0" anchor="t">
+            <a:spAutoFit/>
+          </a:bodyPr>
+          <a:lstStyle/>
+          <a:p>
+            <a:pPr>
+              <a:spcAft>
+                <a:spcPts val="225"/>
+              </a:spcAft>
+            </a:pPr>
+            <a:r>
+              <a:rPr sz="975" b="1">
+                <a:solidFill>
+                  <a:srgbClr val="12343B"/>
+                </a:solidFill>
+                <a:latin typeface="Calibri"/>
+              </a:rPr>
+              <a:t>Memo Writer</a:t>
+            </a:r>
+          </a:p>
+        </p:txBody>
+      </p:sp>
+      <p:sp>
+        <p:nvSpPr>
+          <p:cNvPr id="33" name="TextBox 32"/>
+          <p:cNvSpPr txBox="1"/>
+          <p:nvPr/>
+        </p:nvSpPr>
+        <p:spPr>
+          <a:xfrm>
+            <a:off x="7434072" y="2036826"/>
+            <a:ext cx="1131570" cy="253916"/>
+          </a:xfrm>
+          <a:prstGeom prst="rect">
+            <a:avLst/>
+          </a:prstGeom>
+          <a:noFill/>
+        </p:spPr>
+        <p:txBody>
+          <a:bodyPr wrap="square" lIns="0" tIns="0" rIns="0" bIns="0" anchor="t">
+            <a:spAutoFit/>
+          </a:bodyPr>
+          <a:lstStyle/>
+          <a:p>
+            <a:pPr>
+              <a:spcAft>
+                <a:spcPts val="225"/>
+              </a:spcAft>
+            </a:pPr>
+            <a:r>
+              <a:rPr sz="825">
+                <a:solidFill>
+                  <a:srgbClr val="4A5A5D"/>
+                </a:solidFill>
+                <a:latin typeface="Calibri"/>
+              </a:rPr>
+              <a:t>Writes every justification and the grant memo</a:t>
+            </a:r>
+          </a:p>
+        </p:txBody>
+      </p:sp>
+      <p:sp>
+        <p:nvSpPr>
+          <p:cNvPr id="34" name="Session state"/>
+          <p:cNvSpPr/>
+          <p:nvPr/>
+        </p:nvSpPr>
+        <p:spPr>
+          <a:xfrm>
+            <a:off x="2708910" y="2647188"/>
+            <a:ext cx="5952744" cy="274320"/>
+          </a:xfrm>
+          <a:prstGeom prst="roundRect">
+            <a:avLst>
+              <a:gd name="adj" fmla="val 12000"/>
+            </a:avLst>
+          </a:prstGeom>
+          <a:solidFill>
+            <a:srgbClr val="FFFFFF"/>
+          </a:solidFill>
+          <a:ln w="12700">
+            <a:solidFill>
+              <a:srgbClr val="B8D4D0"/>
+            </a:solidFill>
+          </a:ln>
+          <a:effectLst/>
+        </p:spPr>
+        <p:style>
+          <a:lnRef idx="1">
+            <a:schemeClr val="accent1"/>
+          </a:lnRef>
+          <a:fillRef idx="3">
+            <a:schemeClr val="accent1"/>
+          </a:fillRef>
+          <a:effectRef idx="2">
+            <a:schemeClr val="accent1"/>
+          </a:effectRef>
+          <a:fontRef idx="minor">
+            <a:schemeClr val="lt1"/>
+          </a:fontRef>
+        </p:style>
+        <p:txBody>
+          <a:bodyPr rtlCol="0" anchor="ctr"/>
+          <a:lstStyle/>
+          <a:p>
+            <a:pPr algn="ctr"/>
+            <a:endParaRPr sz="1050"/>
+          </a:p>
+        </p:txBody>
+      </p:sp>
+      <p:sp>
+        <p:nvSpPr>
+          <p:cNvPr id="35" name="TextBox 34"/>
+          <p:cNvSpPr txBox="1"/>
+          <p:nvPr/>
+        </p:nvSpPr>
+        <p:spPr>
+          <a:xfrm>
+            <a:off x="2811780" y="2720870"/>
+            <a:ext cx="5747004" cy="126958"/>
+          </a:xfrm>
+          <a:prstGeom prst="rect">
+            <a:avLst/>
+          </a:prstGeom>
+          <a:noFill/>
+        </p:spPr>
+        <p:txBody>
+          <a:bodyPr wrap="square" lIns="0" tIns="0" rIns="0" bIns="0" anchor="ctr">
+            <a:spAutoFit/>
+          </a:bodyPr>
+          <a:lstStyle/>
+          <a:p>
+            <a:pPr>
+              <a:spcAft>
+                <a:spcPts val="225"/>
+              </a:spcAft>
+            </a:pPr>
+            <a:r>
+              <a:rPr sz="825" b="1">
+                <a:solidFill>
+                  <a:srgbClr val="1F6F6B"/>
+                </a:solidFill>
+                <a:latin typeface="Calibri"/>
+              </a:rPr>
+              <a:t>Shared session.state   </a:t>
+            </a:r>
+            <a:r>
+              <a:rPr sz="825">
+                <a:solidFill>
+                  <a:srgbClr val="12343B"/>
+                </a:solidFill>
+                <a:latin typeface="Calibri"/>
+              </a:rPr>
+              <a:t>cascade  →  risk  →  allocation  →  decisions</a:t>
+            </a:r>
+          </a:p>
+        </p:txBody>
+      </p:sp>
+      <p:sp>
+        <p:nvSpPr>
+          <p:cNvPr id="36" name="MCP Toolbox"/>
+          <p:cNvSpPr/>
+          <p:nvPr/>
+        </p:nvSpPr>
+        <p:spPr>
+          <a:xfrm>
+            <a:off x="2708911" y="3326130"/>
+            <a:ext cx="2866643" cy="720090"/>
+          </a:xfrm>
+          <a:prstGeom prst="roundRect">
+            <a:avLst>
+              <a:gd name="adj" fmla="val 11428"/>
+            </a:avLst>
+          </a:prstGeom>
+          <a:solidFill>
+            <a:srgbClr val="FFFFFF"/>
+          </a:solidFill>
+          <a:ln w="19050">
+            <a:solidFill>
+              <a:srgbClr val="1F6F6B"/>
+            </a:solidFill>
+          </a:ln>
+          <a:effectLst/>
+        </p:spPr>
+        <p:style>
+          <a:lnRef idx="1">
+            <a:schemeClr val="accent1"/>
+          </a:lnRef>
+          <a:fillRef idx="3">
+            <a:schemeClr val="accent1"/>
+          </a:fillRef>
+          <a:effectRef idx="2">
+            <a:schemeClr val="accent1"/>
+          </a:effectRef>
+          <a:fontRef idx="minor">
+            <a:schemeClr val="lt1"/>
+          </a:fontRef>
+        </p:style>
+        <p:txBody>
+          <a:bodyPr rtlCol="0" anchor="ctr"/>
+          <a:lstStyle/>
+          <a:p>
+            <a:pPr algn="ctr"/>
+            <a:endParaRPr sz="1050"/>
+          </a:p>
+        </p:txBody>
+      </p:sp>
+      <p:sp>
+        <p:nvSpPr>
+          <p:cNvPr id="37" name="TextBox 36"/>
+          <p:cNvSpPr txBox="1"/>
+          <p:nvPr/>
+        </p:nvSpPr>
+        <p:spPr>
+          <a:xfrm>
+            <a:off x="2832354" y="3394710"/>
+            <a:ext cx="2619756" cy="429605"/>
+          </a:xfrm>
+          <a:prstGeom prst="rect">
+            <a:avLst/>
+          </a:prstGeom>
+          <a:noFill/>
+        </p:spPr>
+        <p:txBody>
+          <a:bodyPr wrap="square" lIns="0" tIns="0" rIns="0" bIns="0" anchor="t">
+            <a:spAutoFit/>
+          </a:bodyPr>
+          <a:lstStyle/>
+          <a:p>
+            <a:pPr>
+              <a:spcAft>
+                <a:spcPts val="225"/>
+              </a:spcAft>
+            </a:pPr>
+            <a:r>
+              <a:rPr sz="975" b="1">
+                <a:solidFill>
+                  <a:srgbClr val="12343B"/>
+                </a:solidFill>
+                <a:latin typeface="Calibri"/>
+              </a:rPr>
+              <a:t>MCP Toolbox for Databases </a:t>
+            </a:r>
+            <a:r>
+              <a:rPr sz="825">
+                <a:solidFill>
+                  <a:srgbClr val="1F6F6B"/>
+                </a:solidFill>
+                <a:latin typeface="Calibri"/>
+              </a:rPr>
+              <a:t>· Cloud Run</a:t>
+            </a:r>
+          </a:p>
+          <a:p>
+            <a:pPr>
+              <a:spcAft>
+                <a:spcPts val="225"/>
+              </a:spcAft>
+            </a:pPr>
+            <a:r>
+              <a:rPr sz="825">
+                <a:solidFill>
+                  <a:srgbClr val="4A5A5D"/>
+                </a:solidFill>
+                <a:latin typeface="Calibri"/>
+              </a:rPr>
+              <a:t>anchor_cascade (GQL) · supply_cascade · business_profile · tract_profile · loan_history</a:t>
+            </a:r>
+          </a:p>
+        </p:txBody>
+      </p:sp>
+      <p:sp>
+        <p:nvSpPr>
+          <p:cNvPr id="38" name="Python tools"/>
+          <p:cNvSpPr/>
+          <p:nvPr/>
+        </p:nvSpPr>
+        <p:spPr>
+          <a:xfrm>
+            <a:off x="5795010" y="3326130"/>
+            <a:ext cx="2866643" cy="720090"/>
+          </a:xfrm>
+          <a:prstGeom prst="roundRect">
+            <a:avLst>
+              <a:gd name="adj" fmla="val 11428"/>
+            </a:avLst>
+          </a:prstGeom>
+          <a:solidFill>
+            <a:srgbClr val="FFFFFF"/>
+          </a:solidFill>
+          <a:ln w="19050">
+            <a:solidFill>
+              <a:srgbClr val="C27C00"/>
+            </a:solidFill>
+          </a:ln>
+          <a:effectLst/>
+        </p:spPr>
+        <p:style>
+          <a:lnRef idx="1">
+            <a:schemeClr val="accent1"/>
+          </a:lnRef>
+          <a:fillRef idx="3">
+            <a:schemeClr val="accent1"/>
+          </a:fillRef>
+          <a:effectRef idx="2">
+            <a:schemeClr val="accent1"/>
+          </a:effectRef>
+          <a:fontRef idx="minor">
+            <a:schemeClr val="lt1"/>
+          </a:fontRef>
+        </p:style>
+        <p:txBody>
+          <a:bodyPr rtlCol="0" anchor="ctr"/>
+          <a:lstStyle/>
+          <a:p>
+            <a:pPr algn="ctr"/>
+            <a:endParaRPr sz="1050"/>
+          </a:p>
+        </p:txBody>
+      </p:sp>
+      <p:sp>
+        <p:nvSpPr>
+          <p:cNvPr id="39" name="TextBox 38"/>
+          <p:cNvSpPr txBox="1"/>
+          <p:nvPr/>
+        </p:nvSpPr>
+        <p:spPr>
+          <a:xfrm>
+            <a:off x="5918453" y="3394710"/>
+            <a:ext cx="2619756" cy="429605"/>
+          </a:xfrm>
+          <a:prstGeom prst="rect">
+            <a:avLst/>
+          </a:prstGeom>
+          <a:noFill/>
+        </p:spPr>
+        <p:txBody>
+          <a:bodyPr wrap="square" lIns="0" tIns="0" rIns="0" bIns="0" anchor="t">
+            <a:spAutoFit/>
+          </a:bodyPr>
+          <a:lstStyle/>
+          <a:p>
+            <a:pPr>
+              <a:spcAft>
+                <a:spcPts val="225"/>
+              </a:spcAft>
+            </a:pPr>
+            <a:r>
+              <a:rPr sz="975" b="1">
+                <a:solidFill>
+                  <a:srgbClr val="12343B"/>
+                </a:solidFill>
+                <a:latin typeface="Calibri"/>
+              </a:rPr>
+              <a:t>Custom Python tools </a:t>
+            </a:r>
+            <a:r>
+              <a:rPr sz="825">
+                <a:solidFill>
+                  <a:srgbClr val="C27C00"/>
+                </a:solidFill>
+                <a:latin typeface="Calibri"/>
+              </a:rPr>
+              <a:t>· ADK FunctionTool</a:t>
+            </a:r>
+          </a:p>
+          <a:p>
+            <a:pPr>
+              <a:spcAft>
+                <a:spcPts val="225"/>
+              </a:spcAft>
+            </a:pPr>
+            <a:r>
+              <a:rPr sz="825">
+                <a:solidFill>
+                  <a:srgbClr val="4A5A5D"/>
+                </a:solidFill>
+                <a:latin typeface="Calibri"/>
+              </a:rPr>
+              <a:t>score_exposure · fragility · allocate_budget · sensitivity · equity_audit · build_memo</a:t>
+            </a:r>
+          </a:p>
+        </p:txBody>
+      </p:sp>
+      <p:cxnSp>
+        <p:nvCxnSpPr>
+          <p:cNvPr id="40" name="Connector 39"/>
+          <p:cNvCxnSpPr/>
+          <p:nvPr/>
+        </p:nvCxnSpPr>
+        <p:spPr>
+          <a:xfrm>
+            <a:off x="3370707" y="3051810"/>
+            <a:ext cx="0" cy="274320"/>
+          </a:xfrm>
+          <a:prstGeom prst="line">
+            <a:avLst/>
+          </a:prstGeom>
+          <a:ln w="22225">
+            <a:solidFill>
+              <a:srgbClr val="1F6F6B"/>
+            </a:solidFill>
+            <a:prstDash val="dash"/>
+            <a:tailEnd type="triangle" w="med" len="med"/>
+          </a:ln>
+        </p:spPr>
+        <p:style>
+          <a:lnRef idx="2">
+            <a:schemeClr val="accent1"/>
+          </a:lnRef>
+          <a:fillRef idx="0">
+            <a:schemeClr val="accent1"/>
+          </a:fillRef>
+          <a:effectRef idx="1">
+            <a:schemeClr val="accent1"/>
+          </a:effectRef>
+          <a:fontRef idx="minor">
+            <a:schemeClr val="tx1"/>
+          </a:fontRef>
+        </p:style>
+      </p:cxnSp>
+      <p:cxnSp>
+        <p:nvCxnSpPr>
+          <p:cNvPr id="41" name="Connector 40"/>
+          <p:cNvCxnSpPr/>
+          <p:nvPr/>
+        </p:nvCxnSpPr>
+        <p:spPr>
+          <a:xfrm>
+            <a:off x="4913757" y="3051810"/>
+            <a:ext cx="0" cy="274320"/>
+          </a:xfrm>
+          <a:prstGeom prst="line">
+            <a:avLst/>
+          </a:prstGeom>
+          <a:ln w="22225">
+            <a:solidFill>
+              <a:srgbClr val="1F6F6B"/>
+            </a:solidFill>
+            <a:prstDash val="dash"/>
+            <a:tailEnd type="triangle" w="med" len="med"/>
+          </a:ln>
+        </p:spPr>
+        <p:style>
+          <a:lnRef idx="2">
+            <a:schemeClr val="accent1"/>
+          </a:lnRef>
+          <a:fillRef idx="0">
+            <a:schemeClr val="accent1"/>
+          </a:fillRef>
+          <a:effectRef idx="1">
+            <a:schemeClr val="accent1"/>
+          </a:effectRef>
+          <a:fontRef idx="minor">
+            <a:schemeClr val="tx1"/>
+          </a:fontRef>
+        </p:style>
+      </p:cxnSp>
+      <p:cxnSp>
+        <p:nvCxnSpPr>
+          <p:cNvPr id="42" name="Connector 41"/>
+          <p:cNvCxnSpPr/>
+          <p:nvPr/>
+        </p:nvCxnSpPr>
+        <p:spPr>
+          <a:xfrm>
+            <a:off x="6456807" y="3051810"/>
+            <a:ext cx="0" cy="274320"/>
+          </a:xfrm>
+          <a:prstGeom prst="line">
+            <a:avLst/>
+          </a:prstGeom>
+          <a:ln w="22225">
+            <a:solidFill>
+              <a:srgbClr val="C27C00"/>
+            </a:solidFill>
+            <a:prstDash val="sysDot"/>
+            <a:tailEnd type="triangle" w="med" len="med"/>
+          </a:ln>
+        </p:spPr>
+        <p:style>
+          <a:lnRef idx="2">
+            <a:schemeClr val="accent1"/>
+          </a:lnRef>
+          <a:fillRef idx="0">
+            <a:schemeClr val="accent1"/>
+          </a:fillRef>
+          <a:effectRef idx="1">
+            <a:schemeClr val="accent1"/>
+          </a:effectRef>
+          <a:fontRef idx="minor">
+            <a:schemeClr val="tx1"/>
+          </a:fontRef>
+        </p:style>
+      </p:cxnSp>
+      <p:cxnSp>
+        <p:nvCxnSpPr>
+          <p:cNvPr id="43" name="Connector 42"/>
+          <p:cNvCxnSpPr/>
+          <p:nvPr/>
+        </p:nvCxnSpPr>
+        <p:spPr>
+          <a:xfrm>
+            <a:off x="7999857" y="3051810"/>
+            <a:ext cx="0" cy="274320"/>
+          </a:xfrm>
+          <a:prstGeom prst="line">
+            <a:avLst/>
+          </a:prstGeom>
+          <a:ln w="22225">
+            <a:solidFill>
+              <a:srgbClr val="C27C00"/>
+            </a:solidFill>
+            <a:prstDash val="sysDot"/>
+            <a:tailEnd type="triangle" w="med" len="med"/>
+          </a:ln>
+        </p:spPr>
+        <p:style>
+          <a:lnRef idx="2">
+            <a:schemeClr val="accent1"/>
+          </a:lnRef>
+          <a:fillRef idx="0">
+            <a:schemeClr val="accent1"/>
+          </a:fillRef>
+          <a:effectRef idx="1">
+            <a:schemeClr val="accent1"/>
+          </a:effectRef>
+          <a:fontRef idx="minor">
+            <a:schemeClr val="tx1"/>
+          </a:fontRef>
+        </p:style>
+      </p:cxnSp>
+      <p:sp>
+        <p:nvSpPr>
+          <p:cNvPr id="44" name="BigQuery"/>
+          <p:cNvSpPr/>
+          <p:nvPr/>
+        </p:nvSpPr>
+        <p:spPr>
+          <a:xfrm>
+            <a:off x="2708910" y="4286250"/>
+            <a:ext cx="5952744" cy="534924"/>
+          </a:xfrm>
+          <a:prstGeom prst="roundRect">
+            <a:avLst>
+              <a:gd name="adj" fmla="val 12000"/>
+            </a:avLst>
+          </a:prstGeom>
+          <a:solidFill>
+            <a:srgbClr val="12343B"/>
+          </a:solidFill>
+          <a:ln>
+            <a:noFill/>
+          </a:ln>
+          <a:effectLst/>
+        </p:spPr>
+        <p:style>
+          <a:lnRef idx="1">
+            <a:schemeClr val="accent1"/>
+          </a:lnRef>
+          <a:fillRef idx="3">
+            <a:schemeClr val="accent1"/>
+          </a:fillRef>
+          <a:effectRef idx="2">
+            <a:schemeClr val="accent1"/>
+          </a:effectRef>
+          <a:fontRef idx="minor">
+            <a:schemeClr val="lt1"/>
+          </a:fontRef>
+        </p:style>
+        <p:txBody>
+          <a:bodyPr rtlCol="0" anchor="ctr"/>
+          <a:lstStyle/>
+          <a:p>
+            <a:pPr algn="ctr"/>
+            <a:endParaRPr sz="1050"/>
+          </a:p>
+        </p:txBody>
+      </p:sp>
+      <p:sp>
+        <p:nvSpPr>
+          <p:cNvPr id="45" name="TextBox 44"/>
+          <p:cNvSpPr txBox="1"/>
+          <p:nvPr/>
+        </p:nvSpPr>
+        <p:spPr>
+          <a:xfrm>
+            <a:off x="2846071" y="4416105"/>
+            <a:ext cx="5678423" cy="302647"/>
+          </a:xfrm>
+          <a:prstGeom prst="rect">
+            <a:avLst/>
+          </a:prstGeom>
+          <a:noFill/>
+        </p:spPr>
+        <p:txBody>
+          <a:bodyPr wrap="square" lIns="0" tIns="0" rIns="0" bIns="0" anchor="ctr">
+            <a:spAutoFit/>
+          </a:bodyPr>
+          <a:lstStyle/>
+          <a:p>
+            <a:pPr>
+              <a:spcAft>
+                <a:spcPts val="225"/>
+              </a:spcAft>
+            </a:pPr>
+            <a:r>
+              <a:rPr sz="975" b="1">
+                <a:solidFill>
+                  <a:srgbClr val="FFFFFF"/>
+                </a:solidFill>
+                <a:latin typeface="Calibri"/>
+              </a:rPr>
+              <a:t>BigQuery </a:t>
+            </a:r>
+            <a:r>
+              <a:rPr sz="825">
+                <a:solidFill>
+                  <a:srgbClr val="B8D4D0"/>
+                </a:solidFill>
+                <a:latin typeface="Calibri"/>
+              </a:rPr>
+              <a:t>· a4i_econ · property graph LocalEconomy, queried with GQL · Enterprise reservation</a:t>
+            </a:r>
+          </a:p>
+          <a:p>
+            <a:pPr>
+              <a:spcAft>
+                <a:spcPts val="225"/>
+              </a:spcAft>
+            </a:pPr>
+            <a:r>
+              <a:rPr sz="825">
+                <a:solidFill>
+                  <a:srgbClr val="FFFFFF"/>
+                </a:solidFill>
+                <a:latin typeface="Calibri"/>
+              </a:rPr>
+              <a:t>businesses · employer_blocks · supplies · draws_footfall_from · borrowed_from · tract_demographics</a:t>
+            </a:r>
+          </a:p>
+        </p:txBody>
+      </p:sp>
+      <p:cxnSp>
+        <p:nvCxnSpPr>
+          <p:cNvPr id="46" name="Connector 45"/>
+          <p:cNvCxnSpPr/>
+          <p:nvPr/>
+        </p:nvCxnSpPr>
+        <p:spPr>
+          <a:xfrm>
+            <a:off x="4142232" y="4046220"/>
+            <a:ext cx="0" cy="240031"/>
+          </a:xfrm>
+          <a:prstGeom prst="line">
+            <a:avLst/>
+          </a:prstGeom>
+          <a:ln w="22225">
+            <a:solidFill>
+              <a:srgbClr val="1F6F6B"/>
+            </a:solidFill>
+            <a:prstDash val="dash"/>
+            <a:tailEnd type="triangle" w="med" len="med"/>
+          </a:ln>
+        </p:spPr>
+        <p:style>
+          <a:lnRef idx="2">
+            <a:schemeClr val="accent1"/>
+          </a:lnRef>
+          <a:fillRef idx="0">
+            <a:schemeClr val="accent1"/>
+          </a:fillRef>
+          <a:effectRef idx="1">
+            <a:schemeClr val="accent1"/>
+          </a:effectRef>
+          <a:fontRef idx="minor">
+            <a:schemeClr val="tx1"/>
+          </a:fontRef>
+        </p:style>
+      </p:cxnSp>
+      <p:sp>
+        <p:nvSpPr>
+          <p:cNvPr id="47" name="Legend"/>
+          <p:cNvSpPr/>
+          <p:nvPr/>
+        </p:nvSpPr>
+        <p:spPr>
+          <a:xfrm>
+            <a:off x="342900" y="3566160"/>
+            <a:ext cx="1577340" cy="1255014"/>
+          </a:xfrm>
+          <a:prstGeom prst="roundRect">
+            <a:avLst>
+              <a:gd name="adj" fmla="val 6557"/>
+            </a:avLst>
+          </a:prstGeom>
+          <a:solidFill>
+            <a:srgbClr val="FFFFFF"/>
+          </a:solidFill>
+          <a:ln w="12700">
+            <a:solidFill>
+              <a:srgbClr val="B8D4D0"/>
+            </a:solidFill>
+          </a:ln>
+          <a:effectLst/>
+        </p:spPr>
+        <p:style>
+          <a:lnRef idx="1">
+            <a:schemeClr val="accent1"/>
+          </a:lnRef>
+          <a:fillRef idx="3">
+            <a:schemeClr val="accent1"/>
+          </a:fillRef>
+          <a:effectRef idx="2">
+            <a:schemeClr val="accent1"/>
+          </a:effectRef>
+          <a:fontRef idx="minor">
+            <a:schemeClr val="lt1"/>
+          </a:fontRef>
+        </p:style>
+        <p:txBody>
+          <a:bodyPr rtlCol="0" anchor="ctr"/>
+          <a:lstStyle/>
+          <a:p>
+            <a:pPr algn="ctr"/>
+            <a:endParaRPr sz="1050"/>
+          </a:p>
+        </p:txBody>
+      </p:sp>
+      <p:sp>
+        <p:nvSpPr>
+          <p:cNvPr id="48" name="TextBox 47"/>
+          <p:cNvSpPr txBox="1"/>
+          <p:nvPr/>
+        </p:nvSpPr>
+        <p:spPr>
+          <a:xfrm>
+            <a:off x="466344" y="3634740"/>
+            <a:ext cx="1330452" cy="150041"/>
+          </a:xfrm>
+          <a:prstGeom prst="rect">
+            <a:avLst/>
+          </a:prstGeom>
+          <a:noFill/>
+        </p:spPr>
+        <p:txBody>
+          <a:bodyPr wrap="square" lIns="0" tIns="0" rIns="0" bIns="0" anchor="t">
+            <a:spAutoFit/>
+          </a:bodyPr>
+          <a:lstStyle/>
+          <a:p>
+            <a:pPr>
+              <a:spcAft>
+                <a:spcPts val="225"/>
+              </a:spcAft>
+            </a:pPr>
+            <a:r>
+              <a:rPr sz="975" b="1">
+                <a:solidFill>
+                  <a:srgbClr val="12343B"/>
+                </a:solidFill>
+                <a:latin typeface="Calibri"/>
+              </a:rPr>
+              <a:t>How they talk</a:t>
+            </a:r>
+          </a:p>
+        </p:txBody>
+      </p:sp>
+      <p:cxnSp>
+        <p:nvCxnSpPr>
+          <p:cNvPr id="49" name="Connector 48"/>
+          <p:cNvCxnSpPr/>
+          <p:nvPr/>
+        </p:nvCxnSpPr>
+        <p:spPr>
+          <a:xfrm>
+            <a:off x="466344" y="3963924"/>
+            <a:ext cx="342900" cy="0"/>
+          </a:xfrm>
+          <a:prstGeom prst="line">
+            <a:avLst/>
+          </a:prstGeom>
+          <a:ln w="22225">
+            <a:solidFill>
+              <a:srgbClr val="C27C00"/>
+            </a:solidFill>
+            <a:tailEnd type="triangle" w="med" len="med"/>
+          </a:ln>
+        </p:spPr>
+        <p:style>
+          <a:lnRef idx="2">
+            <a:schemeClr val="accent1"/>
+          </a:lnRef>
+          <a:fillRef idx="0">
+            <a:schemeClr val="accent1"/>
+          </a:fillRef>
+          <a:effectRef idx="1">
+            <a:schemeClr val="accent1"/>
+          </a:effectRef>
+          <a:fontRef idx="minor">
+            <a:schemeClr val="tx1"/>
+          </a:fontRef>
+        </p:style>
+      </p:cxnSp>
+      <p:sp>
+        <p:nvSpPr>
+          <p:cNvPr id="50" name="TextBox 49"/>
+          <p:cNvSpPr txBox="1"/>
+          <p:nvPr/>
+        </p:nvSpPr>
+        <p:spPr>
+          <a:xfrm>
+            <a:off x="891541" y="3907304"/>
+            <a:ext cx="925829" cy="126958"/>
+          </a:xfrm>
+          <a:prstGeom prst="rect">
+            <a:avLst/>
+          </a:prstGeom>
+          <a:noFill/>
+        </p:spPr>
+        <p:txBody>
+          <a:bodyPr wrap="square" lIns="0" tIns="0" rIns="0" bIns="0" anchor="ctr">
+            <a:spAutoFit/>
+          </a:bodyPr>
+          <a:lstStyle/>
+          <a:p>
+            <a:pPr>
+              <a:spcAft>
+                <a:spcPts val="225"/>
+              </a:spcAft>
+            </a:pPr>
+            <a:r>
+              <a:rPr sz="825">
+                <a:solidFill>
+                  <a:srgbClr val="4A5A5D"/>
+                </a:solidFill>
+                <a:latin typeface="Calibri"/>
+              </a:rPr>
+              <a:t>HTTPS request</a:t>
+            </a:r>
+          </a:p>
+        </p:txBody>
+      </p:sp>
+      <p:cxnSp>
+        <p:nvCxnSpPr>
+          <p:cNvPr id="51" name="Connector 50"/>
+          <p:cNvCxnSpPr/>
+          <p:nvPr/>
+        </p:nvCxnSpPr>
+        <p:spPr>
+          <a:xfrm>
+            <a:off x="466344" y="4169664"/>
+            <a:ext cx="342900" cy="0"/>
+          </a:xfrm>
+          <a:prstGeom prst="line">
+            <a:avLst/>
+          </a:prstGeom>
+          <a:ln w="22225">
+            <a:solidFill>
+              <a:srgbClr val="1F6F6B"/>
+            </a:solidFill>
+            <a:tailEnd type="triangle" w="med" len="med"/>
+          </a:ln>
+        </p:spPr>
+        <p:style>
+          <a:lnRef idx="2">
+            <a:schemeClr val="accent1"/>
+          </a:lnRef>
+          <a:fillRef idx="0">
+            <a:schemeClr val="accent1"/>
+          </a:fillRef>
+          <a:effectRef idx="1">
+            <a:schemeClr val="accent1"/>
+          </a:effectRef>
+          <a:fontRef idx="minor">
+            <a:schemeClr val="tx1"/>
+          </a:fontRef>
+        </p:style>
+      </p:cxnSp>
+      <p:sp>
+        <p:nvSpPr>
+          <p:cNvPr id="52" name="TextBox 51"/>
+          <p:cNvSpPr txBox="1"/>
+          <p:nvPr/>
+        </p:nvSpPr>
+        <p:spPr>
+          <a:xfrm>
+            <a:off x="891541" y="4113044"/>
+            <a:ext cx="925829" cy="126958"/>
+          </a:xfrm>
+          <a:prstGeom prst="rect">
+            <a:avLst/>
+          </a:prstGeom>
+          <a:noFill/>
+        </p:spPr>
+        <p:txBody>
+          <a:bodyPr wrap="square" lIns="0" tIns="0" rIns="0" bIns="0" anchor="ctr">
+            <a:spAutoFit/>
+          </a:bodyPr>
+          <a:lstStyle/>
+          <a:p>
+            <a:pPr>
+              <a:spcAft>
+                <a:spcPts val="225"/>
+              </a:spcAft>
+            </a:pPr>
+            <a:r>
+              <a:rPr sz="825">
+                <a:solidFill>
+                  <a:srgbClr val="4A5A5D"/>
+                </a:solidFill>
+                <a:latin typeface="Calibri"/>
+              </a:rPr>
+              <a:t>ADK state handoff</a:t>
+            </a:r>
+          </a:p>
+        </p:txBody>
+      </p:sp>
+      <p:cxnSp>
+        <p:nvCxnSpPr>
+          <p:cNvPr id="53" name="Connector 52"/>
+          <p:cNvCxnSpPr/>
+          <p:nvPr/>
+        </p:nvCxnSpPr>
+        <p:spPr>
+          <a:xfrm>
+            <a:off x="466344" y="4375404"/>
+            <a:ext cx="342900" cy="0"/>
+          </a:xfrm>
+          <a:prstGeom prst="line">
+            <a:avLst/>
+          </a:prstGeom>
+          <a:ln w="22225">
+            <a:solidFill>
+              <a:srgbClr val="1F6F6B"/>
+            </a:solidFill>
+            <a:prstDash val="dash"/>
+            <a:tailEnd type="triangle" w="med" len="med"/>
+          </a:ln>
+        </p:spPr>
+        <p:style>
+          <a:lnRef idx="2">
+            <a:schemeClr val="accent1"/>
+          </a:lnRef>
+          <a:fillRef idx="0">
+            <a:schemeClr val="accent1"/>
+          </a:fillRef>
+          <a:effectRef idx="1">
+            <a:schemeClr val="accent1"/>
+          </a:effectRef>
+          <a:fontRef idx="minor">
+            <a:schemeClr val="tx1"/>
+          </a:fontRef>
+        </p:style>
+      </p:cxnSp>
+      <p:sp>
+        <p:nvSpPr>
+          <p:cNvPr id="54" name="TextBox 53"/>
+          <p:cNvSpPr txBox="1"/>
+          <p:nvPr/>
+        </p:nvSpPr>
+        <p:spPr>
+          <a:xfrm>
+            <a:off x="891541" y="4318784"/>
+            <a:ext cx="925829" cy="126958"/>
+          </a:xfrm>
+          <a:prstGeom prst="rect">
+            <a:avLst/>
+          </a:prstGeom>
+          <a:noFill/>
+        </p:spPr>
+        <p:txBody>
+          <a:bodyPr wrap="square" lIns="0" tIns="0" rIns="0" bIns="0" anchor="ctr">
+            <a:spAutoFit/>
+          </a:bodyPr>
+          <a:lstStyle/>
+          <a:p>
+            <a:pPr>
+              <a:spcAft>
+                <a:spcPts val="225"/>
+              </a:spcAft>
+            </a:pPr>
+            <a:r>
+              <a:rPr sz="825">
+                <a:solidFill>
+                  <a:srgbClr val="4A5A5D"/>
+                </a:solidFill>
+                <a:latin typeface="Calibri"/>
+              </a:rPr>
+              <a:t>MCP tool call</a:t>
+            </a:r>
+          </a:p>
+        </p:txBody>
+      </p:sp>
+      <p:cxnSp>
+        <p:nvCxnSpPr>
+          <p:cNvPr id="55" name="Connector 54"/>
+          <p:cNvCxnSpPr/>
+          <p:nvPr/>
+        </p:nvCxnSpPr>
+        <p:spPr>
+          <a:xfrm>
+            <a:off x="466344" y="4581144"/>
+            <a:ext cx="342900" cy="0"/>
+          </a:xfrm>
+          <a:prstGeom prst="line">
+            <a:avLst/>
+          </a:prstGeom>
+          <a:ln w="22225">
+            <a:solidFill>
+              <a:srgbClr val="C27C00"/>
+            </a:solidFill>
+            <a:prstDash val="sysDot"/>
+            <a:tailEnd type="triangle" w="med" len="med"/>
+          </a:ln>
+        </p:spPr>
+        <p:style>
+          <a:lnRef idx="2">
+            <a:schemeClr val="accent1"/>
+          </a:lnRef>
+          <a:fillRef idx="0">
+            <a:schemeClr val="accent1"/>
+          </a:fillRef>
+          <a:effectRef idx="1">
+            <a:schemeClr val="accent1"/>
+          </a:effectRef>
+          <a:fontRef idx="minor">
+            <a:schemeClr val="tx1"/>
+          </a:fontRef>
+        </p:style>
+      </p:cxnSp>
+      <p:sp>
+        <p:nvSpPr>
+          <p:cNvPr id="56" name="TextBox 55"/>
+          <p:cNvSpPr txBox="1"/>
+          <p:nvPr/>
+        </p:nvSpPr>
+        <p:spPr>
+          <a:xfrm>
+            <a:off x="891541" y="4524524"/>
+            <a:ext cx="925829" cy="126958"/>
+          </a:xfrm>
+          <a:prstGeom prst="rect">
+            <a:avLst/>
+          </a:prstGeom>
+          <a:noFill/>
+        </p:spPr>
+        <p:txBody>
+          <a:bodyPr wrap="square" lIns="0" tIns="0" rIns="0" bIns="0" anchor="ctr">
+            <a:spAutoFit/>
+          </a:bodyPr>
+          <a:lstStyle/>
+          <a:p>
+            <a:pPr>
+              <a:spcAft>
+                <a:spcPts val="225"/>
+              </a:spcAft>
+            </a:pPr>
+            <a:r>
+              <a:rPr sz="825">
+                <a:solidFill>
+                  <a:srgbClr val="4A5A5D"/>
+                </a:solidFill>
+                <a:latin typeface="Calibri"/>
+              </a:rPr>
+              <a:t>Python function call</a:t>
+            </a:r>
           </a:p>
         </p:txBody>
       </p:sp>
